--- a/slides/output/Career_Canvas_Meeting_7_Showcase_Your_Work.pptx
+++ b/slides/output/Career_Canvas_Meeting_7_Showcase_Your_Work.pptx
@@ -2,23 +2,23 @@
 <file path=ppt/presentation.xml><?xml version="1.0" encoding="utf-8"?>
 <p:presentation xmlns:p="http://schemas.openxmlformats.org/presentationml/2006/main">
   <p:sldMasterIdLst>
-    <p:sldMasterId xmlns:r="http://schemas.openxmlformats.org/officeDocument/2006/relationships" id="2147483648" r:id="R30a37d705c3c40b0"/>
+    <p:sldMasterId xmlns:r="http://schemas.openxmlformats.org/officeDocument/2006/relationships" id="2147483648" r:id="Re57498cdb38d4114"/>
   </p:sldMasterIdLst>
   <p:notesMasterIdLst>
-    <p:notesMasterId xmlns:r="http://schemas.openxmlformats.org/officeDocument/2006/relationships" r:id="R1bf9e645d2104b6b"/>
+    <p:notesMasterId xmlns:r="http://schemas.openxmlformats.org/officeDocument/2006/relationships" r:id="R007a604f547f4c7c"/>
   </p:notesMasterIdLst>
   <p:sldIdLst>
-    <p:sldId xmlns:r="http://schemas.openxmlformats.org/officeDocument/2006/relationships" id="256" r:id="Rd9d340684a4c4dff"/>
-    <p:sldId xmlns:r="http://schemas.openxmlformats.org/officeDocument/2006/relationships" id="257" r:id="R02ec12a0d0b34e6b"/>
-    <p:sldId xmlns:r="http://schemas.openxmlformats.org/officeDocument/2006/relationships" id="258" r:id="Rbf3cb595bd6c4137"/>
-    <p:sldId xmlns:r="http://schemas.openxmlformats.org/officeDocument/2006/relationships" id="259" r:id="Rd053081418064098"/>
-    <p:sldId xmlns:r="http://schemas.openxmlformats.org/officeDocument/2006/relationships" id="260" r:id="Rf6e1e3d368394f4c"/>
-    <p:sldId xmlns:r="http://schemas.openxmlformats.org/officeDocument/2006/relationships" id="261" r:id="R7dbf1a8522454935"/>
-    <p:sldId xmlns:r="http://schemas.openxmlformats.org/officeDocument/2006/relationships" id="262" r:id="R8dce02e75ec841f0"/>
-    <p:sldId xmlns:r="http://schemas.openxmlformats.org/officeDocument/2006/relationships" id="263" r:id="Rc7d5ddc64b544f53"/>
-    <p:sldId xmlns:r="http://schemas.openxmlformats.org/officeDocument/2006/relationships" id="264" r:id="Re0ba88d016514543"/>
-    <p:sldId xmlns:r="http://schemas.openxmlformats.org/officeDocument/2006/relationships" id="265" r:id="R693a068e4086493e"/>
-    <p:sldId xmlns:r="http://schemas.openxmlformats.org/officeDocument/2006/relationships" id="266" r:id="R5b0b5e606b8f431a"/>
+    <p:sldId xmlns:r="http://schemas.openxmlformats.org/officeDocument/2006/relationships" id="256" r:id="R4f6a012f68c1489b"/>
+    <p:sldId xmlns:r="http://schemas.openxmlformats.org/officeDocument/2006/relationships" id="257" r:id="Rb4321d28e3954702"/>
+    <p:sldId xmlns:r="http://schemas.openxmlformats.org/officeDocument/2006/relationships" id="258" r:id="R8506bf802d36483c"/>
+    <p:sldId xmlns:r="http://schemas.openxmlformats.org/officeDocument/2006/relationships" id="259" r:id="Rb24c069393f54ed4"/>
+    <p:sldId xmlns:r="http://schemas.openxmlformats.org/officeDocument/2006/relationships" id="260" r:id="R1362e0c2ac954079"/>
+    <p:sldId xmlns:r="http://schemas.openxmlformats.org/officeDocument/2006/relationships" id="261" r:id="R5d91fae6ae1c46c1"/>
+    <p:sldId xmlns:r="http://schemas.openxmlformats.org/officeDocument/2006/relationships" id="262" r:id="Rd8d2bd7bf3bf4bd9"/>
+    <p:sldId xmlns:r="http://schemas.openxmlformats.org/officeDocument/2006/relationships" id="263" r:id="R804b65523ed64bd7"/>
+    <p:sldId xmlns:r="http://schemas.openxmlformats.org/officeDocument/2006/relationships" id="264" r:id="R71b1a1b732f54b43"/>
+    <p:sldId xmlns:r="http://schemas.openxmlformats.org/officeDocument/2006/relationships" id="265" r:id="Rc64c52c1ecd24e6b"/>
+    <p:sldId xmlns:r="http://schemas.openxmlformats.org/officeDocument/2006/relationships" id="266" r:id="R816da1b8a49d450a"/>
   </p:sldIdLst>
   <p:sldSz cx="12192000" cy="6858000"/>
   <p:notesSz cx="6858000" cy="9144000"/>
@@ -1340,7 +1340,7 @@
   </p:cSld>
   <p:clrMap bg1="lt1" tx1="dk1" bg2="lt2" tx2="dk2" accent1="accent1" accent2="accent2" accent3="accent3" accent4="accent4" accent5="accent5" accent6="accent6" hlink="hlink" folHlink="folHlink"/>
   <p:sldLayoutIdLst>
-    <p:sldLayoutId xmlns:r="http://schemas.openxmlformats.org/officeDocument/2006/relationships" id="2147483649" r:id="R3272f14588ea48cf"/>
+    <p:sldLayoutId xmlns:r="http://schemas.openxmlformats.org/officeDocument/2006/relationships" id="2147483649" r:id="R7a48e56594ad4c14"/>
   </p:sldLayoutIdLst>
   <p:txStyles>
     <p:titleStyle>
@@ -1888,10 +1888,10 @@
       </p:grpSpPr>
       <p:sp>
         <p:nvSpPr>
-          <p:cNvPr id="11" name="">
-            <a:extLst xmlns:a="http://schemas.openxmlformats.org/drawingml/2006/main">
-              <a:ext uri="{FF2B5EF4-FFF2-40B4-BE49-F238E27FC236}">
-                <a16:creationId xmlns:a16="http://schemas.microsoft.com/office/drawing/2014/main" id="{E14AF1BA-9EAA-4006-92CF-EBE7703B2F14}"/>
+          <p:cNvPr id="12" name="">
+            <a:extLst xmlns:a="http://schemas.openxmlformats.org/drawingml/2006/main">
+              <a:ext uri="{FF2B5EF4-FFF2-40B4-BE49-F238E27FC236}">
+                <a16:creationId xmlns:a16="http://schemas.microsoft.com/office/drawing/2014/main" id="{984EE395-A7E9-418E-BBF1-AB5CA1FCD2B0}"/>
               </a:ext>
             </a:extLst>
           </p:cNvPr>
@@ -1909,7 +1909,7 @@
             <a:avLst/>
           </a:prstGeom>
           <a:solidFill xmlns:a="http://schemas.openxmlformats.org/drawingml/2006/main">
-            <a:srgbClr val="EEF7FF"/>
+            <a:srgbClr val="0F1A2B"/>
           </a:solidFill>
           <a:ln xmlns:a="http://schemas.openxmlformats.org/drawingml/2006/main" w="0">
             <a:noFill/>
@@ -1921,27 +1921,27 @@
           <p:cNvPr id="2" name="">
             <a:extLst xmlns:a="http://schemas.openxmlformats.org/drawingml/2006/main">
               <a:ext uri="{FF2B5EF4-FFF2-40B4-BE49-F238E27FC236}">
-                <a16:creationId xmlns:a16="http://schemas.microsoft.com/office/drawing/2014/main" id="{F8B42DEC-A009-4BA2-9896-64609C83F0EE}"/>
-              </a:ext>
-            </a:extLst>
-          </p:cNvPr>
-          <p:cNvSpPr>
-            <a:spLocks xmlns:a="http://schemas.openxmlformats.org/drawingml/2006/main" noGrp="1"/>
-          </p:cNvSpPr>
-          <p:nvPr/>
-        </p:nvSpPr>
-        <p:spPr>
-          <a:xfrm xmlns:a="http://schemas.openxmlformats.org/drawingml/2006/main">
-            <a:off x="7239000" y="1143000"/>
-            <a:ext cx="4381500" cy="4572000"/>
+                <a16:creationId xmlns:a16="http://schemas.microsoft.com/office/drawing/2014/main" id="{DC5B6C9F-B8D1-4FCB-9788-B15C71DAE156}"/>
+              </a:ext>
+            </a:extLst>
+          </p:cNvPr>
+          <p:cNvSpPr>
+            <a:spLocks xmlns:a="http://schemas.openxmlformats.org/drawingml/2006/main" noGrp="1"/>
+          </p:cNvSpPr>
+          <p:nvPr/>
+        </p:nvSpPr>
+        <p:spPr>
+          <a:xfrm xmlns:a="http://schemas.openxmlformats.org/drawingml/2006/main">
+            <a:off x="7239000" y="1333500"/>
+            <a:ext cx="4381500" cy="4191000"/>
           </a:xfrm>
           <a:prstGeom xmlns:a="http://schemas.openxmlformats.org/drawingml/2006/main" prst="roundRect">
             <a:avLst>
-              <a:gd name="adj" fmla="val 1739"/>
+              <a:gd name="adj" fmla="val 1818"/>
             </a:avLst>
           </a:prstGeom>
           <a:solidFill xmlns:a="http://schemas.openxmlformats.org/drawingml/2006/main">
-            <a:srgbClr val="092454"/>
+            <a:srgbClr val="1C2E4A"/>
           </a:solidFill>
           <a:ln xmlns:a="http://schemas.openxmlformats.org/drawingml/2006/main" w="0">
             <a:noFill/>
@@ -1953,18 +1953,18 @@
           <p:cNvPr id="3" name="">
             <a:extLst xmlns:a="http://schemas.openxmlformats.org/drawingml/2006/main">
               <a:ext uri="{FF2B5EF4-FFF2-40B4-BE49-F238E27FC236}">
-                <a16:creationId xmlns:a16="http://schemas.microsoft.com/office/drawing/2014/main" id="{5E5DC602-C8D2-4330-B9D5-42B60323EA38}"/>
-              </a:ext>
-            </a:extLst>
-          </p:cNvPr>
-          <p:cNvSpPr>
-            <a:spLocks xmlns:a="http://schemas.openxmlformats.org/drawingml/2006/main" noGrp="1"/>
-          </p:cNvSpPr>
-          <p:nvPr/>
-        </p:nvSpPr>
-        <p:spPr>
-          <a:xfrm xmlns:a="http://schemas.openxmlformats.org/drawingml/2006/main">
-            <a:off x="7620000" y="1600200"/>
+                <a16:creationId xmlns:a16="http://schemas.microsoft.com/office/drawing/2014/main" id="{1CF040F2-5F27-4B0A-BE7E-EEDD2F500AF0}"/>
+              </a:ext>
+            </a:extLst>
+          </p:cNvPr>
+          <p:cNvSpPr>
+            <a:spLocks xmlns:a="http://schemas.openxmlformats.org/drawingml/2006/main" noGrp="1"/>
+          </p:cNvSpPr>
+          <p:nvPr/>
+        </p:nvSpPr>
+        <p:spPr>
+          <a:xfrm xmlns:a="http://schemas.openxmlformats.org/drawingml/2006/main">
+            <a:off x="7620000" y="1771650"/>
             <a:ext cx="3619500" cy="266700"/>
           </a:xfrm>
           <a:prstGeom xmlns:a="http://schemas.openxmlformats.org/drawingml/2006/main" prst="rect">
@@ -1982,19 +1982,19 @@
           <a:lstStyle xmlns:a="http://schemas.openxmlformats.org/drawingml/2006/main"/>
           <a:p xmlns:a="http://schemas.openxmlformats.org/drawingml/2006/main">
             <a:pPr algn="l">
-              <a:defRPr sz="1125" b="1">
-                <a:solidFill>
-                  <a:srgbClr val="FFD43B"/>
-                </a:solidFill>
-                <a:latin typeface="Helvetica Neue"/>
-                <a:ea typeface="Helvetica Neue"/>
-                <a:cs typeface="Helvetica Neue"/>
-              </a:defRPr>
-            </a:pPr>
-            <a:r>
-              <a:rPr sz="1125" b="1">
-                <a:solidFill>
-                  <a:srgbClr val="FFD43B"/>
+              <a:defRPr sz="1050" b="1">
+                <a:solidFill>
+                  <a:srgbClr val="D1CFC9"/>
+                </a:solidFill>
+                <a:latin typeface="Helvetica Neue"/>
+                <a:ea typeface="Helvetica Neue"/>
+                <a:cs typeface="Helvetica Neue"/>
+              </a:defRPr>
+            </a:pPr>
+            <a:r>
+              <a:rPr sz="1050" b="1">
+                <a:solidFill>
+                  <a:srgbClr val="D1CFC9"/>
                 </a:solidFill>
                 <a:latin typeface="Helvetica Neue"/>
                 <a:ea typeface="Helvetica Neue"/>
@@ -2010,156 +2010,19 @@
           <p:cNvPr id="4" name="">
             <a:extLst xmlns:a="http://schemas.openxmlformats.org/drawingml/2006/main">
               <a:ext uri="{FF2B5EF4-FFF2-40B4-BE49-F238E27FC236}">
-                <a16:creationId xmlns:a16="http://schemas.microsoft.com/office/drawing/2014/main" id="{D74320BF-54A2-4B51-BEBE-C88A2B9FEB3D}"/>
-              </a:ext>
-            </a:extLst>
-          </p:cNvPr>
-          <p:cNvSpPr>
-            <a:spLocks xmlns:a="http://schemas.openxmlformats.org/drawingml/2006/main" noGrp="1"/>
-          </p:cNvSpPr>
-          <p:nvPr/>
-        </p:nvSpPr>
-        <p:spPr>
-          <a:xfrm xmlns:a="http://schemas.openxmlformats.org/drawingml/2006/main">
-            <a:off x="7620000" y="2114550"/>
-            <a:ext cx="3657600" cy="2857500"/>
-          </a:xfrm>
-          <a:prstGeom xmlns:a="http://schemas.openxmlformats.org/drawingml/2006/main" prst="rect">
-            <a:avLst/>
-          </a:prstGeom>
-          <a:noFill xmlns:a="http://schemas.openxmlformats.org/drawingml/2006/main"/>
-          <a:ln xmlns:a="http://schemas.openxmlformats.org/drawingml/2006/main" w="0">
-            <a:noFill/>
-          </a:ln>
-        </p:spPr>
-        <p:txBody>
-          <a:bodyPr xmlns:a="http://schemas.openxmlformats.org/drawingml/2006/main" anchor="t">
-            <a:noAutofit/>
-          </a:bodyPr>
-          <a:lstStyle xmlns:a="http://schemas.openxmlformats.org/drawingml/2006/main"/>
-          <a:p xmlns:a="http://schemas.openxmlformats.org/drawingml/2006/main">
-            <a:pPr algn="l">
-              <a:defRPr sz="3000" b="1">
-                <a:solidFill>
-                  <a:srgbClr val="FFFFFF"/>
-                </a:solidFill>
-                <a:latin typeface="Helvetica Neue"/>
-                <a:ea typeface="Helvetica Neue"/>
-                <a:cs typeface="Helvetica Neue"/>
-              </a:defRPr>
-            </a:pPr>
-            <a:r>
-              <a:rPr sz="3000" b="1">
-                <a:solidFill>
-                  <a:srgbClr val="FFFFFF"/>
-                </a:solidFill>
-                <a:latin typeface="Helvetica Neue"/>
-                <a:ea typeface="Helvetica Neue"/>
-                <a:cs typeface="Helvetica Neue"/>
-              </a:rPr>
-              <a:t>Showcase</a:t>
-            </a:r>
-          </a:p>
-          <a:p xmlns:a="http://schemas.openxmlformats.org/drawingml/2006/main">
-            <a:pPr algn="l">
-              <a:defRPr sz="3000" b="1">
-                <a:solidFill>
-                  <a:srgbClr val="FFFFFF"/>
-                </a:solidFill>
-                <a:latin typeface="Helvetica Neue"/>
-                <a:ea typeface="Helvetica Neue"/>
-                <a:cs typeface="Helvetica Neue"/>
-              </a:defRPr>
-            </a:pPr>
-            <a:r>
-              <a:rPr sz="3000" b="1">
-                <a:solidFill>
-                  <a:srgbClr val="FFFFFF"/>
-                </a:solidFill>
-                <a:latin typeface="Helvetica Neue"/>
-                <a:ea typeface="Helvetica Neue"/>
-                <a:cs typeface="Helvetica Neue"/>
-              </a:rPr>
-              <a:t>your work</a:t>
-            </a:r>
-          </a:p>
-        </p:txBody>
-      </p:sp>
-      <p:sp>
-        <p:nvSpPr>
-          <p:cNvPr id="5" name="">
-            <a:extLst xmlns:a="http://schemas.openxmlformats.org/drawingml/2006/main">
-              <a:ext uri="{FF2B5EF4-FFF2-40B4-BE49-F238E27FC236}">
-                <a16:creationId xmlns:a16="http://schemas.microsoft.com/office/drawing/2014/main" id="{4D54B652-8A31-442D-9B43-40C9DA80E8BB}"/>
-              </a:ext>
-            </a:extLst>
-          </p:cNvPr>
-          <p:cNvSpPr>
-            <a:spLocks xmlns:a="http://schemas.openxmlformats.org/drawingml/2006/main" noGrp="1"/>
-          </p:cNvSpPr>
-          <p:nvPr/>
-        </p:nvSpPr>
-        <p:spPr>
-          <a:xfrm xmlns:a="http://schemas.openxmlformats.org/drawingml/2006/main">
-            <a:off x="685800" y="552450"/>
-            <a:ext cx="2857500" cy="247650"/>
-          </a:xfrm>
-          <a:prstGeom xmlns:a="http://schemas.openxmlformats.org/drawingml/2006/main" prst="rect">
-            <a:avLst/>
-          </a:prstGeom>
-          <a:noFill xmlns:a="http://schemas.openxmlformats.org/drawingml/2006/main"/>
-          <a:ln xmlns:a="http://schemas.openxmlformats.org/drawingml/2006/main" w="0">
-            <a:noFill/>
-          </a:ln>
-        </p:spPr>
-        <p:txBody>
-          <a:bodyPr xmlns:a="http://schemas.openxmlformats.org/drawingml/2006/main" anchor="t">
-            <a:noAutofit/>
-          </a:bodyPr>
-          <a:lstStyle xmlns:a="http://schemas.openxmlformats.org/drawingml/2006/main"/>
-          <a:p xmlns:a="http://schemas.openxmlformats.org/drawingml/2006/main">
-            <a:pPr algn="l">
-              <a:defRPr sz="1200" b="1">
-                <a:solidFill>
-                  <a:srgbClr val="2563EB"/>
-                </a:solidFill>
-                <a:latin typeface="Helvetica Neue"/>
-                <a:ea typeface="Helvetica Neue"/>
-                <a:cs typeface="Helvetica Neue"/>
-              </a:defRPr>
-            </a:pPr>
-            <a:r>
-              <a:rPr sz="1200" b="1">
-                <a:solidFill>
-                  <a:srgbClr val="2563EB"/>
-                </a:solidFill>
-                <a:latin typeface="Helvetica Neue"/>
-                <a:ea typeface="Helvetica Neue"/>
-                <a:cs typeface="Helvetica Neue"/>
-              </a:rPr>
-              <a:t>CAREER CANVAS</a:t>
-            </a:r>
-          </a:p>
-        </p:txBody>
-      </p:sp>
-      <p:sp>
-        <p:nvSpPr>
-          <p:cNvPr id="6" name="">
-            <a:extLst xmlns:a="http://schemas.openxmlformats.org/drawingml/2006/main">
-              <a:ext uri="{FF2B5EF4-FFF2-40B4-BE49-F238E27FC236}">
-                <a16:creationId xmlns:a16="http://schemas.microsoft.com/office/drawing/2014/main" id="{D649003F-7451-4DDE-8A3F-CD0427944F21}"/>
-              </a:ext>
-            </a:extLst>
-          </p:cNvPr>
-          <p:cNvSpPr>
-            <a:spLocks xmlns:a="http://schemas.openxmlformats.org/drawingml/2006/main" noGrp="1"/>
-          </p:cNvSpPr>
-          <p:nvPr/>
-        </p:nvSpPr>
-        <p:spPr>
-          <a:xfrm xmlns:a="http://schemas.openxmlformats.org/drawingml/2006/main">
-            <a:off x="685800" y="914400"/>
-            <a:ext cx="685800" cy="76200"/>
+                <a16:creationId xmlns:a16="http://schemas.microsoft.com/office/drawing/2014/main" id="{DA4AB5D8-D22B-4B2E-AAD4-B9F15B4AFE4D}"/>
+              </a:ext>
+            </a:extLst>
+          </p:cNvPr>
+          <p:cNvSpPr>
+            <a:spLocks xmlns:a="http://schemas.openxmlformats.org/drawingml/2006/main" noGrp="1"/>
+          </p:cNvSpPr>
+          <p:nvPr/>
+        </p:nvSpPr>
+        <p:spPr>
+          <a:xfrm xmlns:a="http://schemas.openxmlformats.org/drawingml/2006/main">
+            <a:off x="7620000" y="2152650"/>
+            <a:ext cx="571500" cy="57150"/>
           </a:xfrm>
           <a:prstGeom xmlns:a="http://schemas.openxmlformats.org/drawingml/2006/main" prst="roundRect">
             <a:avLst>
@@ -2167,7 +2030,7 @@
             </a:avLst>
           </a:prstGeom>
           <a:solidFill xmlns:a="http://schemas.openxmlformats.org/drawingml/2006/main">
-            <a:srgbClr val="FFD43B"/>
+            <a:srgbClr val="D1CFC9"/>
           </a:solidFill>
           <a:ln xmlns:a="http://schemas.openxmlformats.org/drawingml/2006/main" w="0">
             <a:noFill/>
@@ -2176,10 +2039,179 @@
       </p:sp>
       <p:sp>
         <p:nvSpPr>
+          <p:cNvPr id="5" name="">
+            <a:extLst xmlns:a="http://schemas.openxmlformats.org/drawingml/2006/main">
+              <a:ext uri="{FF2B5EF4-FFF2-40B4-BE49-F238E27FC236}">
+                <a16:creationId xmlns:a16="http://schemas.microsoft.com/office/drawing/2014/main" id="{3AF9C073-907C-4D38-A62F-355E7D3D0F45}"/>
+              </a:ext>
+            </a:extLst>
+          </p:cNvPr>
+          <p:cNvSpPr>
+            <a:spLocks xmlns:a="http://schemas.openxmlformats.org/drawingml/2006/main" noGrp="1"/>
+          </p:cNvSpPr>
+          <p:nvPr/>
+        </p:nvSpPr>
+        <p:spPr>
+          <a:xfrm xmlns:a="http://schemas.openxmlformats.org/drawingml/2006/main">
+            <a:off x="7620000" y="2495550"/>
+            <a:ext cx="3657600" cy="2667000"/>
+          </a:xfrm>
+          <a:prstGeom xmlns:a="http://schemas.openxmlformats.org/drawingml/2006/main" prst="rect">
+            <a:avLst/>
+          </a:prstGeom>
+          <a:noFill xmlns:a="http://schemas.openxmlformats.org/drawingml/2006/main"/>
+          <a:ln xmlns:a="http://schemas.openxmlformats.org/drawingml/2006/main" w="0">
+            <a:noFill/>
+          </a:ln>
+        </p:spPr>
+        <p:txBody>
+          <a:bodyPr xmlns:a="http://schemas.openxmlformats.org/drawingml/2006/main" anchor="t">
+            <a:noAutofit/>
+          </a:bodyPr>
+          <a:lstStyle xmlns:a="http://schemas.openxmlformats.org/drawingml/2006/main"/>
+          <a:p xmlns:a="http://schemas.openxmlformats.org/drawingml/2006/main">
+            <a:pPr algn="l">
+              <a:defRPr sz="2850" b="1">
+                <a:solidFill>
+                  <a:srgbClr val="FFFFFF"/>
+                </a:solidFill>
+                <a:latin typeface="Helvetica Neue"/>
+                <a:ea typeface="Helvetica Neue"/>
+                <a:cs typeface="Helvetica Neue"/>
+              </a:defRPr>
+            </a:pPr>
+            <a:r>
+              <a:rPr sz="2850" b="1">
+                <a:solidFill>
+                  <a:srgbClr val="FFFFFF"/>
+                </a:solidFill>
+                <a:latin typeface="Helvetica Neue"/>
+                <a:ea typeface="Helvetica Neue"/>
+                <a:cs typeface="Helvetica Neue"/>
+              </a:rPr>
+              <a:t>Showcase</a:t>
+            </a:r>
+          </a:p>
+          <a:p xmlns:a="http://schemas.openxmlformats.org/drawingml/2006/main">
+            <a:pPr algn="l">
+              <a:defRPr sz="2850" b="1">
+                <a:solidFill>
+                  <a:srgbClr val="FFFFFF"/>
+                </a:solidFill>
+                <a:latin typeface="Helvetica Neue"/>
+                <a:ea typeface="Helvetica Neue"/>
+                <a:cs typeface="Helvetica Neue"/>
+              </a:defRPr>
+            </a:pPr>
+            <a:r>
+              <a:rPr sz="2850" b="1">
+                <a:solidFill>
+                  <a:srgbClr val="FFFFFF"/>
+                </a:solidFill>
+                <a:latin typeface="Helvetica Neue"/>
+                <a:ea typeface="Helvetica Neue"/>
+                <a:cs typeface="Helvetica Neue"/>
+              </a:rPr>
+              <a:t>your work</a:t>
+            </a:r>
+          </a:p>
+        </p:txBody>
+      </p:sp>
+      <p:sp>
+        <p:nvSpPr>
+          <p:cNvPr id="6" name="">
+            <a:extLst xmlns:a="http://schemas.openxmlformats.org/drawingml/2006/main">
+              <a:ext uri="{FF2B5EF4-FFF2-40B4-BE49-F238E27FC236}">
+                <a16:creationId xmlns:a16="http://schemas.microsoft.com/office/drawing/2014/main" id="{781C0A39-517B-44DF-9233-C4A5157C3BF4}"/>
+              </a:ext>
+            </a:extLst>
+          </p:cNvPr>
+          <p:cNvSpPr>
+            <a:spLocks xmlns:a="http://schemas.openxmlformats.org/drawingml/2006/main" noGrp="1"/>
+          </p:cNvSpPr>
+          <p:nvPr/>
+        </p:nvSpPr>
+        <p:spPr>
+          <a:xfrm xmlns:a="http://schemas.openxmlformats.org/drawingml/2006/main">
+            <a:off x="685800" y="552450"/>
+            <a:ext cx="2857500" cy="247650"/>
+          </a:xfrm>
+          <a:prstGeom xmlns:a="http://schemas.openxmlformats.org/drawingml/2006/main" prst="rect">
+            <a:avLst/>
+          </a:prstGeom>
+          <a:noFill xmlns:a="http://schemas.openxmlformats.org/drawingml/2006/main"/>
+          <a:ln xmlns:a="http://schemas.openxmlformats.org/drawingml/2006/main" w="0">
+            <a:noFill/>
+          </a:ln>
+        </p:spPr>
+        <p:txBody>
+          <a:bodyPr xmlns:a="http://schemas.openxmlformats.org/drawingml/2006/main" anchor="t">
+            <a:noAutofit/>
+          </a:bodyPr>
+          <a:lstStyle xmlns:a="http://schemas.openxmlformats.org/drawingml/2006/main"/>
+          <a:p xmlns:a="http://schemas.openxmlformats.org/drawingml/2006/main">
+            <a:pPr algn="l">
+              <a:defRPr sz="1125" b="1">
+                <a:solidFill>
+                  <a:srgbClr val="52677D"/>
+                </a:solidFill>
+                <a:latin typeface="Helvetica Neue"/>
+                <a:ea typeface="Helvetica Neue"/>
+                <a:cs typeface="Helvetica Neue"/>
+              </a:defRPr>
+            </a:pPr>
+            <a:r>
+              <a:rPr sz="1125" b="1">
+                <a:solidFill>
+                  <a:srgbClr val="52677D"/>
+                </a:solidFill>
+                <a:latin typeface="Helvetica Neue"/>
+                <a:ea typeface="Helvetica Neue"/>
+                <a:cs typeface="Helvetica Neue"/>
+              </a:rPr>
+              <a:t>CAREER CANVAS</a:t>
+            </a:r>
+          </a:p>
+        </p:txBody>
+      </p:sp>
+      <p:sp>
+        <p:nvSpPr>
           <p:cNvPr id="7" name="">
             <a:extLst xmlns:a="http://schemas.openxmlformats.org/drawingml/2006/main">
               <a:ext uri="{FF2B5EF4-FFF2-40B4-BE49-F238E27FC236}">
-                <a16:creationId xmlns:a16="http://schemas.microsoft.com/office/drawing/2014/main" id="{4070D67A-FC77-4418-8DD8-3BE17E9437C0}"/>
+                <a16:creationId xmlns:a16="http://schemas.microsoft.com/office/drawing/2014/main" id="{AA39008B-2B1B-47F2-84E3-D7814295C9CD}"/>
+              </a:ext>
+            </a:extLst>
+          </p:cNvPr>
+          <p:cNvSpPr>
+            <a:spLocks xmlns:a="http://schemas.openxmlformats.org/drawingml/2006/main" noGrp="1"/>
+          </p:cNvSpPr>
+          <p:nvPr/>
+        </p:nvSpPr>
+        <p:spPr>
+          <a:xfrm xmlns:a="http://schemas.openxmlformats.org/drawingml/2006/main">
+            <a:off x="685800" y="914400"/>
+            <a:ext cx="685800" cy="76200"/>
+          </a:xfrm>
+          <a:prstGeom xmlns:a="http://schemas.openxmlformats.org/drawingml/2006/main" prst="roundRect">
+            <a:avLst>
+              <a:gd name="adj" fmla="val 50000"/>
+            </a:avLst>
+          </a:prstGeom>
+          <a:solidFill xmlns:a="http://schemas.openxmlformats.org/drawingml/2006/main">
+            <a:srgbClr val="1C2E4A"/>
+          </a:solidFill>
+          <a:ln xmlns:a="http://schemas.openxmlformats.org/drawingml/2006/main" w="0">
+            <a:noFill/>
+          </a:ln>
+        </p:spPr>
+      </p:sp>
+      <p:sp>
+        <p:nvSpPr>
+          <p:cNvPr id="8" name="">
+            <a:extLst xmlns:a="http://schemas.openxmlformats.org/drawingml/2006/main">
+              <a:ext uri="{FF2B5EF4-FFF2-40B4-BE49-F238E27FC236}">
+                <a16:creationId xmlns:a16="http://schemas.microsoft.com/office/drawing/2014/main" id="{EB464780-5A17-4D6A-BC3B-AAA6E9A334FF}"/>
               </a:ext>
             </a:extLst>
           </p:cNvPr>
@@ -2191,7 +2223,7 @@
         <p:spPr>
           <a:xfrm xmlns:a="http://schemas.openxmlformats.org/drawingml/2006/main">
             <a:off x="685800" y="1447800"/>
-            <a:ext cx="4762500" cy="1771650"/>
+            <a:ext cx="4953000" cy="1809750"/>
           </a:xfrm>
           <a:prstGeom xmlns:a="http://schemas.openxmlformats.org/drawingml/2006/main" prst="rect">
             <a:avLst/>
@@ -2208,19 +2240,19 @@
           <a:lstStyle xmlns:a="http://schemas.openxmlformats.org/drawingml/2006/main"/>
           <a:p xmlns:a="http://schemas.openxmlformats.org/drawingml/2006/main">
             <a:pPr algn="l">
-              <a:defRPr sz="4050" b="1">
-                <a:solidFill>
-                  <a:srgbClr val="092454"/>
-                </a:solidFill>
-                <a:latin typeface="Helvetica Neue"/>
-                <a:ea typeface="Helvetica Neue"/>
-                <a:cs typeface="Helvetica Neue"/>
-              </a:defRPr>
-            </a:pPr>
-            <a:r>
-              <a:rPr sz="4050" b="1">
-                <a:solidFill>
-                  <a:srgbClr val="092454"/>
+              <a:defRPr sz="3900" b="1">
+                <a:solidFill>
+                  <a:srgbClr val="1C2E4A"/>
+                </a:solidFill>
+                <a:latin typeface="Helvetica Neue"/>
+                <a:ea typeface="Helvetica Neue"/>
+                <a:cs typeface="Helvetica Neue"/>
+              </a:defRPr>
+            </a:pPr>
+            <a:r>
+              <a:rPr sz="3900" b="1">
+                <a:solidFill>
+                  <a:srgbClr val="1C2E4A"/>
                 </a:solidFill>
                 <a:latin typeface="Helvetica Neue"/>
                 <a:ea typeface="Helvetica Neue"/>
@@ -2231,19 +2263,19 @@
           </a:p>
           <a:p xmlns:a="http://schemas.openxmlformats.org/drawingml/2006/main">
             <a:pPr algn="l">
-              <a:defRPr sz="4050" b="1">
-                <a:solidFill>
-                  <a:srgbClr val="092454"/>
-                </a:solidFill>
-                <a:latin typeface="Helvetica Neue"/>
-                <a:ea typeface="Helvetica Neue"/>
-                <a:cs typeface="Helvetica Neue"/>
-              </a:defRPr>
-            </a:pPr>
-            <a:r>
-              <a:rPr sz="4050" b="1">
-                <a:solidFill>
-                  <a:srgbClr val="092454"/>
+              <a:defRPr sz="3900" b="1">
+                <a:solidFill>
+                  <a:srgbClr val="1C2E4A"/>
+                </a:solidFill>
+                <a:latin typeface="Helvetica Neue"/>
+                <a:ea typeface="Helvetica Neue"/>
+                <a:cs typeface="Helvetica Neue"/>
+              </a:defRPr>
+            </a:pPr>
+            <a:r>
+              <a:rPr sz="3900" b="1">
+                <a:solidFill>
+                  <a:srgbClr val="1C2E4A"/>
                 </a:solidFill>
                 <a:latin typeface="Helvetica Neue"/>
                 <a:ea typeface="Helvetica Neue"/>
@@ -2256,22 +2288,22 @@
       </p:sp>
       <p:sp>
         <p:nvSpPr>
-          <p:cNvPr id="8" name="">
-            <a:extLst xmlns:a="http://schemas.openxmlformats.org/drawingml/2006/main">
-              <a:ext uri="{FF2B5EF4-FFF2-40B4-BE49-F238E27FC236}">
-                <a16:creationId xmlns:a16="http://schemas.microsoft.com/office/drawing/2014/main" id="{7394429F-5E63-4CBA-9190-910CB3C37D24}"/>
-              </a:ext>
-            </a:extLst>
-          </p:cNvPr>
-          <p:cNvSpPr>
-            <a:spLocks xmlns:a="http://schemas.openxmlformats.org/drawingml/2006/main" noGrp="1"/>
-          </p:cNvSpPr>
-          <p:nvPr/>
-        </p:nvSpPr>
-        <p:spPr>
-          <a:xfrm xmlns:a="http://schemas.openxmlformats.org/drawingml/2006/main">
-            <a:off x="685800" y="3429000"/>
-            <a:ext cx="4476750" cy="1047750"/>
+          <p:cNvPr id="9" name="">
+            <a:extLst xmlns:a="http://schemas.openxmlformats.org/drawingml/2006/main">
+              <a:ext uri="{FF2B5EF4-FFF2-40B4-BE49-F238E27FC236}">
+                <a16:creationId xmlns:a16="http://schemas.microsoft.com/office/drawing/2014/main" id="{28F16FCB-FBB0-4C93-ADFA-F6D026AC9179}"/>
+              </a:ext>
+            </a:extLst>
+          </p:cNvPr>
+          <p:cNvSpPr>
+            <a:spLocks xmlns:a="http://schemas.openxmlformats.org/drawingml/2006/main" noGrp="1"/>
+          </p:cNvSpPr>
+          <p:nvPr/>
+        </p:nvSpPr>
+        <p:spPr>
+          <a:xfrm xmlns:a="http://schemas.openxmlformats.org/drawingml/2006/main">
+            <a:off x="685800" y="3467100"/>
+            <a:ext cx="4762500" cy="1143000"/>
           </a:xfrm>
           <a:prstGeom xmlns:a="http://schemas.openxmlformats.org/drawingml/2006/main" prst="rect">
             <a:avLst/>
@@ -2288,19 +2320,19 @@
           <a:lstStyle xmlns:a="http://schemas.openxmlformats.org/drawingml/2006/main"/>
           <a:p xmlns:a="http://schemas.openxmlformats.org/drawingml/2006/main">
             <a:pPr algn="l">
-              <a:defRPr sz="1650" b="0">
-                <a:solidFill>
-                  <a:srgbClr val="61718A"/>
-                </a:solidFill>
-                <a:latin typeface="Helvetica Neue"/>
-                <a:ea typeface="Helvetica Neue"/>
-                <a:cs typeface="Helvetica Neue"/>
-              </a:defRPr>
-            </a:pPr>
-            <a:r>
-              <a:rPr sz="1650" b="0">
-                <a:solidFill>
-                  <a:srgbClr val="61718A"/>
+              <a:defRPr sz="1575" b="0">
+                <a:solidFill>
+                  <a:srgbClr val="52677D"/>
+                </a:solidFill>
+                <a:latin typeface="Helvetica Neue"/>
+                <a:ea typeface="Helvetica Neue"/>
+                <a:cs typeface="Helvetica Neue"/>
+              </a:defRPr>
+            </a:pPr>
+            <a:r>
+              <a:rPr sz="1575" b="0">
+                <a:solidFill>
+                  <a:srgbClr val="52677D"/>
                 </a:solidFill>
                 <a:latin typeface="Helvetica Neue"/>
                 <a:ea typeface="Helvetica Neue"/>
@@ -2313,21 +2345,21 @@
       </p:sp>
       <p:sp>
         <p:nvSpPr>
-          <p:cNvPr id="9" name="">
-            <a:extLst xmlns:a="http://schemas.openxmlformats.org/drawingml/2006/main">
-              <a:ext uri="{FF2B5EF4-FFF2-40B4-BE49-F238E27FC236}">
-                <a16:creationId xmlns:a16="http://schemas.microsoft.com/office/drawing/2014/main" id="{AFD498D6-0B82-4B5B-8EAF-B9F2149D9CED}"/>
-              </a:ext>
-            </a:extLst>
-          </p:cNvPr>
-          <p:cNvSpPr>
-            <a:spLocks xmlns:a="http://schemas.openxmlformats.org/drawingml/2006/main" noGrp="1"/>
-          </p:cNvSpPr>
-          <p:nvPr/>
-        </p:nvSpPr>
-        <p:spPr>
-          <a:xfrm xmlns:a="http://schemas.openxmlformats.org/drawingml/2006/main">
-            <a:off x="685800" y="5429250"/>
+          <p:cNvPr id="10" name="">
+            <a:extLst xmlns:a="http://schemas.openxmlformats.org/drawingml/2006/main">
+              <a:ext uri="{FF2B5EF4-FFF2-40B4-BE49-F238E27FC236}">
+                <a16:creationId xmlns:a16="http://schemas.microsoft.com/office/drawing/2014/main" id="{12B3EB79-25DF-43C3-9C15-A2FAAAFFE148}"/>
+              </a:ext>
+            </a:extLst>
+          </p:cNvPr>
+          <p:cNvSpPr>
+            <a:spLocks xmlns:a="http://schemas.openxmlformats.org/drawingml/2006/main" noGrp="1"/>
+          </p:cNvSpPr>
+          <p:nvPr/>
+        </p:nvSpPr>
+        <p:spPr>
+          <a:xfrm xmlns:a="http://schemas.openxmlformats.org/drawingml/2006/main">
+            <a:off x="685800" y="5391150"/>
             <a:ext cx="2095500" cy="285750"/>
           </a:xfrm>
           <a:prstGeom xmlns:a="http://schemas.openxmlformats.org/drawingml/2006/main" prst="rect">
@@ -2345,19 +2377,19 @@
           <a:lstStyle xmlns:a="http://schemas.openxmlformats.org/drawingml/2006/main"/>
           <a:p xmlns:a="http://schemas.openxmlformats.org/drawingml/2006/main">
             <a:pPr algn="l">
-              <a:defRPr sz="1350" b="1">
-                <a:solidFill>
-                  <a:srgbClr val="092454"/>
-                </a:solidFill>
-                <a:latin typeface="Helvetica Neue"/>
-                <a:ea typeface="Helvetica Neue"/>
-                <a:cs typeface="Helvetica Neue"/>
-              </a:defRPr>
-            </a:pPr>
-            <a:r>
-              <a:rPr sz="1350" b="1">
-                <a:solidFill>
-                  <a:srgbClr val="092454"/>
+              <a:defRPr sz="1275" b="1">
+                <a:solidFill>
+                  <a:srgbClr val="1C2E4A"/>
+                </a:solidFill>
+                <a:latin typeface="Helvetica Neue"/>
+                <a:ea typeface="Helvetica Neue"/>
+                <a:cs typeface="Helvetica Neue"/>
+              </a:defRPr>
+            </a:pPr>
+            <a:r>
+              <a:rPr sz="1275" b="1">
+                <a:solidFill>
+                  <a:srgbClr val="1C2E4A"/>
                 </a:solidFill>
                 <a:latin typeface="Helvetica Neue"/>
                 <a:ea typeface="Helvetica Neue"/>
@@ -2370,22 +2402,22 @@
       </p:sp>
       <p:sp>
         <p:nvSpPr>
-          <p:cNvPr id="10" name="">
-            <a:extLst xmlns:a="http://schemas.openxmlformats.org/drawingml/2006/main">
-              <a:ext uri="{FF2B5EF4-FFF2-40B4-BE49-F238E27FC236}">
-                <a16:creationId xmlns:a16="http://schemas.microsoft.com/office/drawing/2014/main" id="{D4C8A2A9-D3DF-442E-A8E0-AC08547C9E95}"/>
-              </a:ext>
-            </a:extLst>
-          </p:cNvPr>
-          <p:cNvSpPr>
-            <a:spLocks xmlns:a="http://schemas.openxmlformats.org/drawingml/2006/main" noGrp="1"/>
-          </p:cNvSpPr>
-          <p:nvPr/>
-        </p:nvSpPr>
-        <p:spPr>
-          <a:xfrm xmlns:a="http://schemas.openxmlformats.org/drawingml/2006/main">
-            <a:off x="685800" y="5810250"/>
-            <a:ext cx="3333750" cy="476250"/>
+          <p:cNvPr id="11" name="">
+            <a:extLst xmlns:a="http://schemas.openxmlformats.org/drawingml/2006/main">
+              <a:ext uri="{FF2B5EF4-FFF2-40B4-BE49-F238E27FC236}">
+                <a16:creationId xmlns:a16="http://schemas.microsoft.com/office/drawing/2014/main" id="{1ECD782F-5EA3-441B-81F0-D2C30F4F2A8B}"/>
+              </a:ext>
+            </a:extLst>
+          </p:cNvPr>
+          <p:cNvSpPr>
+            <a:spLocks xmlns:a="http://schemas.openxmlformats.org/drawingml/2006/main" noGrp="1"/>
+          </p:cNvSpPr>
+          <p:nvPr/>
+        </p:nvSpPr>
+        <p:spPr>
+          <a:xfrm xmlns:a="http://schemas.openxmlformats.org/drawingml/2006/main">
+            <a:off x="685800" y="5772150"/>
+            <a:ext cx="3619500" cy="476250"/>
           </a:xfrm>
           <a:prstGeom xmlns:a="http://schemas.openxmlformats.org/drawingml/2006/main" prst="rect">
             <a:avLst/>
@@ -2402,19 +2434,19 @@
           <a:lstStyle xmlns:a="http://schemas.openxmlformats.org/drawingml/2006/main"/>
           <a:p xmlns:a="http://schemas.openxmlformats.org/drawingml/2006/main">
             <a:pPr algn="l">
-              <a:defRPr sz="1050" b="0">
-                <a:solidFill>
-                  <a:srgbClr val="61718A"/>
-                </a:solidFill>
-                <a:latin typeface="Helvetica Neue"/>
-                <a:ea typeface="Helvetica Neue"/>
-                <a:cs typeface="Helvetica Neue"/>
-              </a:defRPr>
-            </a:pPr>
-            <a:r>
-              <a:rPr sz="1050" b="0">
-                <a:solidFill>
-                  <a:srgbClr val="61718A"/>
+              <a:defRPr sz="975" b="0">
+                <a:solidFill>
+                  <a:srgbClr val="52677D"/>
+                </a:solidFill>
+                <a:latin typeface="Helvetica Neue"/>
+                <a:ea typeface="Helvetica Neue"/>
+                <a:cs typeface="Helvetica Neue"/>
+              </a:defRPr>
+            </a:pPr>
+            <a:r>
+              <a:rPr sz="975" b="0">
+                <a:solidFill>
+                  <a:srgbClr val="52677D"/>
                 </a:solidFill>
                 <a:latin typeface="Helvetica Neue"/>
                 <a:ea typeface="Helvetica Neue"/>
@@ -2425,19 +2457,19 @@
           </a:p>
           <a:p xmlns:a="http://schemas.openxmlformats.org/drawingml/2006/main">
             <a:pPr algn="l">
-              <a:defRPr sz="1050" b="0">
-                <a:solidFill>
-                  <a:srgbClr val="61718A"/>
-                </a:solidFill>
-                <a:latin typeface="Helvetica Neue"/>
-                <a:ea typeface="Helvetica Neue"/>
-                <a:cs typeface="Helvetica Neue"/>
-              </a:defRPr>
-            </a:pPr>
-            <a:r>
-              <a:rPr sz="1050" b="0">
-                <a:solidFill>
-                  <a:srgbClr val="61718A"/>
+              <a:defRPr sz="975" b="0">
+                <a:solidFill>
+                  <a:srgbClr val="52677D"/>
+                </a:solidFill>
+                <a:latin typeface="Helvetica Neue"/>
+                <a:ea typeface="Helvetica Neue"/>
+                <a:cs typeface="Helvetica Neue"/>
+              </a:defRPr>
+            </a:pPr>
+            <a:r>
+              <a:rPr sz="975" b="0">
+                <a:solidFill>
+                  <a:srgbClr val="52677D"/>
                 </a:solidFill>
                 <a:latin typeface="Helvetica Neue"/>
                 <a:ea typeface="Helvetica Neue"/>
@@ -2451,7 +2483,7 @@
     </p:spTree>
     <p:extLst>
       <p:ext uri="{BB962C8B-B14F-4D97-AF65-F5344CB8AC3E}">
-        <p14:creationId xmlns:p14="http://schemas.microsoft.com/office/powerpoint/2010/main" val="642748012"/>
+        <p14:creationId xmlns:p14="http://schemas.microsoft.com/office/powerpoint/2010/main" val="1688608192"/>
       </p:ext>
     </p:extLst>
   </p:cSld>
@@ -2482,7 +2514,7 @@
           <p:cNvPr id="15" name="">
             <a:extLst xmlns:a="http://schemas.openxmlformats.org/drawingml/2006/main">
               <a:ext uri="{FF2B5EF4-FFF2-40B4-BE49-F238E27FC236}">
-                <a16:creationId xmlns:a16="http://schemas.microsoft.com/office/drawing/2014/main" id="{5C9E478C-211A-4595-A9C7-A6406A03368A}"/>
+                <a16:creationId xmlns:a16="http://schemas.microsoft.com/office/drawing/2014/main" id="{10A35292-76BA-4613-BD20-B45DB467C336}"/>
               </a:ext>
             </a:extLst>
           </p:cNvPr>
@@ -2513,7 +2545,7 @@
             <a:pPr algn="l">
               <a:defRPr sz="1125" b="1">
                 <a:solidFill>
-                  <a:srgbClr val="2563EB"/>
+                  <a:srgbClr val="52677D"/>
                 </a:solidFill>
                 <a:latin typeface="Helvetica Neue"/>
                 <a:ea typeface="Helvetica Neue"/>
@@ -2523,7 +2555,7 @@
             <a:r>
               <a:rPr sz="1125" b="1">
                 <a:solidFill>
-                  <a:srgbClr val="2563EB"/>
+                  <a:srgbClr val="52677D"/>
                 </a:solidFill>
                 <a:latin typeface="Helvetica Neue"/>
                 <a:ea typeface="Helvetica Neue"/>
@@ -2539,7 +2571,7 @@
           <p:cNvPr id="2" name="">
             <a:extLst xmlns:a="http://schemas.openxmlformats.org/drawingml/2006/main">
               <a:ext uri="{FF2B5EF4-FFF2-40B4-BE49-F238E27FC236}">
-                <a16:creationId xmlns:a16="http://schemas.microsoft.com/office/drawing/2014/main" id="{E01F91DF-7C90-4F6B-A471-7F951898F06F}"/>
+                <a16:creationId xmlns:a16="http://schemas.microsoft.com/office/drawing/2014/main" id="{A389EF90-C1D2-4DE8-BCD9-BF1AF2B73842}"/>
               </a:ext>
             </a:extLst>
           </p:cNvPr>
@@ -2570,7 +2602,7 @@
             <a:pPr algn="l">
               <a:defRPr sz="2550" b="1">
                 <a:solidFill>
-                  <a:srgbClr val="092454"/>
+                  <a:srgbClr val="1C2E4A"/>
                 </a:solidFill>
                 <a:latin typeface="Helvetica Neue"/>
                 <a:ea typeface="Helvetica Neue"/>
@@ -2580,7 +2612,7 @@
             <a:r>
               <a:rPr sz="2550" b="1">
                 <a:solidFill>
-                  <a:srgbClr val="092454"/>
+                  <a:srgbClr val="1C2E4A"/>
                 </a:solidFill>
                 <a:latin typeface="Helvetica Neue"/>
                 <a:ea typeface="Helvetica Neue"/>
@@ -2596,7 +2628,7 @@
           <p:cNvPr id="3" name="">
             <a:extLst xmlns:a="http://schemas.openxmlformats.org/drawingml/2006/main">
               <a:ext uri="{FF2B5EF4-FFF2-40B4-BE49-F238E27FC236}">
-                <a16:creationId xmlns:a16="http://schemas.microsoft.com/office/drawing/2014/main" id="{341913F0-B2BC-4F30-ABF4-38880C3A38AB}"/>
+                <a16:creationId xmlns:a16="http://schemas.microsoft.com/office/drawing/2014/main" id="{F6F4B442-6F99-4736-B78A-3FE712F348D6}"/>
               </a:ext>
             </a:extLst>
           </p:cNvPr>
@@ -2616,7 +2648,7 @@
             </a:avLst>
           </a:prstGeom>
           <a:solidFill xmlns:a="http://schemas.openxmlformats.org/drawingml/2006/main">
-            <a:srgbClr val="EEF7FF"/>
+            <a:srgbClr val="D1CFC9"/>
           </a:solidFill>
           <a:ln xmlns:a="http://schemas.openxmlformats.org/drawingml/2006/main" w="0">
             <a:noFill/>
@@ -2628,7 +2660,7 @@
           <p:cNvPr id="4" name="">
             <a:extLst xmlns:a="http://schemas.openxmlformats.org/drawingml/2006/main">
               <a:ext uri="{FF2B5EF4-FFF2-40B4-BE49-F238E27FC236}">
-                <a16:creationId xmlns:a16="http://schemas.microsoft.com/office/drawing/2014/main" id="{7B1D7C7B-E553-4477-B58A-262CF92AA0A5}"/>
+                <a16:creationId xmlns:a16="http://schemas.microsoft.com/office/drawing/2014/main" id="{DDF2F2E2-B3EA-4B6F-91F1-9D7146017318}"/>
               </a:ext>
             </a:extLst>
           </p:cNvPr>
@@ -2659,7 +2691,7 @@
             <a:pPr algn="l">
               <a:defRPr sz="1125" b="1">
                 <a:solidFill>
-                  <a:srgbClr val="2563EB"/>
+                  <a:srgbClr val="52677D"/>
                 </a:solidFill>
                 <a:latin typeface="Helvetica Neue"/>
                 <a:ea typeface="Helvetica Neue"/>
@@ -2669,7 +2701,7 @@
             <a:r>
               <a:rPr sz="1125" b="1">
                 <a:solidFill>
-                  <a:srgbClr val="2563EB"/>
+                  <a:srgbClr val="52677D"/>
                 </a:solidFill>
                 <a:latin typeface="Helvetica Neue"/>
                 <a:ea typeface="Helvetica Neue"/>
@@ -2685,7 +2717,7 @@
           <p:cNvPr id="5" name="">
             <a:extLst xmlns:a="http://schemas.openxmlformats.org/drawingml/2006/main">
               <a:ext uri="{FF2B5EF4-FFF2-40B4-BE49-F238E27FC236}">
-                <a16:creationId xmlns:a16="http://schemas.microsoft.com/office/drawing/2014/main" id="{4FAE5CD6-0BD6-4C00-8D50-23531BCD3E0A}"/>
+                <a16:creationId xmlns:a16="http://schemas.microsoft.com/office/drawing/2014/main" id="{F929E22F-5370-4761-B638-D2B7D1EC5BE1}"/>
               </a:ext>
             </a:extLst>
           </p:cNvPr>
@@ -2716,7 +2748,7 @@
             <a:pPr algn="l">
               <a:defRPr sz="1800" b="1">
                 <a:solidFill>
-                  <a:srgbClr val="092454"/>
+                  <a:srgbClr val="1C2E4A"/>
                 </a:solidFill>
                 <a:latin typeface="Helvetica Neue"/>
                 <a:ea typeface="Helvetica Neue"/>
@@ -2726,7 +2758,7 @@
             <a:r>
               <a:rPr sz="1800" b="1">
                 <a:solidFill>
-                  <a:srgbClr val="092454"/>
+                  <a:srgbClr val="1C2E4A"/>
                 </a:solidFill>
                 <a:latin typeface="Helvetica Neue"/>
                 <a:ea typeface="Helvetica Neue"/>
@@ -2742,7 +2774,7 @@
           <p:cNvPr id="6" name="">
             <a:extLst xmlns:a="http://schemas.openxmlformats.org/drawingml/2006/main">
               <a:ext uri="{FF2B5EF4-FFF2-40B4-BE49-F238E27FC236}">
-                <a16:creationId xmlns:a16="http://schemas.microsoft.com/office/drawing/2014/main" id="{0F2B9D81-7191-4F14-9248-B54CB84678D3}"/>
+                <a16:creationId xmlns:a16="http://schemas.microsoft.com/office/drawing/2014/main" id="{CCF19B5B-1287-4D6C-8FBB-6CD4BB8758F0}"/>
               </a:ext>
             </a:extLst>
           </p:cNvPr>
@@ -2773,7 +2805,7 @@
             <a:pPr algn="l">
               <a:defRPr sz="1800" b="1">
                 <a:solidFill>
-                  <a:srgbClr val="092454"/>
+                  <a:srgbClr val="1C2E4A"/>
                 </a:solidFill>
                 <a:latin typeface="Helvetica Neue"/>
                 <a:ea typeface="Helvetica Neue"/>
@@ -2783,7 +2815,7 @@
             <a:r>
               <a:rPr sz="1800" b="1">
                 <a:solidFill>
-                  <a:srgbClr val="092454"/>
+                  <a:srgbClr val="1C2E4A"/>
                 </a:solidFill>
                 <a:latin typeface="Helvetica Neue"/>
                 <a:ea typeface="Helvetica Neue"/>
@@ -2799,7 +2831,7 @@
           <p:cNvPr id="7" name="">
             <a:extLst xmlns:a="http://schemas.openxmlformats.org/drawingml/2006/main">
               <a:ext uri="{FF2B5EF4-FFF2-40B4-BE49-F238E27FC236}">
-                <a16:creationId xmlns:a16="http://schemas.microsoft.com/office/drawing/2014/main" id="{18E9EDC2-F388-4369-A9CE-A89ED7260753}"/>
+                <a16:creationId xmlns:a16="http://schemas.microsoft.com/office/drawing/2014/main" id="{B2F423BB-5B50-43D2-A40A-94FA62A9E174}"/>
               </a:ext>
             </a:extLst>
           </p:cNvPr>
@@ -2830,7 +2862,7 @@
             <a:pPr algn="l">
               <a:defRPr sz="1800" b="1">
                 <a:solidFill>
-                  <a:srgbClr val="092454"/>
+                  <a:srgbClr val="1C2E4A"/>
                 </a:solidFill>
                 <a:latin typeface="Helvetica Neue"/>
                 <a:ea typeface="Helvetica Neue"/>
@@ -2840,7 +2872,7 @@
             <a:r>
               <a:rPr sz="1800" b="1">
                 <a:solidFill>
-                  <a:srgbClr val="092454"/>
+                  <a:srgbClr val="1C2E4A"/>
                 </a:solidFill>
                 <a:latin typeface="Helvetica Neue"/>
                 <a:ea typeface="Helvetica Neue"/>
@@ -2856,7 +2888,7 @@
           <p:cNvPr id="8" name="">
             <a:extLst xmlns:a="http://schemas.openxmlformats.org/drawingml/2006/main">
               <a:ext uri="{FF2B5EF4-FFF2-40B4-BE49-F238E27FC236}">
-                <a16:creationId xmlns:a16="http://schemas.microsoft.com/office/drawing/2014/main" id="{52C5021E-C175-4401-A1E7-4F60799EE9B1}"/>
+                <a16:creationId xmlns:a16="http://schemas.microsoft.com/office/drawing/2014/main" id="{C0A0BD02-D4F2-448B-A656-DBD897DD4B99}"/>
               </a:ext>
             </a:extLst>
           </p:cNvPr>
@@ -2876,7 +2908,7 @@
             </a:avLst>
           </a:prstGeom>
           <a:solidFill xmlns:a="http://schemas.openxmlformats.org/drawingml/2006/main">
-            <a:srgbClr val="FFD43B"/>
+            <a:srgbClr val="D1CFC9"/>
           </a:solidFill>
           <a:ln xmlns:a="http://schemas.openxmlformats.org/drawingml/2006/main" w="0">
             <a:noFill/>
@@ -2888,7 +2920,7 @@
           <p:cNvPr id="9" name="">
             <a:extLst xmlns:a="http://schemas.openxmlformats.org/drawingml/2006/main">
               <a:ext uri="{FF2B5EF4-FFF2-40B4-BE49-F238E27FC236}">
-                <a16:creationId xmlns:a16="http://schemas.microsoft.com/office/drawing/2014/main" id="{5D6818B6-D3D4-4BD9-9E48-56D7A1093175}"/>
+                <a16:creationId xmlns:a16="http://schemas.microsoft.com/office/drawing/2014/main" id="{B1BF16FD-11F8-473E-ADFE-EE2854F5B73F}"/>
               </a:ext>
             </a:extLst>
           </p:cNvPr>
@@ -2919,7 +2951,7 @@
             <a:pPr algn="l">
               <a:defRPr sz="1125" b="1">
                 <a:solidFill>
-                  <a:srgbClr val="092454"/>
+                  <a:srgbClr val="1C2E4A"/>
                 </a:solidFill>
                 <a:latin typeface="Helvetica Neue"/>
                 <a:ea typeface="Helvetica Neue"/>
@@ -2929,7 +2961,7 @@
             <a:r>
               <a:rPr sz="1125" b="1">
                 <a:solidFill>
-                  <a:srgbClr val="092454"/>
+                  <a:srgbClr val="1C2E4A"/>
                 </a:solidFill>
                 <a:latin typeface="Helvetica Neue"/>
                 <a:ea typeface="Helvetica Neue"/>
@@ -2945,7 +2977,7 @@
           <p:cNvPr id="10" name="">
             <a:extLst xmlns:a="http://schemas.openxmlformats.org/drawingml/2006/main">
               <a:ext uri="{FF2B5EF4-FFF2-40B4-BE49-F238E27FC236}">
-                <a16:creationId xmlns:a16="http://schemas.microsoft.com/office/drawing/2014/main" id="{8AFD051F-1C57-48C0-A127-8C6193DAC29C}"/>
+                <a16:creationId xmlns:a16="http://schemas.microsoft.com/office/drawing/2014/main" id="{0FAA684B-CFEC-4A76-A534-EE0B6AA0C875}"/>
               </a:ext>
             </a:extLst>
           </p:cNvPr>
@@ -2976,7 +3008,7 @@
             <a:pPr algn="l">
               <a:defRPr sz="2025" b="1">
                 <a:solidFill>
-                  <a:srgbClr val="092454"/>
+                  <a:srgbClr val="1C2E4A"/>
                 </a:solidFill>
                 <a:latin typeface="Helvetica Neue"/>
                 <a:ea typeface="Helvetica Neue"/>
@@ -2986,7 +3018,7 @@
             <a:r>
               <a:rPr sz="2025" b="1">
                 <a:solidFill>
-                  <a:srgbClr val="092454"/>
+                  <a:srgbClr val="1C2E4A"/>
                 </a:solidFill>
                 <a:latin typeface="Helvetica Neue"/>
                 <a:ea typeface="Helvetica Neue"/>
@@ -3002,7 +3034,7 @@
           <p:cNvPr id="11" name="">
             <a:extLst xmlns:a="http://schemas.openxmlformats.org/drawingml/2006/main">
               <a:ext uri="{FF2B5EF4-FFF2-40B4-BE49-F238E27FC236}">
-                <a16:creationId xmlns:a16="http://schemas.microsoft.com/office/drawing/2014/main" id="{A3477EAF-4506-4E0E-B9AE-3407590DADBA}"/>
+                <a16:creationId xmlns:a16="http://schemas.microsoft.com/office/drawing/2014/main" id="{F04E4A84-009B-4077-AEA5-3E91D5EDD28D}"/>
               </a:ext>
             </a:extLst>
           </p:cNvPr>
@@ -3033,7 +3065,7 @@
             <a:pPr algn="l">
               <a:defRPr sz="1650" b="0">
                 <a:solidFill>
-                  <a:srgbClr val="092454"/>
+                  <a:srgbClr val="1C2E4A"/>
                 </a:solidFill>
                 <a:latin typeface="Helvetica Neue"/>
                 <a:ea typeface="Helvetica Neue"/>
@@ -3043,7 +3075,7 @@
             <a:r>
               <a:rPr sz="1650" b="0">
                 <a:solidFill>
-                  <a:srgbClr val="092454"/>
+                  <a:srgbClr val="1C2E4A"/>
                 </a:solidFill>
                 <a:latin typeface="Helvetica Neue"/>
                 <a:ea typeface="Helvetica Neue"/>
@@ -3059,7 +3091,7 @@
           <p:cNvPr id="12" name="">
             <a:extLst xmlns:a="http://schemas.openxmlformats.org/drawingml/2006/main">
               <a:ext uri="{FF2B5EF4-FFF2-40B4-BE49-F238E27FC236}">
-                <a16:creationId xmlns:a16="http://schemas.microsoft.com/office/drawing/2014/main" id="{23865D7B-A01D-44EF-9E2F-869CC4B6E3F1}"/>
+                <a16:creationId xmlns:a16="http://schemas.microsoft.com/office/drawing/2014/main" id="{9CB5BB4C-507F-4803-9BEF-37858B5B6D37}"/>
               </a:ext>
             </a:extLst>
           </p:cNvPr>
@@ -3077,7 +3109,7 @@
             <a:avLst/>
           </a:prstGeom>
           <a:solidFill xmlns:a="http://schemas.openxmlformats.org/drawingml/2006/main">
-            <a:srgbClr val="D8E5F2"/>
+            <a:srgbClr val="BDC4D4"/>
           </a:solidFill>
           <a:ln xmlns:a="http://schemas.openxmlformats.org/drawingml/2006/main" w="0">
             <a:noFill/>
@@ -3089,7 +3121,7 @@
           <p:cNvPr id="13" name="">
             <a:extLst xmlns:a="http://schemas.openxmlformats.org/drawingml/2006/main">
               <a:ext uri="{FF2B5EF4-FFF2-40B4-BE49-F238E27FC236}">
-                <a16:creationId xmlns:a16="http://schemas.microsoft.com/office/drawing/2014/main" id="{9AB00CA9-1CEC-4659-B476-ECA65F322ACC}"/>
+                <a16:creationId xmlns:a16="http://schemas.microsoft.com/office/drawing/2014/main" id="{106D8BD5-B542-4FF8-B957-5C60716BB666}"/>
               </a:ext>
             </a:extLst>
           </p:cNvPr>
@@ -3120,7 +3152,7 @@
             <a:pPr algn="l">
               <a:defRPr sz="750" b="0">
                 <a:solidFill>
-                  <a:srgbClr val="61718A"/>
+                  <a:srgbClr val="52677D"/>
                 </a:solidFill>
                 <a:latin typeface="Helvetica Neue"/>
                 <a:ea typeface="Helvetica Neue"/>
@@ -3130,7 +3162,7 @@
             <a:r>
               <a:rPr sz="750" b="0">
                 <a:solidFill>
-                  <a:srgbClr val="61718A"/>
+                  <a:srgbClr val="52677D"/>
                 </a:solidFill>
                 <a:latin typeface="Helvetica Neue"/>
                 <a:ea typeface="Helvetica Neue"/>
@@ -3146,7 +3178,7 @@
           <p:cNvPr id="14" name="">
             <a:extLst xmlns:a="http://schemas.openxmlformats.org/drawingml/2006/main">
               <a:ext uri="{FF2B5EF4-FFF2-40B4-BE49-F238E27FC236}">
-                <a16:creationId xmlns:a16="http://schemas.microsoft.com/office/drawing/2014/main" id="{B7DE4F51-DBFA-4B95-B42C-3B9C90A959DA}"/>
+                <a16:creationId xmlns:a16="http://schemas.microsoft.com/office/drawing/2014/main" id="{F59C03F5-9C37-4C87-8F81-6D19C11FC76D}"/>
               </a:ext>
             </a:extLst>
           </p:cNvPr>
@@ -3177,7 +3209,7 @@
             <a:pPr algn="r">
               <a:defRPr sz="825" b="1">
                 <a:solidFill>
-                  <a:srgbClr val="2563EB"/>
+                  <a:srgbClr val="52677D"/>
                 </a:solidFill>
                 <a:latin typeface="Helvetica Neue"/>
                 <a:ea typeface="Helvetica Neue"/>
@@ -3187,7 +3219,7 @@
             <a:r>
               <a:rPr sz="825" b="1">
                 <a:solidFill>
-                  <a:srgbClr val="2563EB"/>
+                  <a:srgbClr val="52677D"/>
                 </a:solidFill>
                 <a:latin typeface="Helvetica Neue"/>
                 <a:ea typeface="Helvetica Neue"/>
@@ -3201,7 +3233,7 @@
     </p:spTree>
     <p:extLst>
       <p:ext uri="{BB962C8B-B14F-4D97-AF65-F5344CB8AC3E}">
-        <p14:creationId xmlns:p14="http://schemas.microsoft.com/office/powerpoint/2010/main" val="1759397956"/>
+        <p14:creationId xmlns:p14="http://schemas.microsoft.com/office/powerpoint/2010/main" val="1182487465"/>
       </p:ext>
     </p:extLst>
   </p:cSld>
@@ -3214,7 +3246,7 @@
     <p:bg>
       <p:bgPr>
         <a:solidFill xmlns:a="http://schemas.openxmlformats.org/drawingml/2006/main">
-          <a:srgbClr val="EEF7FF"/>
+          <a:srgbClr val="D1CFC9"/>
         </a:solidFill>
       </p:bgPr>
     </p:bg>
@@ -3232,7 +3264,7 @@
           <p:cNvPr id="19" name="">
             <a:extLst xmlns:a="http://schemas.openxmlformats.org/drawingml/2006/main">
               <a:ext uri="{FF2B5EF4-FFF2-40B4-BE49-F238E27FC236}">
-                <a16:creationId xmlns:a16="http://schemas.microsoft.com/office/drawing/2014/main" id="{EA6F5DFF-CB5C-4DD1-8D66-20CF53D2C13E}"/>
+                <a16:creationId xmlns:a16="http://schemas.microsoft.com/office/drawing/2014/main" id="{FCECA27E-B9B7-4439-B537-43F26982E424}"/>
               </a:ext>
             </a:extLst>
           </p:cNvPr>
@@ -3263,7 +3295,7 @@
             <a:pPr algn="l">
               <a:defRPr sz="1125" b="1">
                 <a:solidFill>
-                  <a:srgbClr val="2563EB"/>
+                  <a:srgbClr val="52677D"/>
                 </a:solidFill>
                 <a:latin typeface="Helvetica Neue"/>
                 <a:ea typeface="Helvetica Neue"/>
@@ -3273,7 +3305,7 @@
             <a:r>
               <a:rPr sz="1125" b="1">
                 <a:solidFill>
-                  <a:srgbClr val="2563EB"/>
+                  <a:srgbClr val="52677D"/>
                 </a:solidFill>
                 <a:latin typeface="Helvetica Neue"/>
                 <a:ea typeface="Helvetica Neue"/>
@@ -3289,7 +3321,7 @@
           <p:cNvPr id="2" name="">
             <a:extLst xmlns:a="http://schemas.openxmlformats.org/drawingml/2006/main">
               <a:ext uri="{FF2B5EF4-FFF2-40B4-BE49-F238E27FC236}">
-                <a16:creationId xmlns:a16="http://schemas.microsoft.com/office/drawing/2014/main" id="{66792914-5FDD-4159-A2CE-38C4070EA805}"/>
+                <a16:creationId xmlns:a16="http://schemas.microsoft.com/office/drawing/2014/main" id="{3D542501-9751-44B6-8A3C-7760166D188F}"/>
               </a:ext>
             </a:extLst>
           </p:cNvPr>
@@ -3320,7 +3352,7 @@
             <a:pPr algn="l">
               <a:defRPr sz="2850" b="1">
                 <a:solidFill>
-                  <a:srgbClr val="092454"/>
+                  <a:srgbClr val="1C2E4A"/>
                 </a:solidFill>
                 <a:latin typeface="Helvetica Neue"/>
                 <a:ea typeface="Helvetica Neue"/>
@@ -3330,7 +3362,7 @@
             <a:r>
               <a:rPr sz="2850" b="1">
                 <a:solidFill>
-                  <a:srgbClr val="092454"/>
+                  <a:srgbClr val="1C2E4A"/>
                 </a:solidFill>
                 <a:latin typeface="Helvetica Neue"/>
                 <a:ea typeface="Helvetica Neue"/>
@@ -3346,7 +3378,7 @@
           <p:cNvPr id="3" name="">
             <a:extLst xmlns:a="http://schemas.openxmlformats.org/drawingml/2006/main">
               <a:ext uri="{FF2B5EF4-FFF2-40B4-BE49-F238E27FC236}">
-                <a16:creationId xmlns:a16="http://schemas.microsoft.com/office/drawing/2014/main" id="{48B48E93-5820-48E9-A130-3919C5257819}"/>
+                <a16:creationId xmlns:a16="http://schemas.microsoft.com/office/drawing/2014/main" id="{0ABB05C9-E870-45EB-AB22-120151BA206E}"/>
               </a:ext>
             </a:extLst>
           </p:cNvPr>
@@ -3377,7 +3409,7 @@
             <a:pPr algn="l">
               <a:defRPr sz="1425" b="0">
                 <a:solidFill>
-                  <a:srgbClr val="61718A"/>
+                  <a:srgbClr val="52677D"/>
                 </a:solidFill>
                 <a:latin typeface="Helvetica Neue"/>
                 <a:ea typeface="Helvetica Neue"/>
@@ -3387,7 +3419,7 @@
             <a:r>
               <a:rPr sz="1425" b="0">
                 <a:solidFill>
-                  <a:srgbClr val="61718A"/>
+                  <a:srgbClr val="52677D"/>
                 </a:solidFill>
                 <a:latin typeface="Helvetica Neue"/>
                 <a:ea typeface="Helvetica Neue"/>
@@ -3403,7 +3435,7 @@
           <p:cNvPr id="4" name="">
             <a:extLst xmlns:a="http://schemas.openxmlformats.org/drawingml/2006/main">
               <a:ext uri="{FF2B5EF4-FFF2-40B4-BE49-F238E27FC236}">
-                <a16:creationId xmlns:a16="http://schemas.microsoft.com/office/drawing/2014/main" id="{9577E2D2-FA1E-45EF-B98A-2713FA937B06}"/>
+                <a16:creationId xmlns:a16="http://schemas.microsoft.com/office/drawing/2014/main" id="{FCBB9897-804A-42DC-B178-D9E046CFFC56}"/>
               </a:ext>
             </a:extLst>
           </p:cNvPr>
@@ -3434,7 +3466,7 @@
             <a:pPr algn="l">
               <a:defRPr sz="1200" b="1">
                 <a:solidFill>
-                  <a:srgbClr val="2563EB"/>
+                  <a:srgbClr val="52677D"/>
                 </a:solidFill>
                 <a:latin typeface="Helvetica Neue"/>
                 <a:ea typeface="Helvetica Neue"/>
@@ -3444,7 +3476,7 @@
             <a:r>
               <a:rPr sz="1200" b="1">
                 <a:solidFill>
-                  <a:srgbClr val="2563EB"/>
+                  <a:srgbClr val="52677D"/>
                 </a:solidFill>
                 <a:latin typeface="Helvetica Neue"/>
                 <a:ea typeface="Helvetica Neue"/>
@@ -3460,7 +3492,7 @@
           <p:cNvPr id="5" name="">
             <a:extLst xmlns:a="http://schemas.openxmlformats.org/drawingml/2006/main">
               <a:ext uri="{FF2B5EF4-FFF2-40B4-BE49-F238E27FC236}">
-                <a16:creationId xmlns:a16="http://schemas.microsoft.com/office/drawing/2014/main" id="{BB1785EB-833A-48B5-8B61-699B664FFBA6}"/>
+                <a16:creationId xmlns:a16="http://schemas.microsoft.com/office/drawing/2014/main" id="{99D473C9-FA59-41AD-A95E-25959BD4735A}"/>
               </a:ext>
             </a:extLst>
           </p:cNvPr>
@@ -3491,7 +3523,7 @@
             <a:pPr algn="l">
               <a:defRPr sz="1275" b="1">
                 <a:solidFill>
-                  <a:srgbClr val="092454"/>
+                  <a:srgbClr val="1C2E4A"/>
                 </a:solidFill>
                 <a:latin typeface="Helvetica Neue"/>
                 <a:ea typeface="Helvetica Neue"/>
@@ -3501,7 +3533,7 @@
             <a:r>
               <a:rPr sz="1275" b="1">
                 <a:solidFill>
-                  <a:srgbClr val="092454"/>
+                  <a:srgbClr val="1C2E4A"/>
                 </a:solidFill>
                 <a:latin typeface="Helvetica Neue"/>
                 <a:ea typeface="Helvetica Neue"/>
@@ -3517,7 +3549,7 @@
           <p:cNvPr id="6" name="">
             <a:extLst xmlns:a="http://schemas.openxmlformats.org/drawingml/2006/main">
               <a:ext uri="{FF2B5EF4-FFF2-40B4-BE49-F238E27FC236}">
-                <a16:creationId xmlns:a16="http://schemas.microsoft.com/office/drawing/2014/main" id="{0426A392-CF5B-4CE0-9855-794FEFD09661}"/>
+                <a16:creationId xmlns:a16="http://schemas.microsoft.com/office/drawing/2014/main" id="{B3EDAD8F-EB15-4683-9096-8E11CBDA6741}"/>
               </a:ext>
             </a:extLst>
           </p:cNvPr>
@@ -3548,7 +3580,7 @@
             <a:pPr algn="l">
               <a:defRPr sz="900" b="0">
                 <a:solidFill>
-                  <a:srgbClr val="61718A"/>
+                  <a:srgbClr val="52677D"/>
                 </a:solidFill>
                 <a:latin typeface="Helvetica Neue"/>
                 <a:ea typeface="Helvetica Neue"/>
@@ -3558,7 +3590,7 @@
             <a:r>
               <a:rPr sz="900" b="0">
                 <a:solidFill>
-                  <a:srgbClr val="61718A"/>
+                  <a:srgbClr val="52677D"/>
                 </a:solidFill>
                 <a:latin typeface="Helvetica Neue"/>
                 <a:ea typeface="Helvetica Neue"/>
@@ -3574,7 +3606,7 @@
           <p:cNvPr id="7" name="">
             <a:extLst xmlns:a="http://schemas.openxmlformats.org/drawingml/2006/main">
               <a:ext uri="{FF2B5EF4-FFF2-40B4-BE49-F238E27FC236}">
-                <a16:creationId xmlns:a16="http://schemas.microsoft.com/office/drawing/2014/main" id="{920A3828-9AF3-48AA-B3AF-B3435526C123}"/>
+                <a16:creationId xmlns:a16="http://schemas.microsoft.com/office/drawing/2014/main" id="{4E5F7138-30D2-4820-A47A-7C9FBDD48531}"/>
               </a:ext>
             </a:extLst>
           </p:cNvPr>
@@ -3605,7 +3637,7 @@
             <a:pPr algn="l">
               <a:defRPr sz="1200" b="1">
                 <a:solidFill>
-                  <a:srgbClr val="2563EB"/>
+                  <a:srgbClr val="52677D"/>
                 </a:solidFill>
                 <a:latin typeface="Helvetica Neue"/>
                 <a:ea typeface="Helvetica Neue"/>
@@ -3615,7 +3647,7 @@
             <a:r>
               <a:rPr sz="1200" b="1">
                 <a:solidFill>
-                  <a:srgbClr val="2563EB"/>
+                  <a:srgbClr val="52677D"/>
                 </a:solidFill>
                 <a:latin typeface="Helvetica Neue"/>
                 <a:ea typeface="Helvetica Neue"/>
@@ -3631,7 +3663,7 @@
           <p:cNvPr id="8" name="">
             <a:extLst xmlns:a="http://schemas.openxmlformats.org/drawingml/2006/main">
               <a:ext uri="{FF2B5EF4-FFF2-40B4-BE49-F238E27FC236}">
-                <a16:creationId xmlns:a16="http://schemas.microsoft.com/office/drawing/2014/main" id="{07597EDE-E905-4838-AA58-059C876A5C50}"/>
+                <a16:creationId xmlns:a16="http://schemas.microsoft.com/office/drawing/2014/main" id="{D571104F-0DB4-42B8-9CD8-837D04549B3E}"/>
               </a:ext>
             </a:extLst>
           </p:cNvPr>
@@ -3662,7 +3694,7 @@
             <a:pPr algn="l">
               <a:defRPr sz="1275" b="1">
                 <a:solidFill>
-                  <a:srgbClr val="092454"/>
+                  <a:srgbClr val="1C2E4A"/>
                 </a:solidFill>
                 <a:latin typeface="Helvetica Neue"/>
                 <a:ea typeface="Helvetica Neue"/>
@@ -3672,7 +3704,7 @@
             <a:r>
               <a:rPr sz="1275" b="1">
                 <a:solidFill>
-                  <a:srgbClr val="092454"/>
+                  <a:srgbClr val="1C2E4A"/>
                 </a:solidFill>
                 <a:latin typeface="Helvetica Neue"/>
                 <a:ea typeface="Helvetica Neue"/>
@@ -3688,7 +3720,7 @@
           <p:cNvPr id="9" name="">
             <a:extLst xmlns:a="http://schemas.openxmlformats.org/drawingml/2006/main">
               <a:ext uri="{FF2B5EF4-FFF2-40B4-BE49-F238E27FC236}">
-                <a16:creationId xmlns:a16="http://schemas.microsoft.com/office/drawing/2014/main" id="{8E7633AE-B6C2-4CCE-9DC0-8F87272940B2}"/>
+                <a16:creationId xmlns:a16="http://schemas.microsoft.com/office/drawing/2014/main" id="{C3168F05-5F1F-4331-A0D1-139FF9CD6291}"/>
               </a:ext>
             </a:extLst>
           </p:cNvPr>
@@ -3719,7 +3751,7 @@
             <a:pPr algn="l">
               <a:defRPr sz="900" b="0">
                 <a:solidFill>
-                  <a:srgbClr val="61718A"/>
+                  <a:srgbClr val="52677D"/>
                 </a:solidFill>
                 <a:latin typeface="Helvetica Neue"/>
                 <a:ea typeface="Helvetica Neue"/>
@@ -3729,7 +3761,7 @@
             <a:r>
               <a:rPr sz="900" b="0">
                 <a:solidFill>
-                  <a:srgbClr val="61718A"/>
+                  <a:srgbClr val="52677D"/>
                 </a:solidFill>
                 <a:latin typeface="Helvetica Neue"/>
                 <a:ea typeface="Helvetica Neue"/>
@@ -3745,7 +3777,7 @@
           <p:cNvPr id="10" name="">
             <a:extLst xmlns:a="http://schemas.openxmlformats.org/drawingml/2006/main">
               <a:ext uri="{FF2B5EF4-FFF2-40B4-BE49-F238E27FC236}">
-                <a16:creationId xmlns:a16="http://schemas.microsoft.com/office/drawing/2014/main" id="{03D4D9C7-172A-4D65-B40B-865B6C6D6538}"/>
+                <a16:creationId xmlns:a16="http://schemas.microsoft.com/office/drawing/2014/main" id="{6E9D38E3-C29C-4898-AAD2-1BB46F6E4305}"/>
               </a:ext>
             </a:extLst>
           </p:cNvPr>
@@ -3776,7 +3808,7 @@
             <a:pPr algn="l">
               <a:defRPr sz="1200" b="1">
                 <a:solidFill>
-                  <a:srgbClr val="2563EB"/>
+                  <a:srgbClr val="52677D"/>
                 </a:solidFill>
                 <a:latin typeface="Helvetica Neue"/>
                 <a:ea typeface="Helvetica Neue"/>
@@ -3786,7 +3818,7 @@
             <a:r>
               <a:rPr sz="1200" b="1">
                 <a:solidFill>
-                  <a:srgbClr val="2563EB"/>
+                  <a:srgbClr val="52677D"/>
                 </a:solidFill>
                 <a:latin typeface="Helvetica Neue"/>
                 <a:ea typeface="Helvetica Neue"/>
@@ -3802,7 +3834,7 @@
           <p:cNvPr id="11" name="">
             <a:extLst xmlns:a="http://schemas.openxmlformats.org/drawingml/2006/main">
               <a:ext uri="{FF2B5EF4-FFF2-40B4-BE49-F238E27FC236}">
-                <a16:creationId xmlns:a16="http://schemas.microsoft.com/office/drawing/2014/main" id="{25976323-375F-4E40-BD66-07FA863430AC}"/>
+                <a16:creationId xmlns:a16="http://schemas.microsoft.com/office/drawing/2014/main" id="{76588F7E-C086-490D-9BDA-1991AC51ABF6}"/>
               </a:ext>
             </a:extLst>
           </p:cNvPr>
@@ -3833,7 +3865,7 @@
             <a:pPr algn="l">
               <a:defRPr sz="1275" b="1">
                 <a:solidFill>
-                  <a:srgbClr val="092454"/>
+                  <a:srgbClr val="1C2E4A"/>
                 </a:solidFill>
                 <a:latin typeface="Helvetica Neue"/>
                 <a:ea typeface="Helvetica Neue"/>
@@ -3843,7 +3875,7 @@
             <a:r>
               <a:rPr sz="1275" b="1">
                 <a:solidFill>
-                  <a:srgbClr val="092454"/>
+                  <a:srgbClr val="1C2E4A"/>
                 </a:solidFill>
                 <a:latin typeface="Helvetica Neue"/>
                 <a:ea typeface="Helvetica Neue"/>
@@ -3859,7 +3891,7 @@
           <p:cNvPr id="12" name="">
             <a:extLst xmlns:a="http://schemas.openxmlformats.org/drawingml/2006/main">
               <a:ext uri="{FF2B5EF4-FFF2-40B4-BE49-F238E27FC236}">
-                <a16:creationId xmlns:a16="http://schemas.microsoft.com/office/drawing/2014/main" id="{1EB2BEF1-5B01-4585-A2EF-CEDEF5E17867}"/>
+                <a16:creationId xmlns:a16="http://schemas.microsoft.com/office/drawing/2014/main" id="{7619A5DA-E8EE-498A-B7A6-318BD7B1097D}"/>
               </a:ext>
             </a:extLst>
           </p:cNvPr>
@@ -3890,7 +3922,7 @@
             <a:pPr algn="l">
               <a:defRPr sz="900" b="0">
                 <a:solidFill>
-                  <a:srgbClr val="61718A"/>
+                  <a:srgbClr val="52677D"/>
                 </a:solidFill>
                 <a:latin typeface="Helvetica Neue"/>
                 <a:ea typeface="Helvetica Neue"/>
@@ -3900,7 +3932,7 @@
             <a:r>
               <a:rPr sz="900" b="0">
                 <a:solidFill>
-                  <a:srgbClr val="61718A"/>
+                  <a:srgbClr val="52677D"/>
                 </a:solidFill>
                 <a:latin typeface="Helvetica Neue"/>
                 <a:ea typeface="Helvetica Neue"/>
@@ -3916,7 +3948,7 @@
           <p:cNvPr id="13" name="">
             <a:extLst xmlns:a="http://schemas.openxmlformats.org/drawingml/2006/main">
               <a:ext uri="{FF2B5EF4-FFF2-40B4-BE49-F238E27FC236}">
-                <a16:creationId xmlns:a16="http://schemas.microsoft.com/office/drawing/2014/main" id="{AC9F2622-9CF2-46AF-9036-A0CB0F004C5B}"/>
+                <a16:creationId xmlns:a16="http://schemas.microsoft.com/office/drawing/2014/main" id="{3D7E1A40-6815-43D1-B554-DC4C0D13751F}"/>
               </a:ext>
             </a:extLst>
           </p:cNvPr>
@@ -3947,7 +3979,7 @@
             <a:pPr algn="l">
               <a:defRPr sz="1200" b="1">
                 <a:solidFill>
-                  <a:srgbClr val="2563EB"/>
+                  <a:srgbClr val="52677D"/>
                 </a:solidFill>
                 <a:latin typeface="Helvetica Neue"/>
                 <a:ea typeface="Helvetica Neue"/>
@@ -3957,7 +3989,7 @@
             <a:r>
               <a:rPr sz="1200" b="1">
                 <a:solidFill>
-                  <a:srgbClr val="2563EB"/>
+                  <a:srgbClr val="52677D"/>
                 </a:solidFill>
                 <a:latin typeface="Helvetica Neue"/>
                 <a:ea typeface="Helvetica Neue"/>
@@ -3973,7 +4005,7 @@
           <p:cNvPr id="14" name="">
             <a:extLst xmlns:a="http://schemas.openxmlformats.org/drawingml/2006/main">
               <a:ext uri="{FF2B5EF4-FFF2-40B4-BE49-F238E27FC236}">
-                <a16:creationId xmlns:a16="http://schemas.microsoft.com/office/drawing/2014/main" id="{7D4E4E6C-65A6-4164-BECE-A652E5AB4CAE}"/>
+                <a16:creationId xmlns:a16="http://schemas.microsoft.com/office/drawing/2014/main" id="{6D2A3874-290E-4826-897A-11EDC0700B5B}"/>
               </a:ext>
             </a:extLst>
           </p:cNvPr>
@@ -4004,7 +4036,7 @@
             <a:pPr algn="l">
               <a:defRPr sz="1275" b="1">
                 <a:solidFill>
-                  <a:srgbClr val="092454"/>
+                  <a:srgbClr val="1C2E4A"/>
                 </a:solidFill>
                 <a:latin typeface="Helvetica Neue"/>
                 <a:ea typeface="Helvetica Neue"/>
@@ -4014,7 +4046,7 @@
             <a:r>
               <a:rPr sz="1275" b="1">
                 <a:solidFill>
-                  <a:srgbClr val="092454"/>
+                  <a:srgbClr val="1C2E4A"/>
                 </a:solidFill>
                 <a:latin typeface="Helvetica Neue"/>
                 <a:ea typeface="Helvetica Neue"/>
@@ -4030,7 +4062,7 @@
           <p:cNvPr id="15" name="">
             <a:extLst xmlns:a="http://schemas.openxmlformats.org/drawingml/2006/main">
               <a:ext uri="{FF2B5EF4-FFF2-40B4-BE49-F238E27FC236}">
-                <a16:creationId xmlns:a16="http://schemas.microsoft.com/office/drawing/2014/main" id="{08E15AA2-A562-45D1-BE0F-59D888DDB6FB}"/>
+                <a16:creationId xmlns:a16="http://schemas.microsoft.com/office/drawing/2014/main" id="{26AB5CCE-571C-4BAA-BC45-B2CA1E5C4C78}"/>
               </a:ext>
             </a:extLst>
           </p:cNvPr>
@@ -4061,7 +4093,7 @@
             <a:pPr algn="l">
               <a:defRPr sz="900" b="0">
                 <a:solidFill>
-                  <a:srgbClr val="61718A"/>
+                  <a:srgbClr val="52677D"/>
                 </a:solidFill>
                 <a:latin typeface="Helvetica Neue"/>
                 <a:ea typeface="Helvetica Neue"/>
@@ -4071,7 +4103,7 @@
             <a:r>
               <a:rPr sz="900" b="0">
                 <a:solidFill>
-                  <a:srgbClr val="61718A"/>
+                  <a:srgbClr val="52677D"/>
                 </a:solidFill>
                 <a:latin typeface="Helvetica Neue"/>
                 <a:ea typeface="Helvetica Neue"/>
@@ -4087,7 +4119,7 @@
           <p:cNvPr id="16" name="">
             <a:extLst xmlns:a="http://schemas.openxmlformats.org/drawingml/2006/main">
               <a:ext uri="{FF2B5EF4-FFF2-40B4-BE49-F238E27FC236}">
-                <a16:creationId xmlns:a16="http://schemas.microsoft.com/office/drawing/2014/main" id="{A553E255-A6AA-4C0B-A149-FBCDEF6E3D31}"/>
+                <a16:creationId xmlns:a16="http://schemas.microsoft.com/office/drawing/2014/main" id="{5E743BC6-7500-4F93-90B8-FEE5E9E2A079}"/>
               </a:ext>
             </a:extLst>
           </p:cNvPr>
@@ -4105,7 +4137,7 @@
             <a:avLst/>
           </a:prstGeom>
           <a:solidFill xmlns:a="http://schemas.openxmlformats.org/drawingml/2006/main">
-            <a:srgbClr val="D8E5F2"/>
+            <a:srgbClr val="BDC4D4"/>
           </a:solidFill>
           <a:ln xmlns:a="http://schemas.openxmlformats.org/drawingml/2006/main" w="0">
             <a:noFill/>
@@ -4117,7 +4149,7 @@
           <p:cNvPr id="17" name="">
             <a:extLst xmlns:a="http://schemas.openxmlformats.org/drawingml/2006/main">
               <a:ext uri="{FF2B5EF4-FFF2-40B4-BE49-F238E27FC236}">
-                <a16:creationId xmlns:a16="http://schemas.microsoft.com/office/drawing/2014/main" id="{345F2A11-999C-4AF7-A365-6986FF04F3F5}"/>
+                <a16:creationId xmlns:a16="http://schemas.microsoft.com/office/drawing/2014/main" id="{A945F840-16E7-44CA-B5DC-3F57DFBBFE27}"/>
               </a:ext>
             </a:extLst>
           </p:cNvPr>
@@ -4148,7 +4180,7 @@
             <a:pPr algn="l">
               <a:defRPr sz="750" b="0">
                 <a:solidFill>
-                  <a:srgbClr val="61718A"/>
+                  <a:srgbClr val="52677D"/>
                 </a:solidFill>
                 <a:latin typeface="Helvetica Neue"/>
                 <a:ea typeface="Helvetica Neue"/>
@@ -4158,7 +4190,7 @@
             <a:r>
               <a:rPr sz="750" b="0">
                 <a:solidFill>
-                  <a:srgbClr val="61718A"/>
+                  <a:srgbClr val="52677D"/>
                 </a:solidFill>
                 <a:latin typeface="Helvetica Neue"/>
                 <a:ea typeface="Helvetica Neue"/>
@@ -4174,7 +4206,7 @@
           <p:cNvPr id="18" name="">
             <a:extLst xmlns:a="http://schemas.openxmlformats.org/drawingml/2006/main">
               <a:ext uri="{FF2B5EF4-FFF2-40B4-BE49-F238E27FC236}">
-                <a16:creationId xmlns:a16="http://schemas.microsoft.com/office/drawing/2014/main" id="{54F21D7C-065D-43F3-88B1-1A5EE6510112}"/>
+                <a16:creationId xmlns:a16="http://schemas.microsoft.com/office/drawing/2014/main" id="{418CB91A-C1B7-41EA-89F7-8DCDBFFF3970}"/>
               </a:ext>
             </a:extLst>
           </p:cNvPr>
@@ -4205,7 +4237,7 @@
             <a:pPr algn="r">
               <a:defRPr sz="825" b="1">
                 <a:solidFill>
-                  <a:srgbClr val="2563EB"/>
+                  <a:srgbClr val="52677D"/>
                 </a:solidFill>
                 <a:latin typeface="Helvetica Neue"/>
                 <a:ea typeface="Helvetica Neue"/>
@@ -4215,7 +4247,7 @@
             <a:r>
               <a:rPr sz="825" b="1">
                 <a:solidFill>
-                  <a:srgbClr val="2563EB"/>
+                  <a:srgbClr val="52677D"/>
                 </a:solidFill>
                 <a:latin typeface="Helvetica Neue"/>
                 <a:ea typeface="Helvetica Neue"/>
@@ -4229,7 +4261,7 @@
     </p:spTree>
     <p:extLst>
       <p:ext uri="{BB962C8B-B14F-4D97-AF65-F5344CB8AC3E}">
-        <p14:creationId xmlns:p14="http://schemas.microsoft.com/office/powerpoint/2010/main" val="553031171"/>
+        <p14:creationId xmlns:p14="http://schemas.microsoft.com/office/powerpoint/2010/main" val="1575142453"/>
       </p:ext>
     </p:extLst>
   </p:cSld>
@@ -4242,7 +4274,7 @@
     <p:bg>
       <p:bgPr>
         <a:solidFill xmlns:a="http://schemas.openxmlformats.org/drawingml/2006/main">
-          <a:srgbClr val="061A3A"/>
+          <a:srgbClr val="0F1A2B"/>
         </a:solidFill>
       </p:bgPr>
     </p:bg>
@@ -4260,7 +4292,7 @@
           <p:cNvPr id="10" name="">
             <a:extLst xmlns:a="http://schemas.openxmlformats.org/drawingml/2006/main">
               <a:ext uri="{FF2B5EF4-FFF2-40B4-BE49-F238E27FC236}">
-                <a16:creationId xmlns:a16="http://schemas.microsoft.com/office/drawing/2014/main" id="{848C5AE0-88B0-4860-B732-D6EB423C9442}"/>
+                <a16:creationId xmlns:a16="http://schemas.microsoft.com/office/drawing/2014/main" id="{8548892A-B25D-4F96-A972-43BDAD909AB2}"/>
               </a:ext>
             </a:extLst>
           </p:cNvPr>
@@ -4291,7 +4323,7 @@
             <a:pPr algn="l">
               <a:defRPr sz="1125" b="1">
                 <a:solidFill>
-                  <a:srgbClr val="FFD43B"/>
+                  <a:srgbClr val="D1CFC9"/>
                 </a:solidFill>
                 <a:latin typeface="Helvetica Neue"/>
                 <a:ea typeface="Helvetica Neue"/>
@@ -4301,7 +4333,7 @@
             <a:r>
               <a:rPr sz="1125" b="1">
                 <a:solidFill>
-                  <a:srgbClr val="FFD43B"/>
+                  <a:srgbClr val="D1CFC9"/>
                 </a:solidFill>
                 <a:latin typeface="Helvetica Neue"/>
                 <a:ea typeface="Helvetica Neue"/>
@@ -4317,7 +4349,7 @@
           <p:cNvPr id="2" name="">
             <a:extLst xmlns:a="http://schemas.openxmlformats.org/drawingml/2006/main">
               <a:ext uri="{FF2B5EF4-FFF2-40B4-BE49-F238E27FC236}">
-                <a16:creationId xmlns:a16="http://schemas.microsoft.com/office/drawing/2014/main" id="{EE6B2D27-927C-4C8B-A380-0F4C141118DA}"/>
+                <a16:creationId xmlns:a16="http://schemas.microsoft.com/office/drawing/2014/main" id="{12F309B8-1D4E-42E1-9E70-27D873EA78FE}"/>
               </a:ext>
             </a:extLst>
           </p:cNvPr>
@@ -4374,7 +4406,7 @@
           <p:cNvPr id="3" name="">
             <a:extLst xmlns:a="http://schemas.openxmlformats.org/drawingml/2006/main">
               <a:ext uri="{FF2B5EF4-FFF2-40B4-BE49-F238E27FC236}">
-                <a16:creationId xmlns:a16="http://schemas.microsoft.com/office/drawing/2014/main" id="{A1ED1929-C53B-4840-93E4-C64D96A7417A}"/>
+                <a16:creationId xmlns:a16="http://schemas.microsoft.com/office/drawing/2014/main" id="{BBD13B3B-792A-4154-9D2B-2AB9565598B5}"/>
               </a:ext>
             </a:extLst>
           </p:cNvPr>
@@ -4405,7 +4437,7 @@
             <a:pPr algn="l">
               <a:defRPr sz="8700" b="1">
                 <a:solidFill>
-                  <a:srgbClr val="FFD43B"/>
+                  <a:srgbClr val="D1CFC9"/>
                 </a:solidFill>
                 <a:latin typeface="Helvetica Neue"/>
                 <a:ea typeface="Helvetica Neue"/>
@@ -4415,7 +4447,7 @@
             <a:r>
               <a:rPr sz="8700" b="1">
                 <a:solidFill>
-                  <a:srgbClr val="FFD43B"/>
+                  <a:srgbClr val="D1CFC9"/>
                 </a:solidFill>
                 <a:latin typeface="Helvetica Neue"/>
                 <a:ea typeface="Helvetica Neue"/>
@@ -4431,7 +4463,7 @@
           <p:cNvPr id="4" name="">
             <a:extLst xmlns:a="http://schemas.openxmlformats.org/drawingml/2006/main">
               <a:ext uri="{FF2B5EF4-FFF2-40B4-BE49-F238E27FC236}">
-                <a16:creationId xmlns:a16="http://schemas.microsoft.com/office/drawing/2014/main" id="{622112E5-DE48-46D8-9BA1-94C2DF272E13}"/>
+                <a16:creationId xmlns:a16="http://schemas.microsoft.com/office/drawing/2014/main" id="{3A5AB5E7-AC86-4E9C-9425-D24F1B693C6B}"/>
               </a:ext>
             </a:extLst>
           </p:cNvPr>
@@ -4488,7 +4520,7 @@
           <p:cNvPr id="5" name="">
             <a:extLst xmlns:a="http://schemas.openxmlformats.org/drawingml/2006/main">
               <a:ext uri="{FF2B5EF4-FFF2-40B4-BE49-F238E27FC236}">
-                <a16:creationId xmlns:a16="http://schemas.microsoft.com/office/drawing/2014/main" id="{5FE8891C-2136-438C-8722-312F98D90822}"/>
+                <a16:creationId xmlns:a16="http://schemas.microsoft.com/office/drawing/2014/main" id="{C9372CFD-83C6-46C6-95D3-C2B338DA076F}"/>
               </a:ext>
             </a:extLst>
           </p:cNvPr>
@@ -4506,7 +4538,7 @@
             <a:avLst/>
           </a:prstGeom>
           <a:solidFill xmlns:a="http://schemas.openxmlformats.org/drawingml/2006/main">
-            <a:srgbClr val="31507E"/>
+            <a:srgbClr val="52677D"/>
           </a:solidFill>
           <a:ln xmlns:a="http://schemas.openxmlformats.org/drawingml/2006/main" w="0">
             <a:noFill/>
@@ -4518,7 +4550,7 @@
           <p:cNvPr id="6" name="">
             <a:extLst xmlns:a="http://schemas.openxmlformats.org/drawingml/2006/main">
               <a:ext uri="{FF2B5EF4-FFF2-40B4-BE49-F238E27FC236}">
-                <a16:creationId xmlns:a16="http://schemas.microsoft.com/office/drawing/2014/main" id="{C7A3FEB0-057A-482D-9E6B-984692F89864}"/>
+                <a16:creationId xmlns:a16="http://schemas.microsoft.com/office/drawing/2014/main" id="{7457EBD0-AE21-41DE-B94F-249E7665976E}"/>
               </a:ext>
             </a:extLst>
           </p:cNvPr>
@@ -4549,7 +4581,7 @@
             <a:pPr algn="l">
               <a:defRPr sz="1800" b="0">
                 <a:solidFill>
-                  <a:srgbClr val="BFE6FF"/>
+                  <a:srgbClr val="BDC4D4"/>
                 </a:solidFill>
                 <a:latin typeface="Helvetica Neue"/>
                 <a:ea typeface="Helvetica Neue"/>
@@ -4559,7 +4591,7 @@
             <a:r>
               <a:rPr sz="1800" b="0">
                 <a:solidFill>
-                  <a:srgbClr val="BFE6FF"/>
+                  <a:srgbClr val="BDC4D4"/>
                 </a:solidFill>
                 <a:latin typeface="Helvetica Neue"/>
                 <a:ea typeface="Helvetica Neue"/>
@@ -4575,7 +4607,7 @@
           <p:cNvPr id="7" name="">
             <a:extLst xmlns:a="http://schemas.openxmlformats.org/drawingml/2006/main">
               <a:ext uri="{FF2B5EF4-FFF2-40B4-BE49-F238E27FC236}">
-                <a16:creationId xmlns:a16="http://schemas.microsoft.com/office/drawing/2014/main" id="{A4ECDD8D-91AA-4389-BCF9-D305FCCA5D8D}"/>
+                <a16:creationId xmlns:a16="http://schemas.microsoft.com/office/drawing/2014/main" id="{ADB32A70-2F16-4D29-8B46-26279A590F22}"/>
               </a:ext>
             </a:extLst>
           </p:cNvPr>
@@ -4593,7 +4625,7 @@
             <a:avLst/>
           </a:prstGeom>
           <a:solidFill xmlns:a="http://schemas.openxmlformats.org/drawingml/2006/main">
-            <a:srgbClr val="31507E"/>
+            <a:srgbClr val="52677D"/>
           </a:solidFill>
           <a:ln xmlns:a="http://schemas.openxmlformats.org/drawingml/2006/main" w="0">
             <a:noFill/>
@@ -4605,7 +4637,7 @@
           <p:cNvPr id="8" name="">
             <a:extLst xmlns:a="http://schemas.openxmlformats.org/drawingml/2006/main">
               <a:ext uri="{FF2B5EF4-FFF2-40B4-BE49-F238E27FC236}">
-                <a16:creationId xmlns:a16="http://schemas.microsoft.com/office/drawing/2014/main" id="{349C5C2A-43E1-461E-9C68-97327808DE1D}"/>
+                <a16:creationId xmlns:a16="http://schemas.microsoft.com/office/drawing/2014/main" id="{6F48B79A-D198-4796-994E-8521778BDD99}"/>
               </a:ext>
             </a:extLst>
           </p:cNvPr>
@@ -4636,7 +4668,7 @@
             <a:pPr algn="l">
               <a:defRPr sz="750" b="0">
                 <a:solidFill>
-                  <a:srgbClr val="BFE6FF"/>
+                  <a:srgbClr val="BDC4D4"/>
                 </a:solidFill>
                 <a:latin typeface="Helvetica Neue"/>
                 <a:ea typeface="Helvetica Neue"/>
@@ -4646,7 +4678,7 @@
             <a:r>
               <a:rPr sz="750" b="0">
                 <a:solidFill>
-                  <a:srgbClr val="BFE6FF"/>
+                  <a:srgbClr val="BDC4D4"/>
                 </a:solidFill>
                 <a:latin typeface="Helvetica Neue"/>
                 <a:ea typeface="Helvetica Neue"/>
@@ -4662,7 +4694,7 @@
           <p:cNvPr id="9" name="">
             <a:extLst xmlns:a="http://schemas.openxmlformats.org/drawingml/2006/main">
               <a:ext uri="{FF2B5EF4-FFF2-40B4-BE49-F238E27FC236}">
-                <a16:creationId xmlns:a16="http://schemas.microsoft.com/office/drawing/2014/main" id="{B52B0FCD-3DEF-477E-8BFB-0339B4DE5A06}"/>
+                <a16:creationId xmlns:a16="http://schemas.microsoft.com/office/drawing/2014/main" id="{E29439B7-4DC4-4F6E-96A5-B4EB4BC9B6A6}"/>
               </a:ext>
             </a:extLst>
           </p:cNvPr>
@@ -4693,7 +4725,7 @@
             <a:pPr algn="r">
               <a:defRPr sz="825" b="1">
                 <a:solidFill>
-                  <a:srgbClr val="FFD43B"/>
+                  <a:srgbClr val="D1CFC9"/>
                 </a:solidFill>
                 <a:latin typeface="Helvetica Neue"/>
                 <a:ea typeface="Helvetica Neue"/>
@@ -4703,7 +4735,7 @@
             <a:r>
               <a:rPr sz="825" b="1">
                 <a:solidFill>
-                  <a:srgbClr val="FFD43B"/>
+                  <a:srgbClr val="D1CFC9"/>
                 </a:solidFill>
                 <a:latin typeface="Helvetica Neue"/>
                 <a:ea typeface="Helvetica Neue"/>
@@ -4717,7 +4749,7 @@
     </p:spTree>
     <p:extLst>
       <p:ext uri="{BB962C8B-B14F-4D97-AF65-F5344CB8AC3E}">
-        <p14:creationId xmlns:p14="http://schemas.microsoft.com/office/powerpoint/2010/main" val="29975809"/>
+        <p14:creationId xmlns:p14="http://schemas.microsoft.com/office/powerpoint/2010/main" val="518432032"/>
       </p:ext>
     </p:extLst>
   </p:cSld>
@@ -4748,7 +4780,7 @@
           <p:cNvPr id="24" name="">
             <a:extLst xmlns:a="http://schemas.openxmlformats.org/drawingml/2006/main">
               <a:ext uri="{FF2B5EF4-FFF2-40B4-BE49-F238E27FC236}">
-                <a16:creationId xmlns:a16="http://schemas.microsoft.com/office/drawing/2014/main" id="{96A37FE2-FD34-429A-8FC8-E62BBDDF9CD5}"/>
+                <a16:creationId xmlns:a16="http://schemas.microsoft.com/office/drawing/2014/main" id="{39FFC36A-B4D9-47B3-9986-EA5B21FE3281}"/>
               </a:ext>
             </a:extLst>
           </p:cNvPr>
@@ -4766,7 +4798,7 @@
             <a:avLst/>
           </a:prstGeom>
           <a:solidFill xmlns:a="http://schemas.openxmlformats.org/drawingml/2006/main">
-            <a:srgbClr val="2563EB"/>
+            <a:srgbClr val="1C2E4A"/>
           </a:solidFill>
           <a:ln xmlns:a="http://schemas.openxmlformats.org/drawingml/2006/main" w="0">
             <a:noFill/>
@@ -4778,7 +4810,7 @@
           <p:cNvPr id="2" name="">
             <a:extLst xmlns:a="http://schemas.openxmlformats.org/drawingml/2006/main">
               <a:ext uri="{FF2B5EF4-FFF2-40B4-BE49-F238E27FC236}">
-                <a16:creationId xmlns:a16="http://schemas.microsoft.com/office/drawing/2014/main" id="{59938CCA-3409-402E-8D87-444B0F04452E}"/>
+                <a16:creationId xmlns:a16="http://schemas.microsoft.com/office/drawing/2014/main" id="{A411D313-99DB-4046-A1BC-BC693460F0D4}"/>
               </a:ext>
             </a:extLst>
           </p:cNvPr>
@@ -4809,7 +4841,7 @@
             <a:pPr algn="l">
               <a:defRPr sz="1125" b="1">
                 <a:solidFill>
-                  <a:srgbClr val="2563EB"/>
+                  <a:srgbClr val="52677D"/>
                 </a:solidFill>
                 <a:latin typeface="Helvetica Neue"/>
                 <a:ea typeface="Helvetica Neue"/>
@@ -4819,7 +4851,7 @@
             <a:r>
               <a:rPr sz="1125" b="1">
                 <a:solidFill>
-                  <a:srgbClr val="2563EB"/>
+                  <a:srgbClr val="52677D"/>
                 </a:solidFill>
                 <a:latin typeface="Helvetica Neue"/>
                 <a:ea typeface="Helvetica Neue"/>
@@ -4835,7 +4867,7 @@
           <p:cNvPr id="3" name="">
             <a:extLst xmlns:a="http://schemas.openxmlformats.org/drawingml/2006/main">
               <a:ext uri="{FF2B5EF4-FFF2-40B4-BE49-F238E27FC236}">
-                <a16:creationId xmlns:a16="http://schemas.microsoft.com/office/drawing/2014/main" id="{3C3BC18F-CF85-4FD0-B937-2DB4F90BD34F}"/>
+                <a16:creationId xmlns:a16="http://schemas.microsoft.com/office/drawing/2014/main" id="{16417317-D373-4369-A3BF-B1260EBE5725}"/>
               </a:ext>
             </a:extLst>
           </p:cNvPr>
@@ -4855,7 +4887,7 @@
             </a:avLst>
           </a:prstGeom>
           <a:solidFill xmlns:a="http://schemas.openxmlformats.org/drawingml/2006/main">
-            <a:srgbClr val="FFD43B"/>
+            <a:srgbClr val="D1CFC9"/>
           </a:solidFill>
           <a:ln xmlns:a="http://schemas.openxmlformats.org/drawingml/2006/main" w="0">
             <a:noFill/>
@@ -4867,7 +4899,7 @@
           <p:cNvPr id="4" name="">
             <a:extLst xmlns:a="http://schemas.openxmlformats.org/drawingml/2006/main">
               <a:ext uri="{FF2B5EF4-FFF2-40B4-BE49-F238E27FC236}">
-                <a16:creationId xmlns:a16="http://schemas.microsoft.com/office/drawing/2014/main" id="{0B2D0626-B10A-40F4-ADAF-330EE2C8A0BB}"/>
+                <a16:creationId xmlns:a16="http://schemas.microsoft.com/office/drawing/2014/main" id="{1C840229-A24E-4558-901D-FAAA145730DE}"/>
               </a:ext>
             </a:extLst>
           </p:cNvPr>
@@ -4898,7 +4930,7 @@
             <a:pPr algn="ctr">
               <a:defRPr sz="1275" b="1">
                 <a:solidFill>
-                  <a:srgbClr val="092454"/>
+                  <a:srgbClr val="1C2E4A"/>
                 </a:solidFill>
                 <a:latin typeface="Helvetica Neue"/>
                 <a:ea typeface="Helvetica Neue"/>
@@ -4908,7 +4940,7 @@
             <a:r>
               <a:rPr sz="1275" b="1">
                 <a:solidFill>
-                  <a:srgbClr val="092454"/>
+                  <a:srgbClr val="1C2E4A"/>
                 </a:solidFill>
                 <a:latin typeface="Helvetica Neue"/>
                 <a:ea typeface="Helvetica Neue"/>
@@ -4924,7 +4956,7 @@
           <p:cNvPr id="5" name="">
             <a:extLst xmlns:a="http://schemas.openxmlformats.org/drawingml/2006/main">
               <a:ext uri="{FF2B5EF4-FFF2-40B4-BE49-F238E27FC236}">
-                <a16:creationId xmlns:a16="http://schemas.microsoft.com/office/drawing/2014/main" id="{1C6F5792-6C2D-4C03-910B-9F3BBFE8D726}"/>
+                <a16:creationId xmlns:a16="http://schemas.microsoft.com/office/drawing/2014/main" id="{BE750AAA-B41C-4716-AC37-6140EDC79845}"/>
               </a:ext>
             </a:extLst>
           </p:cNvPr>
@@ -4955,7 +4987,7 @@
             <a:pPr algn="l">
               <a:defRPr sz="2250" b="1">
                 <a:solidFill>
-                  <a:srgbClr val="092454"/>
+                  <a:srgbClr val="1C2E4A"/>
                 </a:solidFill>
                 <a:latin typeface="Helvetica Neue"/>
                 <a:ea typeface="Helvetica Neue"/>
@@ -4965,7 +4997,7 @@
             <a:r>
               <a:rPr sz="2250" b="1">
                 <a:solidFill>
-                  <a:srgbClr val="092454"/>
+                  <a:srgbClr val="1C2E4A"/>
                 </a:solidFill>
                 <a:latin typeface="Helvetica Neue"/>
                 <a:ea typeface="Helvetica Neue"/>
@@ -4981,7 +5013,7 @@
           <p:cNvPr id="6" name="">
             <a:extLst xmlns:a="http://schemas.openxmlformats.org/drawingml/2006/main">
               <a:ext uri="{FF2B5EF4-FFF2-40B4-BE49-F238E27FC236}">
-                <a16:creationId xmlns:a16="http://schemas.microsoft.com/office/drawing/2014/main" id="{CC4DD64E-539B-401D-8755-768F7B2A114B}"/>
+                <a16:creationId xmlns:a16="http://schemas.microsoft.com/office/drawing/2014/main" id="{3AAC89A9-BEC7-4ECA-8060-6A302DE6A6E6}"/>
               </a:ext>
             </a:extLst>
           </p:cNvPr>
@@ -5001,7 +5033,7 @@
             </a:avLst>
           </a:prstGeom>
           <a:solidFill xmlns:a="http://schemas.openxmlformats.org/drawingml/2006/main">
-            <a:srgbClr val="EEF7FF"/>
+            <a:srgbClr val="D1CFC9"/>
           </a:solidFill>
           <a:ln xmlns:a="http://schemas.openxmlformats.org/drawingml/2006/main" w="0">
             <a:noFill/>
@@ -5013,7 +5045,7 @@
           <p:cNvPr id="7" name="">
             <a:extLst xmlns:a="http://schemas.openxmlformats.org/drawingml/2006/main">
               <a:ext uri="{FF2B5EF4-FFF2-40B4-BE49-F238E27FC236}">
-                <a16:creationId xmlns:a16="http://schemas.microsoft.com/office/drawing/2014/main" id="{46D02840-C9D5-426A-B177-BACF6DE02413}"/>
+                <a16:creationId xmlns:a16="http://schemas.microsoft.com/office/drawing/2014/main" id="{B4B4BBCD-7901-4404-BF15-590DA23B0DAB}"/>
               </a:ext>
             </a:extLst>
           </p:cNvPr>
@@ -5044,7 +5076,7 @@
             <a:pPr algn="ctr">
               <a:defRPr sz="1350" b="1">
                 <a:solidFill>
-                  <a:srgbClr val="2563EB"/>
+                  <a:srgbClr val="52677D"/>
                 </a:solidFill>
                 <a:latin typeface="Helvetica Neue"/>
                 <a:ea typeface="Helvetica Neue"/>
@@ -5054,7 +5086,7 @@
             <a:r>
               <a:rPr sz="1350" b="1">
                 <a:solidFill>
-                  <a:srgbClr val="2563EB"/>
+                  <a:srgbClr val="52677D"/>
                 </a:solidFill>
                 <a:latin typeface="Helvetica Neue"/>
                 <a:ea typeface="Helvetica Neue"/>
@@ -5070,7 +5102,7 @@
           <p:cNvPr id="8" name="">
             <a:extLst xmlns:a="http://schemas.openxmlformats.org/drawingml/2006/main">
               <a:ext uri="{FF2B5EF4-FFF2-40B4-BE49-F238E27FC236}">
-                <a16:creationId xmlns:a16="http://schemas.microsoft.com/office/drawing/2014/main" id="{42995B8B-71FA-4269-8BA4-C413D83E2529}"/>
+                <a16:creationId xmlns:a16="http://schemas.microsoft.com/office/drawing/2014/main" id="{F03AF9CB-6C76-4E87-9C4D-D3722BA77D2B}"/>
               </a:ext>
             </a:extLst>
           </p:cNvPr>
@@ -5101,7 +5133,7 @@
             <a:pPr algn="l">
               <a:defRPr sz="1575" b="0">
                 <a:solidFill>
-                  <a:srgbClr val="10213D"/>
+                  <a:srgbClr val="0F1A2B"/>
                 </a:solidFill>
                 <a:latin typeface="Helvetica Neue"/>
                 <a:ea typeface="Helvetica Neue"/>
@@ -5111,7 +5143,7 @@
             <a:r>
               <a:rPr sz="1575" b="0">
                 <a:solidFill>
-                  <a:srgbClr val="10213D"/>
+                  <a:srgbClr val="0F1A2B"/>
                 </a:solidFill>
                 <a:latin typeface="Helvetica Neue"/>
                 <a:ea typeface="Helvetica Neue"/>
@@ -5127,7 +5159,7 @@
           <p:cNvPr id="9" name="">
             <a:extLst xmlns:a="http://schemas.openxmlformats.org/drawingml/2006/main">
               <a:ext uri="{FF2B5EF4-FFF2-40B4-BE49-F238E27FC236}">
-                <a16:creationId xmlns:a16="http://schemas.microsoft.com/office/drawing/2014/main" id="{30741C4A-307D-461D-9BF7-52884BE9F96B}"/>
+                <a16:creationId xmlns:a16="http://schemas.microsoft.com/office/drawing/2014/main" id="{485387DF-A566-43EB-A7F6-CAB17FD452FF}"/>
               </a:ext>
             </a:extLst>
           </p:cNvPr>
@@ -5147,7 +5179,7 @@
             </a:avLst>
           </a:prstGeom>
           <a:solidFill xmlns:a="http://schemas.openxmlformats.org/drawingml/2006/main">
-            <a:srgbClr val="EEF7FF"/>
+            <a:srgbClr val="D1CFC9"/>
           </a:solidFill>
           <a:ln xmlns:a="http://schemas.openxmlformats.org/drawingml/2006/main" w="0">
             <a:noFill/>
@@ -5159,7 +5191,7 @@
           <p:cNvPr id="10" name="">
             <a:extLst xmlns:a="http://schemas.openxmlformats.org/drawingml/2006/main">
               <a:ext uri="{FF2B5EF4-FFF2-40B4-BE49-F238E27FC236}">
-                <a16:creationId xmlns:a16="http://schemas.microsoft.com/office/drawing/2014/main" id="{231FBA23-E820-4440-A7D0-C43B6AEE53A3}"/>
+                <a16:creationId xmlns:a16="http://schemas.microsoft.com/office/drawing/2014/main" id="{65ACCAF4-DE75-4CF4-A095-4C36BD6E808F}"/>
               </a:ext>
             </a:extLst>
           </p:cNvPr>
@@ -5190,7 +5222,7 @@
             <a:pPr algn="ctr">
               <a:defRPr sz="1350" b="1">
                 <a:solidFill>
-                  <a:srgbClr val="2563EB"/>
+                  <a:srgbClr val="52677D"/>
                 </a:solidFill>
                 <a:latin typeface="Helvetica Neue"/>
                 <a:ea typeface="Helvetica Neue"/>
@@ -5200,7 +5232,7 @@
             <a:r>
               <a:rPr sz="1350" b="1">
                 <a:solidFill>
-                  <a:srgbClr val="2563EB"/>
+                  <a:srgbClr val="52677D"/>
                 </a:solidFill>
                 <a:latin typeface="Helvetica Neue"/>
                 <a:ea typeface="Helvetica Neue"/>
@@ -5216,7 +5248,7 @@
           <p:cNvPr id="11" name="">
             <a:extLst xmlns:a="http://schemas.openxmlformats.org/drawingml/2006/main">
               <a:ext uri="{FF2B5EF4-FFF2-40B4-BE49-F238E27FC236}">
-                <a16:creationId xmlns:a16="http://schemas.microsoft.com/office/drawing/2014/main" id="{934A0C94-6193-4496-A2BC-4C13424DB1CA}"/>
+                <a16:creationId xmlns:a16="http://schemas.microsoft.com/office/drawing/2014/main" id="{248424F9-BC57-417F-A192-D2731E81F751}"/>
               </a:ext>
             </a:extLst>
           </p:cNvPr>
@@ -5247,7 +5279,7 @@
             <a:pPr algn="l">
               <a:defRPr sz="1575" b="0">
                 <a:solidFill>
-                  <a:srgbClr val="10213D"/>
+                  <a:srgbClr val="0F1A2B"/>
                 </a:solidFill>
                 <a:latin typeface="Helvetica Neue"/>
                 <a:ea typeface="Helvetica Neue"/>
@@ -5257,7 +5289,7 @@
             <a:r>
               <a:rPr sz="1575" b="0">
                 <a:solidFill>
-                  <a:srgbClr val="10213D"/>
+                  <a:srgbClr val="0F1A2B"/>
                 </a:solidFill>
                 <a:latin typeface="Helvetica Neue"/>
                 <a:ea typeface="Helvetica Neue"/>
@@ -5273,7 +5305,7 @@
           <p:cNvPr id="12" name="">
             <a:extLst xmlns:a="http://schemas.openxmlformats.org/drawingml/2006/main">
               <a:ext uri="{FF2B5EF4-FFF2-40B4-BE49-F238E27FC236}">
-                <a16:creationId xmlns:a16="http://schemas.microsoft.com/office/drawing/2014/main" id="{97B28924-AAE8-4265-AE52-5ACFE4B9B7AA}"/>
+                <a16:creationId xmlns:a16="http://schemas.microsoft.com/office/drawing/2014/main" id="{24F8493B-6786-4E08-8A99-F8E353E8DA53}"/>
               </a:ext>
             </a:extLst>
           </p:cNvPr>
@@ -5293,7 +5325,7 @@
             </a:avLst>
           </a:prstGeom>
           <a:solidFill xmlns:a="http://schemas.openxmlformats.org/drawingml/2006/main">
-            <a:srgbClr val="EEF7FF"/>
+            <a:srgbClr val="D1CFC9"/>
           </a:solidFill>
           <a:ln xmlns:a="http://schemas.openxmlformats.org/drawingml/2006/main" w="0">
             <a:noFill/>
@@ -5305,7 +5337,7 @@
           <p:cNvPr id="13" name="">
             <a:extLst xmlns:a="http://schemas.openxmlformats.org/drawingml/2006/main">
               <a:ext uri="{FF2B5EF4-FFF2-40B4-BE49-F238E27FC236}">
-                <a16:creationId xmlns:a16="http://schemas.microsoft.com/office/drawing/2014/main" id="{E7B225DA-05A1-4206-85B6-E2E804B29EB8}"/>
+                <a16:creationId xmlns:a16="http://schemas.microsoft.com/office/drawing/2014/main" id="{4D74A0D0-8739-40C4-832B-33581CC3BFF3}"/>
               </a:ext>
             </a:extLst>
           </p:cNvPr>
@@ -5336,7 +5368,7 @@
             <a:pPr algn="ctr">
               <a:defRPr sz="1350" b="1">
                 <a:solidFill>
-                  <a:srgbClr val="2563EB"/>
+                  <a:srgbClr val="52677D"/>
                 </a:solidFill>
                 <a:latin typeface="Helvetica Neue"/>
                 <a:ea typeface="Helvetica Neue"/>
@@ -5346,7 +5378,7 @@
             <a:r>
               <a:rPr sz="1350" b="1">
                 <a:solidFill>
-                  <a:srgbClr val="2563EB"/>
+                  <a:srgbClr val="52677D"/>
                 </a:solidFill>
                 <a:latin typeface="Helvetica Neue"/>
                 <a:ea typeface="Helvetica Neue"/>
@@ -5362,7 +5394,7 @@
           <p:cNvPr id="14" name="">
             <a:extLst xmlns:a="http://schemas.openxmlformats.org/drawingml/2006/main">
               <a:ext uri="{FF2B5EF4-FFF2-40B4-BE49-F238E27FC236}">
-                <a16:creationId xmlns:a16="http://schemas.microsoft.com/office/drawing/2014/main" id="{F477BC2B-F160-4675-AB6E-41195004C731}"/>
+                <a16:creationId xmlns:a16="http://schemas.microsoft.com/office/drawing/2014/main" id="{0EF87878-F3E6-49DF-9293-1F90E91FDED6}"/>
               </a:ext>
             </a:extLst>
           </p:cNvPr>
@@ -5393,7 +5425,7 @@
             <a:pPr algn="l">
               <a:defRPr sz="1575" b="0">
                 <a:solidFill>
-                  <a:srgbClr val="10213D"/>
+                  <a:srgbClr val="0F1A2B"/>
                 </a:solidFill>
                 <a:latin typeface="Helvetica Neue"/>
                 <a:ea typeface="Helvetica Neue"/>
@@ -5403,7 +5435,7 @@
             <a:r>
               <a:rPr sz="1575" b="0">
                 <a:solidFill>
-                  <a:srgbClr val="10213D"/>
+                  <a:srgbClr val="0F1A2B"/>
                 </a:solidFill>
                 <a:latin typeface="Helvetica Neue"/>
                 <a:ea typeface="Helvetica Neue"/>
@@ -5419,7 +5451,7 @@
           <p:cNvPr id="15" name="">
             <a:extLst xmlns:a="http://schemas.openxmlformats.org/drawingml/2006/main">
               <a:ext uri="{FF2B5EF4-FFF2-40B4-BE49-F238E27FC236}">
-                <a16:creationId xmlns:a16="http://schemas.microsoft.com/office/drawing/2014/main" id="{8F8C29A5-176D-40E0-ADC6-F3C9EBBBEE7B}"/>
+                <a16:creationId xmlns:a16="http://schemas.microsoft.com/office/drawing/2014/main" id="{D642B59F-B466-468F-AB73-EBB334A9B757}"/>
               </a:ext>
             </a:extLst>
           </p:cNvPr>
@@ -5439,7 +5471,7 @@
             </a:avLst>
           </a:prstGeom>
           <a:solidFill xmlns:a="http://schemas.openxmlformats.org/drawingml/2006/main">
-            <a:srgbClr val="EEF7FF"/>
+            <a:srgbClr val="D1CFC9"/>
           </a:solidFill>
           <a:ln xmlns:a="http://schemas.openxmlformats.org/drawingml/2006/main" w="0">
             <a:noFill/>
@@ -5451,7 +5483,7 @@
           <p:cNvPr id="16" name="">
             <a:extLst xmlns:a="http://schemas.openxmlformats.org/drawingml/2006/main">
               <a:ext uri="{FF2B5EF4-FFF2-40B4-BE49-F238E27FC236}">
-                <a16:creationId xmlns:a16="http://schemas.microsoft.com/office/drawing/2014/main" id="{686544A9-C3DA-4202-B32D-2C7B33069E23}"/>
+                <a16:creationId xmlns:a16="http://schemas.microsoft.com/office/drawing/2014/main" id="{C9FFE5DC-3BC8-463B-B78A-1067D65813A9}"/>
               </a:ext>
             </a:extLst>
           </p:cNvPr>
@@ -5482,7 +5514,7 @@
             <a:pPr algn="l">
               <a:defRPr sz="1125" b="0">
                 <a:solidFill>
-                  <a:srgbClr val="092454"/>
+                  <a:srgbClr val="1C2E4A"/>
                 </a:solidFill>
                 <a:latin typeface="Helvetica Neue"/>
                 <a:ea typeface="Helvetica Neue"/>
@@ -5492,7 +5524,7 @@
             <a:r>
               <a:rPr sz="1125" b="0">
                 <a:solidFill>
-                  <a:srgbClr val="092454"/>
+                  <a:srgbClr val="1C2E4A"/>
                 </a:solidFill>
                 <a:latin typeface="Helvetica Neue"/>
                 <a:ea typeface="Helvetica Neue"/>
@@ -5508,7 +5540,7 @@
           <p:cNvPr id="17" name="">
             <a:extLst xmlns:a="http://schemas.openxmlformats.org/drawingml/2006/main">
               <a:ext uri="{FF2B5EF4-FFF2-40B4-BE49-F238E27FC236}">
-                <a16:creationId xmlns:a16="http://schemas.microsoft.com/office/drawing/2014/main" id="{9C8E3C67-7DFC-45E7-888B-9466F7F5B53B}"/>
+                <a16:creationId xmlns:a16="http://schemas.microsoft.com/office/drawing/2014/main" id="{48278715-AB89-447D-AD3B-1F119C7D2A95}"/>
               </a:ext>
             </a:extLst>
           </p:cNvPr>
@@ -5528,7 +5560,7 @@
             </a:avLst>
           </a:prstGeom>
           <a:solidFill xmlns:a="http://schemas.openxmlformats.org/drawingml/2006/main">
-            <a:srgbClr val="092454"/>
+            <a:srgbClr val="1C2E4A"/>
           </a:solidFill>
           <a:ln xmlns:a="http://schemas.openxmlformats.org/drawingml/2006/main" w="0">
             <a:noFill/>
@@ -5540,7 +5572,7 @@
           <p:cNvPr id="18" name="">
             <a:extLst xmlns:a="http://schemas.openxmlformats.org/drawingml/2006/main">
               <a:ext uri="{FF2B5EF4-FFF2-40B4-BE49-F238E27FC236}">
-                <a16:creationId xmlns:a16="http://schemas.microsoft.com/office/drawing/2014/main" id="{23DBC393-44C4-4E93-8894-81BB5D1323C7}"/>
+                <a16:creationId xmlns:a16="http://schemas.microsoft.com/office/drawing/2014/main" id="{88137F66-F5D9-4DD9-8DB9-0BF95D4A3A7E}"/>
               </a:ext>
             </a:extLst>
           </p:cNvPr>
@@ -5571,7 +5603,7 @@
             <a:pPr algn="l">
               <a:defRPr sz="1050" b="1">
                 <a:solidFill>
-                  <a:srgbClr val="FFD43B"/>
+                  <a:srgbClr val="D1CFC9"/>
                 </a:solidFill>
                 <a:latin typeface="Helvetica Neue"/>
                 <a:ea typeface="Helvetica Neue"/>
@@ -5581,7 +5613,7 @@
             <a:r>
               <a:rPr sz="1050" b="1">
                 <a:solidFill>
-                  <a:srgbClr val="FFD43B"/>
+                  <a:srgbClr val="D1CFC9"/>
                 </a:solidFill>
                 <a:latin typeface="Helvetica Neue"/>
                 <a:ea typeface="Helvetica Neue"/>
@@ -5597,7 +5629,7 @@
           <p:cNvPr id="19" name="">
             <a:extLst xmlns:a="http://schemas.openxmlformats.org/drawingml/2006/main">
               <a:ext uri="{FF2B5EF4-FFF2-40B4-BE49-F238E27FC236}">
-                <a16:creationId xmlns:a16="http://schemas.microsoft.com/office/drawing/2014/main" id="{5E54BC64-AAE6-4C06-904B-383C9D6BED19}"/>
+                <a16:creationId xmlns:a16="http://schemas.microsoft.com/office/drawing/2014/main" id="{6B92139F-1B17-4047-B8A9-F70C562BE9D0}"/>
               </a:ext>
             </a:extLst>
           </p:cNvPr>
@@ -5654,7 +5686,7 @@
           <p:cNvPr id="20" name="">
             <a:extLst xmlns:a="http://schemas.openxmlformats.org/drawingml/2006/main">
               <a:ext uri="{FF2B5EF4-FFF2-40B4-BE49-F238E27FC236}">
-                <a16:creationId xmlns:a16="http://schemas.microsoft.com/office/drawing/2014/main" id="{0310F563-1CDA-43E0-8E23-CDCA2001D40E}"/>
+                <a16:creationId xmlns:a16="http://schemas.microsoft.com/office/drawing/2014/main" id="{0BAF19BA-43FA-4F2B-B90D-46A751581153}"/>
               </a:ext>
             </a:extLst>
           </p:cNvPr>
@@ -5685,7 +5717,7 @@
             <a:pPr algn="l">
               <a:defRPr sz="1125" b="0">
                 <a:solidFill>
-                  <a:srgbClr val="BFE6FF"/>
+                  <a:srgbClr val="BDC4D4"/>
                 </a:solidFill>
                 <a:latin typeface="Helvetica Neue"/>
                 <a:ea typeface="Helvetica Neue"/>
@@ -5695,7 +5727,7 @@
             <a:r>
               <a:rPr sz="1125" b="0">
                 <a:solidFill>
-                  <a:srgbClr val="BFE6FF"/>
+                  <a:srgbClr val="BDC4D4"/>
                 </a:solidFill>
                 <a:latin typeface="Helvetica Neue"/>
                 <a:ea typeface="Helvetica Neue"/>
@@ -5711,7 +5743,7 @@
           <p:cNvPr id="21" name="">
             <a:extLst xmlns:a="http://schemas.openxmlformats.org/drawingml/2006/main">
               <a:ext uri="{FF2B5EF4-FFF2-40B4-BE49-F238E27FC236}">
-                <a16:creationId xmlns:a16="http://schemas.microsoft.com/office/drawing/2014/main" id="{0F300A03-8614-412E-800D-8A32E5C116DB}"/>
+                <a16:creationId xmlns:a16="http://schemas.microsoft.com/office/drawing/2014/main" id="{D58B6531-8DF6-47A2-B611-1DCC4F6ECD91}"/>
               </a:ext>
             </a:extLst>
           </p:cNvPr>
@@ -5729,7 +5761,7 @@
             <a:avLst/>
           </a:prstGeom>
           <a:solidFill xmlns:a="http://schemas.openxmlformats.org/drawingml/2006/main">
-            <a:srgbClr val="D8E5F2"/>
+            <a:srgbClr val="BDC4D4"/>
           </a:solidFill>
           <a:ln xmlns:a="http://schemas.openxmlformats.org/drawingml/2006/main" w="0">
             <a:noFill/>
@@ -5741,7 +5773,7 @@
           <p:cNvPr id="22" name="">
             <a:extLst xmlns:a="http://schemas.openxmlformats.org/drawingml/2006/main">
               <a:ext uri="{FF2B5EF4-FFF2-40B4-BE49-F238E27FC236}">
-                <a16:creationId xmlns:a16="http://schemas.microsoft.com/office/drawing/2014/main" id="{DCB2136B-6BA9-4745-BAFB-7C4B8F58FF0E}"/>
+                <a16:creationId xmlns:a16="http://schemas.microsoft.com/office/drawing/2014/main" id="{70C270F7-0958-4052-A023-BD980DED8EC8}"/>
               </a:ext>
             </a:extLst>
           </p:cNvPr>
@@ -5772,7 +5804,7 @@
             <a:pPr algn="l">
               <a:defRPr sz="750" b="0">
                 <a:solidFill>
-                  <a:srgbClr val="61718A"/>
+                  <a:srgbClr val="52677D"/>
                 </a:solidFill>
                 <a:latin typeface="Helvetica Neue"/>
                 <a:ea typeface="Helvetica Neue"/>
@@ -5782,7 +5814,7 @@
             <a:r>
               <a:rPr sz="750" b="0">
                 <a:solidFill>
-                  <a:srgbClr val="61718A"/>
+                  <a:srgbClr val="52677D"/>
                 </a:solidFill>
                 <a:latin typeface="Helvetica Neue"/>
                 <a:ea typeface="Helvetica Neue"/>
@@ -5798,7 +5830,7 @@
           <p:cNvPr id="23" name="">
             <a:extLst xmlns:a="http://schemas.openxmlformats.org/drawingml/2006/main">
               <a:ext uri="{FF2B5EF4-FFF2-40B4-BE49-F238E27FC236}">
-                <a16:creationId xmlns:a16="http://schemas.microsoft.com/office/drawing/2014/main" id="{3F00DEC8-3807-44C7-A6C5-5670DB246308}"/>
+                <a16:creationId xmlns:a16="http://schemas.microsoft.com/office/drawing/2014/main" id="{C12F9208-8456-409B-8264-5D414EDCA1F4}"/>
               </a:ext>
             </a:extLst>
           </p:cNvPr>
@@ -5829,7 +5861,7 @@
             <a:pPr algn="r">
               <a:defRPr sz="825" b="1">
                 <a:solidFill>
-                  <a:srgbClr val="2563EB"/>
+                  <a:srgbClr val="52677D"/>
                 </a:solidFill>
                 <a:latin typeface="Helvetica Neue"/>
                 <a:ea typeface="Helvetica Neue"/>
@@ -5839,7 +5871,7 @@
             <a:r>
               <a:rPr sz="825" b="1">
                 <a:solidFill>
-                  <a:srgbClr val="2563EB"/>
+                  <a:srgbClr val="52677D"/>
                 </a:solidFill>
                 <a:latin typeface="Helvetica Neue"/>
                 <a:ea typeface="Helvetica Neue"/>
@@ -5853,7 +5885,7 @@
     </p:spTree>
     <p:extLst>
       <p:ext uri="{BB962C8B-B14F-4D97-AF65-F5344CB8AC3E}">
-        <p14:creationId xmlns:p14="http://schemas.microsoft.com/office/powerpoint/2010/main" val="367702387"/>
+        <p14:creationId xmlns:p14="http://schemas.microsoft.com/office/powerpoint/2010/main" val="1937394953"/>
       </p:ext>
     </p:extLst>
   </p:cSld>
@@ -5884,7 +5916,7 @@
           <p:cNvPr id="24" name="">
             <a:extLst xmlns:a="http://schemas.openxmlformats.org/drawingml/2006/main">
               <a:ext uri="{FF2B5EF4-FFF2-40B4-BE49-F238E27FC236}">
-                <a16:creationId xmlns:a16="http://schemas.microsoft.com/office/drawing/2014/main" id="{3349E186-C39D-4929-9946-7D8E6DBC9002}"/>
+                <a16:creationId xmlns:a16="http://schemas.microsoft.com/office/drawing/2014/main" id="{40A60973-80BC-4405-867A-1468E1D70444}"/>
               </a:ext>
             </a:extLst>
           </p:cNvPr>
@@ -5902,7 +5934,7 @@
             <a:avLst/>
           </a:prstGeom>
           <a:solidFill xmlns:a="http://schemas.openxmlformats.org/drawingml/2006/main">
-            <a:srgbClr val="FF7C70"/>
+            <a:srgbClr val="1C2E4A"/>
           </a:solidFill>
           <a:ln xmlns:a="http://schemas.openxmlformats.org/drawingml/2006/main" w="0">
             <a:noFill/>
@@ -5914,7 +5946,7 @@
           <p:cNvPr id="2" name="">
             <a:extLst xmlns:a="http://schemas.openxmlformats.org/drawingml/2006/main">
               <a:ext uri="{FF2B5EF4-FFF2-40B4-BE49-F238E27FC236}">
-                <a16:creationId xmlns:a16="http://schemas.microsoft.com/office/drawing/2014/main" id="{DA6EFF5A-E26F-488D-A4D4-53FB611A01E9}"/>
+                <a16:creationId xmlns:a16="http://schemas.microsoft.com/office/drawing/2014/main" id="{7748274B-68F5-440D-8BA3-3F22DC81AF7E}"/>
               </a:ext>
             </a:extLst>
           </p:cNvPr>
@@ -5945,7 +5977,7 @@
             <a:pPr algn="l">
               <a:defRPr sz="1125" b="1">
                 <a:solidFill>
-                  <a:srgbClr val="2563EB"/>
+                  <a:srgbClr val="52677D"/>
                 </a:solidFill>
                 <a:latin typeface="Helvetica Neue"/>
                 <a:ea typeface="Helvetica Neue"/>
@@ -5955,7 +5987,7 @@
             <a:r>
               <a:rPr sz="1125" b="1">
                 <a:solidFill>
-                  <a:srgbClr val="2563EB"/>
+                  <a:srgbClr val="52677D"/>
                 </a:solidFill>
                 <a:latin typeface="Helvetica Neue"/>
                 <a:ea typeface="Helvetica Neue"/>
@@ -5971,7 +6003,7 @@
           <p:cNvPr id="3" name="">
             <a:extLst xmlns:a="http://schemas.openxmlformats.org/drawingml/2006/main">
               <a:ext uri="{FF2B5EF4-FFF2-40B4-BE49-F238E27FC236}">
-                <a16:creationId xmlns:a16="http://schemas.microsoft.com/office/drawing/2014/main" id="{554C5D63-F86E-4A72-96D7-0C9BA63D1BBC}"/>
+                <a16:creationId xmlns:a16="http://schemas.microsoft.com/office/drawing/2014/main" id="{10D7F25B-B733-434A-86BF-8DBC69A8F3C8}"/>
               </a:ext>
             </a:extLst>
           </p:cNvPr>
@@ -5991,7 +6023,7 @@
             </a:avLst>
           </a:prstGeom>
           <a:solidFill xmlns:a="http://schemas.openxmlformats.org/drawingml/2006/main">
-            <a:srgbClr val="FFD43B"/>
+            <a:srgbClr val="D1CFC9"/>
           </a:solidFill>
           <a:ln xmlns:a="http://schemas.openxmlformats.org/drawingml/2006/main" w="0">
             <a:noFill/>
@@ -6003,7 +6035,7 @@
           <p:cNvPr id="4" name="">
             <a:extLst xmlns:a="http://schemas.openxmlformats.org/drawingml/2006/main">
               <a:ext uri="{FF2B5EF4-FFF2-40B4-BE49-F238E27FC236}">
-                <a16:creationId xmlns:a16="http://schemas.microsoft.com/office/drawing/2014/main" id="{44E37313-AD02-46F5-9727-62E342778623}"/>
+                <a16:creationId xmlns:a16="http://schemas.microsoft.com/office/drawing/2014/main" id="{ECEC8B6C-A06B-4A7E-9804-7E039AA1739F}"/>
               </a:ext>
             </a:extLst>
           </p:cNvPr>
@@ -6034,7 +6066,7 @@
             <a:pPr algn="ctr">
               <a:defRPr sz="1275" b="1">
                 <a:solidFill>
-                  <a:srgbClr val="092454"/>
+                  <a:srgbClr val="1C2E4A"/>
                 </a:solidFill>
                 <a:latin typeface="Helvetica Neue"/>
                 <a:ea typeface="Helvetica Neue"/>
@@ -6044,7 +6076,7 @@
             <a:r>
               <a:rPr sz="1275" b="1">
                 <a:solidFill>
-                  <a:srgbClr val="092454"/>
+                  <a:srgbClr val="1C2E4A"/>
                 </a:solidFill>
                 <a:latin typeface="Helvetica Neue"/>
                 <a:ea typeface="Helvetica Neue"/>
@@ -6060,7 +6092,7 @@
           <p:cNvPr id="5" name="">
             <a:extLst xmlns:a="http://schemas.openxmlformats.org/drawingml/2006/main">
               <a:ext uri="{FF2B5EF4-FFF2-40B4-BE49-F238E27FC236}">
-                <a16:creationId xmlns:a16="http://schemas.microsoft.com/office/drawing/2014/main" id="{19C4E137-DD77-40A2-8C4F-BACA8F8CE639}"/>
+                <a16:creationId xmlns:a16="http://schemas.microsoft.com/office/drawing/2014/main" id="{55F6BA4B-CEA8-4527-91FA-35A46A84B951}"/>
               </a:ext>
             </a:extLst>
           </p:cNvPr>
@@ -6091,7 +6123,7 @@
             <a:pPr algn="l">
               <a:defRPr sz="2850" b="1">
                 <a:solidFill>
-                  <a:srgbClr val="092454"/>
+                  <a:srgbClr val="1C2E4A"/>
                 </a:solidFill>
                 <a:latin typeface="Helvetica Neue"/>
                 <a:ea typeface="Helvetica Neue"/>
@@ -6101,7 +6133,7 @@
             <a:r>
               <a:rPr sz="2850" b="1">
                 <a:solidFill>
-                  <a:srgbClr val="092454"/>
+                  <a:srgbClr val="1C2E4A"/>
                 </a:solidFill>
                 <a:latin typeface="Helvetica Neue"/>
                 <a:ea typeface="Helvetica Neue"/>
@@ -6117,7 +6149,7 @@
           <p:cNvPr id="6" name="">
             <a:extLst xmlns:a="http://schemas.openxmlformats.org/drawingml/2006/main">
               <a:ext uri="{FF2B5EF4-FFF2-40B4-BE49-F238E27FC236}">
-                <a16:creationId xmlns:a16="http://schemas.microsoft.com/office/drawing/2014/main" id="{C5EBD69C-FE65-48E5-93C3-CEF8C0BAD1A6}"/>
+                <a16:creationId xmlns:a16="http://schemas.microsoft.com/office/drawing/2014/main" id="{3AF03BB1-8D27-4976-BA74-3669C5D48626}"/>
               </a:ext>
             </a:extLst>
           </p:cNvPr>
@@ -6137,7 +6169,7 @@
             </a:avLst>
           </a:prstGeom>
           <a:solidFill xmlns:a="http://schemas.openxmlformats.org/drawingml/2006/main">
-            <a:srgbClr val="EEF7FF"/>
+            <a:srgbClr val="D1CFC9"/>
           </a:solidFill>
           <a:ln xmlns:a="http://schemas.openxmlformats.org/drawingml/2006/main" w="0">
             <a:noFill/>
@@ -6149,7 +6181,7 @@
           <p:cNvPr id="7" name="">
             <a:extLst xmlns:a="http://schemas.openxmlformats.org/drawingml/2006/main">
               <a:ext uri="{FF2B5EF4-FFF2-40B4-BE49-F238E27FC236}">
-                <a16:creationId xmlns:a16="http://schemas.microsoft.com/office/drawing/2014/main" id="{5358EBDF-D476-4B3E-87C8-B44F934467F8}"/>
+                <a16:creationId xmlns:a16="http://schemas.microsoft.com/office/drawing/2014/main" id="{FC51F634-2004-4520-A349-1B2D0E39FE0D}"/>
               </a:ext>
             </a:extLst>
           </p:cNvPr>
@@ -6180,7 +6212,7 @@
             <a:pPr algn="ctr">
               <a:defRPr sz="1350" b="1">
                 <a:solidFill>
-                  <a:srgbClr val="2563EB"/>
+                  <a:srgbClr val="52677D"/>
                 </a:solidFill>
                 <a:latin typeface="Helvetica Neue"/>
                 <a:ea typeface="Helvetica Neue"/>
@@ -6190,7 +6222,7 @@
             <a:r>
               <a:rPr sz="1350" b="1">
                 <a:solidFill>
-                  <a:srgbClr val="2563EB"/>
+                  <a:srgbClr val="52677D"/>
                 </a:solidFill>
                 <a:latin typeface="Helvetica Neue"/>
                 <a:ea typeface="Helvetica Neue"/>
@@ -6206,7 +6238,7 @@
           <p:cNvPr id="8" name="">
             <a:extLst xmlns:a="http://schemas.openxmlformats.org/drawingml/2006/main">
               <a:ext uri="{FF2B5EF4-FFF2-40B4-BE49-F238E27FC236}">
-                <a16:creationId xmlns:a16="http://schemas.microsoft.com/office/drawing/2014/main" id="{46064DA5-08AD-475C-B299-E3BB4E87CA35}"/>
+                <a16:creationId xmlns:a16="http://schemas.microsoft.com/office/drawing/2014/main" id="{AB2E8ADA-777B-4773-BFB1-471F5567240F}"/>
               </a:ext>
             </a:extLst>
           </p:cNvPr>
@@ -6237,7 +6269,7 @@
             <a:pPr algn="l">
               <a:defRPr sz="1575" b="0">
                 <a:solidFill>
-                  <a:srgbClr val="10213D"/>
+                  <a:srgbClr val="0F1A2B"/>
                 </a:solidFill>
                 <a:latin typeface="Helvetica Neue"/>
                 <a:ea typeface="Helvetica Neue"/>
@@ -6247,7 +6279,7 @@
             <a:r>
               <a:rPr sz="1575" b="0">
                 <a:solidFill>
-                  <a:srgbClr val="10213D"/>
+                  <a:srgbClr val="0F1A2B"/>
                 </a:solidFill>
                 <a:latin typeface="Helvetica Neue"/>
                 <a:ea typeface="Helvetica Neue"/>
@@ -6263,7 +6295,7 @@
           <p:cNvPr id="9" name="">
             <a:extLst xmlns:a="http://schemas.openxmlformats.org/drawingml/2006/main">
               <a:ext uri="{FF2B5EF4-FFF2-40B4-BE49-F238E27FC236}">
-                <a16:creationId xmlns:a16="http://schemas.microsoft.com/office/drawing/2014/main" id="{72B75372-8743-4D8F-8B13-ADB15D0B2977}"/>
+                <a16:creationId xmlns:a16="http://schemas.microsoft.com/office/drawing/2014/main" id="{BA9E867F-56B6-42F8-8195-A2D7CE49B3FD}"/>
               </a:ext>
             </a:extLst>
           </p:cNvPr>
@@ -6283,7 +6315,7 @@
             </a:avLst>
           </a:prstGeom>
           <a:solidFill xmlns:a="http://schemas.openxmlformats.org/drawingml/2006/main">
-            <a:srgbClr val="EEF7FF"/>
+            <a:srgbClr val="D1CFC9"/>
           </a:solidFill>
           <a:ln xmlns:a="http://schemas.openxmlformats.org/drawingml/2006/main" w="0">
             <a:noFill/>
@@ -6295,7 +6327,7 @@
           <p:cNvPr id="10" name="">
             <a:extLst xmlns:a="http://schemas.openxmlformats.org/drawingml/2006/main">
               <a:ext uri="{FF2B5EF4-FFF2-40B4-BE49-F238E27FC236}">
-                <a16:creationId xmlns:a16="http://schemas.microsoft.com/office/drawing/2014/main" id="{C97CBE32-FB02-4DDC-8F2E-49423B65D4A1}"/>
+                <a16:creationId xmlns:a16="http://schemas.microsoft.com/office/drawing/2014/main" id="{AEEBFCD0-4F6C-46AB-8ABF-60D8A442EBCF}"/>
               </a:ext>
             </a:extLst>
           </p:cNvPr>
@@ -6326,7 +6358,7 @@
             <a:pPr algn="ctr">
               <a:defRPr sz="1350" b="1">
                 <a:solidFill>
-                  <a:srgbClr val="2563EB"/>
+                  <a:srgbClr val="52677D"/>
                 </a:solidFill>
                 <a:latin typeface="Helvetica Neue"/>
                 <a:ea typeface="Helvetica Neue"/>
@@ -6336,7 +6368,7 @@
             <a:r>
               <a:rPr sz="1350" b="1">
                 <a:solidFill>
-                  <a:srgbClr val="2563EB"/>
+                  <a:srgbClr val="52677D"/>
                 </a:solidFill>
                 <a:latin typeface="Helvetica Neue"/>
                 <a:ea typeface="Helvetica Neue"/>
@@ -6352,7 +6384,7 @@
           <p:cNvPr id="11" name="">
             <a:extLst xmlns:a="http://schemas.openxmlformats.org/drawingml/2006/main">
               <a:ext uri="{FF2B5EF4-FFF2-40B4-BE49-F238E27FC236}">
-                <a16:creationId xmlns:a16="http://schemas.microsoft.com/office/drawing/2014/main" id="{33655159-D64A-4079-9429-798023E4ECB4}"/>
+                <a16:creationId xmlns:a16="http://schemas.microsoft.com/office/drawing/2014/main" id="{61B4634C-001B-4907-BF03-DB77C613FAF0}"/>
               </a:ext>
             </a:extLst>
           </p:cNvPr>
@@ -6383,7 +6415,7 @@
             <a:pPr algn="l">
               <a:defRPr sz="1575" b="0">
                 <a:solidFill>
-                  <a:srgbClr val="10213D"/>
+                  <a:srgbClr val="0F1A2B"/>
                 </a:solidFill>
                 <a:latin typeface="Helvetica Neue"/>
                 <a:ea typeface="Helvetica Neue"/>
@@ -6393,7 +6425,7 @@
             <a:r>
               <a:rPr sz="1575" b="0">
                 <a:solidFill>
-                  <a:srgbClr val="10213D"/>
+                  <a:srgbClr val="0F1A2B"/>
                 </a:solidFill>
                 <a:latin typeface="Helvetica Neue"/>
                 <a:ea typeface="Helvetica Neue"/>
@@ -6409,7 +6441,7 @@
           <p:cNvPr id="12" name="">
             <a:extLst xmlns:a="http://schemas.openxmlformats.org/drawingml/2006/main">
               <a:ext uri="{FF2B5EF4-FFF2-40B4-BE49-F238E27FC236}">
-                <a16:creationId xmlns:a16="http://schemas.microsoft.com/office/drawing/2014/main" id="{8965540A-0C94-4BC7-B449-40803FB76E64}"/>
+                <a16:creationId xmlns:a16="http://schemas.microsoft.com/office/drawing/2014/main" id="{7815697D-4984-4845-AA8C-65B718D62EFE}"/>
               </a:ext>
             </a:extLst>
           </p:cNvPr>
@@ -6429,7 +6461,7 @@
             </a:avLst>
           </a:prstGeom>
           <a:solidFill xmlns:a="http://schemas.openxmlformats.org/drawingml/2006/main">
-            <a:srgbClr val="EEF7FF"/>
+            <a:srgbClr val="D1CFC9"/>
           </a:solidFill>
           <a:ln xmlns:a="http://schemas.openxmlformats.org/drawingml/2006/main" w="0">
             <a:noFill/>
@@ -6441,7 +6473,7 @@
           <p:cNvPr id="13" name="">
             <a:extLst xmlns:a="http://schemas.openxmlformats.org/drawingml/2006/main">
               <a:ext uri="{FF2B5EF4-FFF2-40B4-BE49-F238E27FC236}">
-                <a16:creationId xmlns:a16="http://schemas.microsoft.com/office/drawing/2014/main" id="{6ED43F20-471D-4706-9111-DCDE4A7270B4}"/>
+                <a16:creationId xmlns:a16="http://schemas.microsoft.com/office/drawing/2014/main" id="{5832B211-6F56-4204-9294-FEB8C668FE2F}"/>
               </a:ext>
             </a:extLst>
           </p:cNvPr>
@@ -6472,7 +6504,7 @@
             <a:pPr algn="ctr">
               <a:defRPr sz="1350" b="1">
                 <a:solidFill>
-                  <a:srgbClr val="2563EB"/>
+                  <a:srgbClr val="52677D"/>
                 </a:solidFill>
                 <a:latin typeface="Helvetica Neue"/>
                 <a:ea typeface="Helvetica Neue"/>
@@ -6482,7 +6514,7 @@
             <a:r>
               <a:rPr sz="1350" b="1">
                 <a:solidFill>
-                  <a:srgbClr val="2563EB"/>
+                  <a:srgbClr val="52677D"/>
                 </a:solidFill>
                 <a:latin typeface="Helvetica Neue"/>
                 <a:ea typeface="Helvetica Neue"/>
@@ -6498,7 +6530,7 @@
           <p:cNvPr id="14" name="">
             <a:extLst xmlns:a="http://schemas.openxmlformats.org/drawingml/2006/main">
               <a:ext uri="{FF2B5EF4-FFF2-40B4-BE49-F238E27FC236}">
-                <a16:creationId xmlns:a16="http://schemas.microsoft.com/office/drawing/2014/main" id="{0FE66943-C2A5-45ED-B8BE-B7E623EF5A12}"/>
+                <a16:creationId xmlns:a16="http://schemas.microsoft.com/office/drawing/2014/main" id="{295C5047-902C-4662-87A0-3577D839CDF8}"/>
               </a:ext>
             </a:extLst>
           </p:cNvPr>
@@ -6529,7 +6561,7 @@
             <a:pPr algn="l">
               <a:defRPr sz="1575" b="0">
                 <a:solidFill>
-                  <a:srgbClr val="10213D"/>
+                  <a:srgbClr val="0F1A2B"/>
                 </a:solidFill>
                 <a:latin typeface="Helvetica Neue"/>
                 <a:ea typeface="Helvetica Neue"/>
@@ -6539,7 +6571,7 @@
             <a:r>
               <a:rPr sz="1575" b="0">
                 <a:solidFill>
-                  <a:srgbClr val="10213D"/>
+                  <a:srgbClr val="0F1A2B"/>
                 </a:solidFill>
                 <a:latin typeface="Helvetica Neue"/>
                 <a:ea typeface="Helvetica Neue"/>
@@ -6555,7 +6587,7 @@
           <p:cNvPr id="15" name="">
             <a:extLst xmlns:a="http://schemas.openxmlformats.org/drawingml/2006/main">
               <a:ext uri="{FF2B5EF4-FFF2-40B4-BE49-F238E27FC236}">
-                <a16:creationId xmlns:a16="http://schemas.microsoft.com/office/drawing/2014/main" id="{4AF94BE6-1AE7-4F5D-9926-74820B165C7B}"/>
+                <a16:creationId xmlns:a16="http://schemas.microsoft.com/office/drawing/2014/main" id="{26EBD980-BFD9-4331-A8FA-234DFF87F133}"/>
               </a:ext>
             </a:extLst>
           </p:cNvPr>
@@ -6575,7 +6607,7 @@
             </a:avLst>
           </a:prstGeom>
           <a:solidFill xmlns:a="http://schemas.openxmlformats.org/drawingml/2006/main">
-            <a:srgbClr val="EEF7FF"/>
+            <a:srgbClr val="D1CFC9"/>
           </a:solidFill>
           <a:ln xmlns:a="http://schemas.openxmlformats.org/drawingml/2006/main" w="0">
             <a:noFill/>
@@ -6587,7 +6619,7 @@
           <p:cNvPr id="16" name="">
             <a:extLst xmlns:a="http://schemas.openxmlformats.org/drawingml/2006/main">
               <a:ext uri="{FF2B5EF4-FFF2-40B4-BE49-F238E27FC236}">
-                <a16:creationId xmlns:a16="http://schemas.microsoft.com/office/drawing/2014/main" id="{1EB0AE3D-F97E-4034-844A-DEE53F4215EB}"/>
+                <a16:creationId xmlns:a16="http://schemas.microsoft.com/office/drawing/2014/main" id="{4BE194B3-21C1-4AC8-A4CD-D0CF1983B409}"/>
               </a:ext>
             </a:extLst>
           </p:cNvPr>
@@ -6618,7 +6650,7 @@
             <a:pPr algn="l">
               <a:defRPr sz="1125" b="0">
                 <a:solidFill>
-                  <a:srgbClr val="092454"/>
+                  <a:srgbClr val="1C2E4A"/>
                 </a:solidFill>
                 <a:latin typeface="Helvetica Neue"/>
                 <a:ea typeface="Helvetica Neue"/>
@@ -6628,7 +6660,7 @@
             <a:r>
               <a:rPr sz="1125" b="0">
                 <a:solidFill>
-                  <a:srgbClr val="092454"/>
+                  <a:srgbClr val="1C2E4A"/>
                 </a:solidFill>
                 <a:latin typeface="Helvetica Neue"/>
                 <a:ea typeface="Helvetica Neue"/>
@@ -6644,7 +6676,7 @@
           <p:cNvPr id="17" name="">
             <a:extLst xmlns:a="http://schemas.openxmlformats.org/drawingml/2006/main">
               <a:ext uri="{FF2B5EF4-FFF2-40B4-BE49-F238E27FC236}">
-                <a16:creationId xmlns:a16="http://schemas.microsoft.com/office/drawing/2014/main" id="{1C1A8BC9-F1C8-4661-8DB8-5235E992A7D4}"/>
+                <a16:creationId xmlns:a16="http://schemas.microsoft.com/office/drawing/2014/main" id="{A9115A87-2982-44E7-BEFA-A86F06398ABA}"/>
               </a:ext>
             </a:extLst>
           </p:cNvPr>
@@ -6664,7 +6696,7 @@
             </a:avLst>
           </a:prstGeom>
           <a:solidFill xmlns:a="http://schemas.openxmlformats.org/drawingml/2006/main">
-            <a:srgbClr val="092454"/>
+            <a:srgbClr val="1C2E4A"/>
           </a:solidFill>
           <a:ln xmlns:a="http://schemas.openxmlformats.org/drawingml/2006/main" w="0">
             <a:noFill/>
@@ -6676,7 +6708,7 @@
           <p:cNvPr id="18" name="">
             <a:extLst xmlns:a="http://schemas.openxmlformats.org/drawingml/2006/main">
               <a:ext uri="{FF2B5EF4-FFF2-40B4-BE49-F238E27FC236}">
-                <a16:creationId xmlns:a16="http://schemas.microsoft.com/office/drawing/2014/main" id="{BD793375-A4C8-47DB-8BC3-D82785103DA1}"/>
+                <a16:creationId xmlns:a16="http://schemas.microsoft.com/office/drawing/2014/main" id="{5D6DC8CC-3FDA-4F71-91BC-241EF08315A0}"/>
               </a:ext>
             </a:extLst>
           </p:cNvPr>
@@ -6707,7 +6739,7 @@
             <a:pPr algn="l">
               <a:defRPr sz="1050" b="1">
                 <a:solidFill>
-                  <a:srgbClr val="FFD43B"/>
+                  <a:srgbClr val="D1CFC9"/>
                 </a:solidFill>
                 <a:latin typeface="Helvetica Neue"/>
                 <a:ea typeface="Helvetica Neue"/>
@@ -6717,7 +6749,7 @@
             <a:r>
               <a:rPr sz="1050" b="1">
                 <a:solidFill>
-                  <a:srgbClr val="FFD43B"/>
+                  <a:srgbClr val="D1CFC9"/>
                 </a:solidFill>
                 <a:latin typeface="Helvetica Neue"/>
                 <a:ea typeface="Helvetica Neue"/>
@@ -6733,7 +6765,7 @@
           <p:cNvPr id="19" name="">
             <a:extLst xmlns:a="http://schemas.openxmlformats.org/drawingml/2006/main">
               <a:ext uri="{FF2B5EF4-FFF2-40B4-BE49-F238E27FC236}">
-                <a16:creationId xmlns:a16="http://schemas.microsoft.com/office/drawing/2014/main" id="{7C6D6BDE-CE33-42C3-A8C7-CDA3B8FF6D39}"/>
+                <a16:creationId xmlns:a16="http://schemas.microsoft.com/office/drawing/2014/main" id="{D10321F8-959D-4E8E-AC5F-13F0686C819A}"/>
               </a:ext>
             </a:extLst>
           </p:cNvPr>
@@ -6790,7 +6822,7 @@
           <p:cNvPr id="20" name="">
             <a:extLst xmlns:a="http://schemas.openxmlformats.org/drawingml/2006/main">
               <a:ext uri="{FF2B5EF4-FFF2-40B4-BE49-F238E27FC236}">
-                <a16:creationId xmlns:a16="http://schemas.microsoft.com/office/drawing/2014/main" id="{90643056-7948-4FC3-BDA6-8AF38E8EFB7C}"/>
+                <a16:creationId xmlns:a16="http://schemas.microsoft.com/office/drawing/2014/main" id="{AD6B6AF7-44A2-4916-866A-BBDB5F4FD7B6}"/>
               </a:ext>
             </a:extLst>
           </p:cNvPr>
@@ -6821,7 +6853,7 @@
             <a:pPr algn="l">
               <a:defRPr sz="1125" b="0">
                 <a:solidFill>
-                  <a:srgbClr val="BFE6FF"/>
+                  <a:srgbClr val="BDC4D4"/>
                 </a:solidFill>
                 <a:latin typeface="Helvetica Neue"/>
                 <a:ea typeface="Helvetica Neue"/>
@@ -6831,7 +6863,7 @@
             <a:r>
               <a:rPr sz="1125" b="0">
                 <a:solidFill>
-                  <a:srgbClr val="BFE6FF"/>
+                  <a:srgbClr val="BDC4D4"/>
                 </a:solidFill>
                 <a:latin typeface="Helvetica Neue"/>
                 <a:ea typeface="Helvetica Neue"/>
@@ -6847,7 +6879,7 @@
           <p:cNvPr id="21" name="">
             <a:extLst xmlns:a="http://schemas.openxmlformats.org/drawingml/2006/main">
               <a:ext uri="{FF2B5EF4-FFF2-40B4-BE49-F238E27FC236}">
-                <a16:creationId xmlns:a16="http://schemas.microsoft.com/office/drawing/2014/main" id="{DC818F48-0525-4ADE-9013-3932ADDB0D09}"/>
+                <a16:creationId xmlns:a16="http://schemas.microsoft.com/office/drawing/2014/main" id="{E5CC5698-7FCE-4C1F-A3F1-7FF5016B5203}"/>
               </a:ext>
             </a:extLst>
           </p:cNvPr>
@@ -6865,7 +6897,7 @@
             <a:avLst/>
           </a:prstGeom>
           <a:solidFill xmlns:a="http://schemas.openxmlformats.org/drawingml/2006/main">
-            <a:srgbClr val="D8E5F2"/>
+            <a:srgbClr val="BDC4D4"/>
           </a:solidFill>
           <a:ln xmlns:a="http://schemas.openxmlformats.org/drawingml/2006/main" w="0">
             <a:noFill/>
@@ -6877,7 +6909,7 @@
           <p:cNvPr id="22" name="">
             <a:extLst xmlns:a="http://schemas.openxmlformats.org/drawingml/2006/main">
               <a:ext uri="{FF2B5EF4-FFF2-40B4-BE49-F238E27FC236}">
-                <a16:creationId xmlns:a16="http://schemas.microsoft.com/office/drawing/2014/main" id="{564EF2FE-9E0E-4111-AF44-0156162A36C5}"/>
+                <a16:creationId xmlns:a16="http://schemas.microsoft.com/office/drawing/2014/main" id="{D48D8701-97DB-4C1E-9382-0F4FE67B5489}"/>
               </a:ext>
             </a:extLst>
           </p:cNvPr>
@@ -6908,7 +6940,7 @@
             <a:pPr algn="l">
               <a:defRPr sz="750" b="0">
                 <a:solidFill>
-                  <a:srgbClr val="61718A"/>
+                  <a:srgbClr val="52677D"/>
                 </a:solidFill>
                 <a:latin typeface="Helvetica Neue"/>
                 <a:ea typeface="Helvetica Neue"/>
@@ -6918,7 +6950,7 @@
             <a:r>
               <a:rPr sz="750" b="0">
                 <a:solidFill>
-                  <a:srgbClr val="61718A"/>
+                  <a:srgbClr val="52677D"/>
                 </a:solidFill>
                 <a:latin typeface="Helvetica Neue"/>
                 <a:ea typeface="Helvetica Neue"/>
@@ -6934,7 +6966,7 @@
           <p:cNvPr id="23" name="">
             <a:extLst xmlns:a="http://schemas.openxmlformats.org/drawingml/2006/main">
               <a:ext uri="{FF2B5EF4-FFF2-40B4-BE49-F238E27FC236}">
-                <a16:creationId xmlns:a16="http://schemas.microsoft.com/office/drawing/2014/main" id="{A5C79E60-D801-4356-AB7D-1E9EB54C0039}"/>
+                <a16:creationId xmlns:a16="http://schemas.microsoft.com/office/drawing/2014/main" id="{1F23AE7C-296E-4EA4-BEEB-AD731614D8E3}"/>
               </a:ext>
             </a:extLst>
           </p:cNvPr>
@@ -6965,7 +6997,7 @@
             <a:pPr algn="r">
               <a:defRPr sz="825" b="1">
                 <a:solidFill>
-                  <a:srgbClr val="2563EB"/>
+                  <a:srgbClr val="52677D"/>
                 </a:solidFill>
                 <a:latin typeface="Helvetica Neue"/>
                 <a:ea typeface="Helvetica Neue"/>
@@ -6975,7 +7007,7 @@
             <a:r>
               <a:rPr sz="825" b="1">
                 <a:solidFill>
-                  <a:srgbClr val="2563EB"/>
+                  <a:srgbClr val="52677D"/>
                 </a:solidFill>
                 <a:latin typeface="Helvetica Neue"/>
                 <a:ea typeface="Helvetica Neue"/>
@@ -6989,7 +7021,7 @@
     </p:spTree>
     <p:extLst>
       <p:ext uri="{BB962C8B-B14F-4D97-AF65-F5344CB8AC3E}">
-        <p14:creationId xmlns:p14="http://schemas.microsoft.com/office/powerpoint/2010/main" val="1389924220"/>
+        <p14:creationId xmlns:p14="http://schemas.microsoft.com/office/powerpoint/2010/main" val="1483740391"/>
       </p:ext>
     </p:extLst>
   </p:cSld>
@@ -7020,7 +7052,7 @@
           <p:cNvPr id="24" name="">
             <a:extLst xmlns:a="http://schemas.openxmlformats.org/drawingml/2006/main">
               <a:ext uri="{FF2B5EF4-FFF2-40B4-BE49-F238E27FC236}">
-                <a16:creationId xmlns:a16="http://schemas.microsoft.com/office/drawing/2014/main" id="{55FDC687-8B3C-497E-942F-FD594E70A77B}"/>
+                <a16:creationId xmlns:a16="http://schemas.microsoft.com/office/drawing/2014/main" id="{A5EE86CD-6E81-467B-BC9B-3DF5621C5929}"/>
               </a:ext>
             </a:extLst>
           </p:cNvPr>
@@ -7038,7 +7070,7 @@
             <a:avLst/>
           </a:prstGeom>
           <a:solidFill xmlns:a="http://schemas.openxmlformats.org/drawingml/2006/main">
-            <a:srgbClr val="00A7A0"/>
+            <a:srgbClr val="1C2E4A"/>
           </a:solidFill>
           <a:ln xmlns:a="http://schemas.openxmlformats.org/drawingml/2006/main" w="0">
             <a:noFill/>
@@ -7050,7 +7082,7 @@
           <p:cNvPr id="2" name="">
             <a:extLst xmlns:a="http://schemas.openxmlformats.org/drawingml/2006/main">
               <a:ext uri="{FF2B5EF4-FFF2-40B4-BE49-F238E27FC236}">
-                <a16:creationId xmlns:a16="http://schemas.microsoft.com/office/drawing/2014/main" id="{16C13F75-3780-40E6-9E00-036F3D7E90C1}"/>
+                <a16:creationId xmlns:a16="http://schemas.microsoft.com/office/drawing/2014/main" id="{590B8EB9-51B4-4226-ABD3-1A21425B44FE}"/>
               </a:ext>
             </a:extLst>
           </p:cNvPr>
@@ -7081,7 +7113,7 @@
             <a:pPr algn="l">
               <a:defRPr sz="1125" b="1">
                 <a:solidFill>
-                  <a:srgbClr val="2563EB"/>
+                  <a:srgbClr val="52677D"/>
                 </a:solidFill>
                 <a:latin typeface="Helvetica Neue"/>
                 <a:ea typeface="Helvetica Neue"/>
@@ -7091,7 +7123,7 @@
             <a:r>
               <a:rPr sz="1125" b="1">
                 <a:solidFill>
-                  <a:srgbClr val="2563EB"/>
+                  <a:srgbClr val="52677D"/>
                 </a:solidFill>
                 <a:latin typeface="Helvetica Neue"/>
                 <a:ea typeface="Helvetica Neue"/>
@@ -7107,7 +7139,7 @@
           <p:cNvPr id="3" name="">
             <a:extLst xmlns:a="http://schemas.openxmlformats.org/drawingml/2006/main">
               <a:ext uri="{FF2B5EF4-FFF2-40B4-BE49-F238E27FC236}">
-                <a16:creationId xmlns:a16="http://schemas.microsoft.com/office/drawing/2014/main" id="{36B703EB-2E4E-448E-AEB2-78134AFB4610}"/>
+                <a16:creationId xmlns:a16="http://schemas.microsoft.com/office/drawing/2014/main" id="{A6665106-9A95-4A8C-9C78-16B00956335C}"/>
               </a:ext>
             </a:extLst>
           </p:cNvPr>
@@ -7127,7 +7159,7 @@
             </a:avLst>
           </a:prstGeom>
           <a:solidFill xmlns:a="http://schemas.openxmlformats.org/drawingml/2006/main">
-            <a:srgbClr val="FFD43B"/>
+            <a:srgbClr val="D1CFC9"/>
           </a:solidFill>
           <a:ln xmlns:a="http://schemas.openxmlformats.org/drawingml/2006/main" w="0">
             <a:noFill/>
@@ -7139,7 +7171,7 @@
           <p:cNvPr id="4" name="">
             <a:extLst xmlns:a="http://schemas.openxmlformats.org/drawingml/2006/main">
               <a:ext uri="{FF2B5EF4-FFF2-40B4-BE49-F238E27FC236}">
-                <a16:creationId xmlns:a16="http://schemas.microsoft.com/office/drawing/2014/main" id="{A28E1587-627C-4835-9098-E3484BE67675}"/>
+                <a16:creationId xmlns:a16="http://schemas.microsoft.com/office/drawing/2014/main" id="{CDF1F754-F488-45CB-ABC3-A284CCAB92CE}"/>
               </a:ext>
             </a:extLst>
           </p:cNvPr>
@@ -7170,7 +7202,7 @@
             <a:pPr algn="ctr">
               <a:defRPr sz="1275" b="1">
                 <a:solidFill>
-                  <a:srgbClr val="092454"/>
+                  <a:srgbClr val="1C2E4A"/>
                 </a:solidFill>
                 <a:latin typeface="Helvetica Neue"/>
                 <a:ea typeface="Helvetica Neue"/>
@@ -7180,7 +7212,7 @@
             <a:r>
               <a:rPr sz="1275" b="1">
                 <a:solidFill>
-                  <a:srgbClr val="092454"/>
+                  <a:srgbClr val="1C2E4A"/>
                 </a:solidFill>
                 <a:latin typeface="Helvetica Neue"/>
                 <a:ea typeface="Helvetica Neue"/>
@@ -7196,7 +7228,7 @@
           <p:cNvPr id="5" name="">
             <a:extLst xmlns:a="http://schemas.openxmlformats.org/drawingml/2006/main">
               <a:ext uri="{FF2B5EF4-FFF2-40B4-BE49-F238E27FC236}">
-                <a16:creationId xmlns:a16="http://schemas.microsoft.com/office/drawing/2014/main" id="{43D69515-90DE-4C6E-AF7B-8DF5712E3F95}"/>
+                <a16:creationId xmlns:a16="http://schemas.microsoft.com/office/drawing/2014/main" id="{3155001C-AA55-4A9E-9229-15842CD5A1F4}"/>
               </a:ext>
             </a:extLst>
           </p:cNvPr>
@@ -7227,7 +7259,7 @@
             <a:pPr algn="l">
               <a:defRPr sz="2550" b="1">
                 <a:solidFill>
-                  <a:srgbClr val="092454"/>
+                  <a:srgbClr val="1C2E4A"/>
                 </a:solidFill>
                 <a:latin typeface="Helvetica Neue"/>
                 <a:ea typeface="Helvetica Neue"/>
@@ -7237,7 +7269,7 @@
             <a:r>
               <a:rPr sz="2550" b="1">
                 <a:solidFill>
-                  <a:srgbClr val="092454"/>
+                  <a:srgbClr val="1C2E4A"/>
                 </a:solidFill>
                 <a:latin typeface="Helvetica Neue"/>
                 <a:ea typeface="Helvetica Neue"/>
@@ -7253,7 +7285,7 @@
           <p:cNvPr id="6" name="">
             <a:extLst xmlns:a="http://schemas.openxmlformats.org/drawingml/2006/main">
               <a:ext uri="{FF2B5EF4-FFF2-40B4-BE49-F238E27FC236}">
-                <a16:creationId xmlns:a16="http://schemas.microsoft.com/office/drawing/2014/main" id="{B462B075-01CB-4763-86B4-4D39F27EC628}"/>
+                <a16:creationId xmlns:a16="http://schemas.microsoft.com/office/drawing/2014/main" id="{1CBFFDFF-02F3-4B0D-B145-67715C2540F4}"/>
               </a:ext>
             </a:extLst>
           </p:cNvPr>
@@ -7273,7 +7305,7 @@
             </a:avLst>
           </a:prstGeom>
           <a:solidFill xmlns:a="http://schemas.openxmlformats.org/drawingml/2006/main">
-            <a:srgbClr val="EEF7FF"/>
+            <a:srgbClr val="D1CFC9"/>
           </a:solidFill>
           <a:ln xmlns:a="http://schemas.openxmlformats.org/drawingml/2006/main" w="0">
             <a:noFill/>
@@ -7285,7 +7317,7 @@
           <p:cNvPr id="7" name="">
             <a:extLst xmlns:a="http://schemas.openxmlformats.org/drawingml/2006/main">
               <a:ext uri="{FF2B5EF4-FFF2-40B4-BE49-F238E27FC236}">
-                <a16:creationId xmlns:a16="http://schemas.microsoft.com/office/drawing/2014/main" id="{80AA051E-89D3-459B-B700-AF3E3135D9E4}"/>
+                <a16:creationId xmlns:a16="http://schemas.microsoft.com/office/drawing/2014/main" id="{8922326E-2CE1-460D-AC4A-79839989C292}"/>
               </a:ext>
             </a:extLst>
           </p:cNvPr>
@@ -7316,7 +7348,7 @@
             <a:pPr algn="ctr">
               <a:defRPr sz="1350" b="1">
                 <a:solidFill>
-                  <a:srgbClr val="2563EB"/>
+                  <a:srgbClr val="52677D"/>
                 </a:solidFill>
                 <a:latin typeface="Helvetica Neue"/>
                 <a:ea typeface="Helvetica Neue"/>
@@ -7326,7 +7358,7 @@
             <a:r>
               <a:rPr sz="1350" b="1">
                 <a:solidFill>
-                  <a:srgbClr val="2563EB"/>
+                  <a:srgbClr val="52677D"/>
                 </a:solidFill>
                 <a:latin typeface="Helvetica Neue"/>
                 <a:ea typeface="Helvetica Neue"/>
@@ -7342,7 +7374,7 @@
           <p:cNvPr id="8" name="">
             <a:extLst xmlns:a="http://schemas.openxmlformats.org/drawingml/2006/main">
               <a:ext uri="{FF2B5EF4-FFF2-40B4-BE49-F238E27FC236}">
-                <a16:creationId xmlns:a16="http://schemas.microsoft.com/office/drawing/2014/main" id="{DC3E57E0-B49E-4508-A9CC-5D648B11983B}"/>
+                <a16:creationId xmlns:a16="http://schemas.microsoft.com/office/drawing/2014/main" id="{18B4A976-7751-492D-8FDB-AA8675281DDB}"/>
               </a:ext>
             </a:extLst>
           </p:cNvPr>
@@ -7373,7 +7405,7 @@
             <a:pPr algn="l">
               <a:defRPr sz="1575" b="0">
                 <a:solidFill>
-                  <a:srgbClr val="10213D"/>
+                  <a:srgbClr val="0F1A2B"/>
                 </a:solidFill>
                 <a:latin typeface="Helvetica Neue"/>
                 <a:ea typeface="Helvetica Neue"/>
@@ -7383,7 +7415,7 @@
             <a:r>
               <a:rPr sz="1575" b="0">
                 <a:solidFill>
-                  <a:srgbClr val="10213D"/>
+                  <a:srgbClr val="0F1A2B"/>
                 </a:solidFill>
                 <a:latin typeface="Helvetica Neue"/>
                 <a:ea typeface="Helvetica Neue"/>
@@ -7399,7 +7431,7 @@
           <p:cNvPr id="9" name="">
             <a:extLst xmlns:a="http://schemas.openxmlformats.org/drawingml/2006/main">
               <a:ext uri="{FF2B5EF4-FFF2-40B4-BE49-F238E27FC236}">
-                <a16:creationId xmlns:a16="http://schemas.microsoft.com/office/drawing/2014/main" id="{66DFAC44-789E-45B9-AA6C-F94071E7F8F6}"/>
+                <a16:creationId xmlns:a16="http://schemas.microsoft.com/office/drawing/2014/main" id="{E9240048-5D71-4367-B90D-978D82EFDE2E}"/>
               </a:ext>
             </a:extLst>
           </p:cNvPr>
@@ -7419,7 +7451,7 @@
             </a:avLst>
           </a:prstGeom>
           <a:solidFill xmlns:a="http://schemas.openxmlformats.org/drawingml/2006/main">
-            <a:srgbClr val="EEF7FF"/>
+            <a:srgbClr val="D1CFC9"/>
           </a:solidFill>
           <a:ln xmlns:a="http://schemas.openxmlformats.org/drawingml/2006/main" w="0">
             <a:noFill/>
@@ -7431,7 +7463,7 @@
           <p:cNvPr id="10" name="">
             <a:extLst xmlns:a="http://schemas.openxmlformats.org/drawingml/2006/main">
               <a:ext uri="{FF2B5EF4-FFF2-40B4-BE49-F238E27FC236}">
-                <a16:creationId xmlns:a16="http://schemas.microsoft.com/office/drawing/2014/main" id="{4E6645E8-5820-4672-8998-F9F64F17CC91}"/>
+                <a16:creationId xmlns:a16="http://schemas.microsoft.com/office/drawing/2014/main" id="{F0308B00-BEDE-41EC-81AC-A0A7802C241E}"/>
               </a:ext>
             </a:extLst>
           </p:cNvPr>
@@ -7462,7 +7494,7 @@
             <a:pPr algn="ctr">
               <a:defRPr sz="1350" b="1">
                 <a:solidFill>
-                  <a:srgbClr val="2563EB"/>
+                  <a:srgbClr val="52677D"/>
                 </a:solidFill>
                 <a:latin typeface="Helvetica Neue"/>
                 <a:ea typeface="Helvetica Neue"/>
@@ -7472,7 +7504,7 @@
             <a:r>
               <a:rPr sz="1350" b="1">
                 <a:solidFill>
-                  <a:srgbClr val="2563EB"/>
+                  <a:srgbClr val="52677D"/>
                 </a:solidFill>
                 <a:latin typeface="Helvetica Neue"/>
                 <a:ea typeface="Helvetica Neue"/>
@@ -7488,7 +7520,7 @@
           <p:cNvPr id="11" name="">
             <a:extLst xmlns:a="http://schemas.openxmlformats.org/drawingml/2006/main">
               <a:ext uri="{FF2B5EF4-FFF2-40B4-BE49-F238E27FC236}">
-                <a16:creationId xmlns:a16="http://schemas.microsoft.com/office/drawing/2014/main" id="{A8D43EE1-10EB-4EE3-B883-F772141E2820}"/>
+                <a16:creationId xmlns:a16="http://schemas.microsoft.com/office/drawing/2014/main" id="{3453FC88-B757-4812-A9F1-2553CBF28CAA}"/>
               </a:ext>
             </a:extLst>
           </p:cNvPr>
@@ -7519,7 +7551,7 @@
             <a:pPr algn="l">
               <a:defRPr sz="1575" b="0">
                 <a:solidFill>
-                  <a:srgbClr val="10213D"/>
+                  <a:srgbClr val="0F1A2B"/>
                 </a:solidFill>
                 <a:latin typeface="Helvetica Neue"/>
                 <a:ea typeface="Helvetica Neue"/>
@@ -7529,7 +7561,7 @@
             <a:r>
               <a:rPr sz="1575" b="0">
                 <a:solidFill>
-                  <a:srgbClr val="10213D"/>
+                  <a:srgbClr val="0F1A2B"/>
                 </a:solidFill>
                 <a:latin typeface="Helvetica Neue"/>
                 <a:ea typeface="Helvetica Neue"/>
@@ -7545,7 +7577,7 @@
           <p:cNvPr id="12" name="">
             <a:extLst xmlns:a="http://schemas.openxmlformats.org/drawingml/2006/main">
               <a:ext uri="{FF2B5EF4-FFF2-40B4-BE49-F238E27FC236}">
-                <a16:creationId xmlns:a16="http://schemas.microsoft.com/office/drawing/2014/main" id="{727BAF95-7EFC-4309-87F4-AFE23D953F76}"/>
+                <a16:creationId xmlns:a16="http://schemas.microsoft.com/office/drawing/2014/main" id="{E1A07051-50E1-4987-B8C4-032D8300ECC1}"/>
               </a:ext>
             </a:extLst>
           </p:cNvPr>
@@ -7565,7 +7597,7 @@
             </a:avLst>
           </a:prstGeom>
           <a:solidFill xmlns:a="http://schemas.openxmlformats.org/drawingml/2006/main">
-            <a:srgbClr val="EEF7FF"/>
+            <a:srgbClr val="D1CFC9"/>
           </a:solidFill>
           <a:ln xmlns:a="http://schemas.openxmlformats.org/drawingml/2006/main" w="0">
             <a:noFill/>
@@ -7577,7 +7609,7 @@
           <p:cNvPr id="13" name="">
             <a:extLst xmlns:a="http://schemas.openxmlformats.org/drawingml/2006/main">
               <a:ext uri="{FF2B5EF4-FFF2-40B4-BE49-F238E27FC236}">
-                <a16:creationId xmlns:a16="http://schemas.microsoft.com/office/drawing/2014/main" id="{9688CFF5-A53A-477F-B576-C3EDBA1C48FB}"/>
+                <a16:creationId xmlns:a16="http://schemas.microsoft.com/office/drawing/2014/main" id="{CE22B75B-8C7B-4008-9EBF-060EDDB16EF0}"/>
               </a:ext>
             </a:extLst>
           </p:cNvPr>
@@ -7608,7 +7640,7 @@
             <a:pPr algn="ctr">
               <a:defRPr sz="1350" b="1">
                 <a:solidFill>
-                  <a:srgbClr val="2563EB"/>
+                  <a:srgbClr val="52677D"/>
                 </a:solidFill>
                 <a:latin typeface="Helvetica Neue"/>
                 <a:ea typeface="Helvetica Neue"/>
@@ -7618,7 +7650,7 @@
             <a:r>
               <a:rPr sz="1350" b="1">
                 <a:solidFill>
-                  <a:srgbClr val="2563EB"/>
+                  <a:srgbClr val="52677D"/>
                 </a:solidFill>
                 <a:latin typeface="Helvetica Neue"/>
                 <a:ea typeface="Helvetica Neue"/>
@@ -7634,7 +7666,7 @@
           <p:cNvPr id="14" name="">
             <a:extLst xmlns:a="http://schemas.openxmlformats.org/drawingml/2006/main">
               <a:ext uri="{FF2B5EF4-FFF2-40B4-BE49-F238E27FC236}">
-                <a16:creationId xmlns:a16="http://schemas.microsoft.com/office/drawing/2014/main" id="{22013021-CE91-400B-B140-FEA5FE5D8566}"/>
+                <a16:creationId xmlns:a16="http://schemas.microsoft.com/office/drawing/2014/main" id="{11E95126-0D4E-417D-B62A-8C3994589B07}"/>
               </a:ext>
             </a:extLst>
           </p:cNvPr>
@@ -7665,7 +7697,7 @@
             <a:pPr algn="l">
               <a:defRPr sz="1575" b="0">
                 <a:solidFill>
-                  <a:srgbClr val="10213D"/>
+                  <a:srgbClr val="0F1A2B"/>
                 </a:solidFill>
                 <a:latin typeface="Helvetica Neue"/>
                 <a:ea typeface="Helvetica Neue"/>
@@ -7675,7 +7707,7 @@
             <a:r>
               <a:rPr sz="1575" b="0">
                 <a:solidFill>
-                  <a:srgbClr val="10213D"/>
+                  <a:srgbClr val="0F1A2B"/>
                 </a:solidFill>
                 <a:latin typeface="Helvetica Neue"/>
                 <a:ea typeface="Helvetica Neue"/>
@@ -7691,7 +7723,7 @@
           <p:cNvPr id="15" name="">
             <a:extLst xmlns:a="http://schemas.openxmlformats.org/drawingml/2006/main">
               <a:ext uri="{FF2B5EF4-FFF2-40B4-BE49-F238E27FC236}">
-                <a16:creationId xmlns:a16="http://schemas.microsoft.com/office/drawing/2014/main" id="{9F2C1264-46C0-4BD3-BAC8-C8A1E3F79CE5}"/>
+                <a16:creationId xmlns:a16="http://schemas.microsoft.com/office/drawing/2014/main" id="{C4A21D21-6EEB-4AAC-8396-8BF23A47E868}"/>
               </a:ext>
             </a:extLst>
           </p:cNvPr>
@@ -7711,7 +7743,7 @@
             </a:avLst>
           </a:prstGeom>
           <a:solidFill xmlns:a="http://schemas.openxmlformats.org/drawingml/2006/main">
-            <a:srgbClr val="EEF7FF"/>
+            <a:srgbClr val="D1CFC9"/>
           </a:solidFill>
           <a:ln xmlns:a="http://schemas.openxmlformats.org/drawingml/2006/main" w="0">
             <a:noFill/>
@@ -7723,7 +7755,7 @@
           <p:cNvPr id="16" name="">
             <a:extLst xmlns:a="http://schemas.openxmlformats.org/drawingml/2006/main">
               <a:ext uri="{FF2B5EF4-FFF2-40B4-BE49-F238E27FC236}">
-                <a16:creationId xmlns:a16="http://schemas.microsoft.com/office/drawing/2014/main" id="{3A716DAF-E767-4523-A0C8-EDFD03F0E20E}"/>
+                <a16:creationId xmlns:a16="http://schemas.microsoft.com/office/drawing/2014/main" id="{34C84945-7004-4041-9930-67AD893FB4E2}"/>
               </a:ext>
             </a:extLst>
           </p:cNvPr>
@@ -7754,7 +7786,7 @@
             <a:pPr algn="l">
               <a:defRPr sz="1125" b="0">
                 <a:solidFill>
-                  <a:srgbClr val="092454"/>
+                  <a:srgbClr val="1C2E4A"/>
                 </a:solidFill>
                 <a:latin typeface="Helvetica Neue"/>
                 <a:ea typeface="Helvetica Neue"/>
@@ -7764,7 +7796,7 @@
             <a:r>
               <a:rPr sz="1125" b="0">
                 <a:solidFill>
-                  <a:srgbClr val="092454"/>
+                  <a:srgbClr val="1C2E4A"/>
                 </a:solidFill>
                 <a:latin typeface="Helvetica Neue"/>
                 <a:ea typeface="Helvetica Neue"/>
@@ -7780,7 +7812,7 @@
           <p:cNvPr id="17" name="">
             <a:extLst xmlns:a="http://schemas.openxmlformats.org/drawingml/2006/main">
               <a:ext uri="{FF2B5EF4-FFF2-40B4-BE49-F238E27FC236}">
-                <a16:creationId xmlns:a16="http://schemas.microsoft.com/office/drawing/2014/main" id="{7ABE8A1E-DDF1-44BF-A9AA-9EB54479D7D0}"/>
+                <a16:creationId xmlns:a16="http://schemas.microsoft.com/office/drawing/2014/main" id="{1725E6C5-B3E6-4583-A858-C21A20F464F6}"/>
               </a:ext>
             </a:extLst>
           </p:cNvPr>
@@ -7800,7 +7832,7 @@
             </a:avLst>
           </a:prstGeom>
           <a:solidFill xmlns:a="http://schemas.openxmlformats.org/drawingml/2006/main">
-            <a:srgbClr val="092454"/>
+            <a:srgbClr val="1C2E4A"/>
           </a:solidFill>
           <a:ln xmlns:a="http://schemas.openxmlformats.org/drawingml/2006/main" w="0">
             <a:noFill/>
@@ -7812,7 +7844,7 @@
           <p:cNvPr id="18" name="">
             <a:extLst xmlns:a="http://schemas.openxmlformats.org/drawingml/2006/main">
               <a:ext uri="{FF2B5EF4-FFF2-40B4-BE49-F238E27FC236}">
-                <a16:creationId xmlns:a16="http://schemas.microsoft.com/office/drawing/2014/main" id="{4B576762-F50B-46D1-8F96-ADEFB87D1584}"/>
+                <a16:creationId xmlns:a16="http://schemas.microsoft.com/office/drawing/2014/main" id="{AF394FC1-80CF-40AD-AF63-02046262DE42}"/>
               </a:ext>
             </a:extLst>
           </p:cNvPr>
@@ -7843,7 +7875,7 @@
             <a:pPr algn="l">
               <a:defRPr sz="1050" b="1">
                 <a:solidFill>
-                  <a:srgbClr val="FFD43B"/>
+                  <a:srgbClr val="D1CFC9"/>
                 </a:solidFill>
                 <a:latin typeface="Helvetica Neue"/>
                 <a:ea typeface="Helvetica Neue"/>
@@ -7853,7 +7885,7 @@
             <a:r>
               <a:rPr sz="1050" b="1">
                 <a:solidFill>
-                  <a:srgbClr val="FFD43B"/>
+                  <a:srgbClr val="D1CFC9"/>
                 </a:solidFill>
                 <a:latin typeface="Helvetica Neue"/>
                 <a:ea typeface="Helvetica Neue"/>
@@ -7869,7 +7901,7 @@
           <p:cNvPr id="19" name="">
             <a:extLst xmlns:a="http://schemas.openxmlformats.org/drawingml/2006/main">
               <a:ext uri="{FF2B5EF4-FFF2-40B4-BE49-F238E27FC236}">
-                <a16:creationId xmlns:a16="http://schemas.microsoft.com/office/drawing/2014/main" id="{A96E92F4-B210-4AC0-8E45-53C0434C853C}"/>
+                <a16:creationId xmlns:a16="http://schemas.microsoft.com/office/drawing/2014/main" id="{E571942A-A87C-4219-98E7-42E85FA9B58F}"/>
               </a:ext>
             </a:extLst>
           </p:cNvPr>
@@ -7926,7 +7958,7 @@
           <p:cNvPr id="20" name="">
             <a:extLst xmlns:a="http://schemas.openxmlformats.org/drawingml/2006/main">
               <a:ext uri="{FF2B5EF4-FFF2-40B4-BE49-F238E27FC236}">
-                <a16:creationId xmlns:a16="http://schemas.microsoft.com/office/drawing/2014/main" id="{23857321-C798-4E6D-B02D-E770C78CFC33}"/>
+                <a16:creationId xmlns:a16="http://schemas.microsoft.com/office/drawing/2014/main" id="{A4F1D718-9B05-40BF-9DF7-189CFDCADEF5}"/>
               </a:ext>
             </a:extLst>
           </p:cNvPr>
@@ -7957,7 +7989,7 @@
             <a:pPr algn="l">
               <a:defRPr sz="1125" b="0">
                 <a:solidFill>
-                  <a:srgbClr val="BFE6FF"/>
+                  <a:srgbClr val="BDC4D4"/>
                 </a:solidFill>
                 <a:latin typeface="Helvetica Neue"/>
                 <a:ea typeface="Helvetica Neue"/>
@@ -7967,7 +7999,7 @@
             <a:r>
               <a:rPr sz="1125" b="0">
                 <a:solidFill>
-                  <a:srgbClr val="BFE6FF"/>
+                  <a:srgbClr val="BDC4D4"/>
                 </a:solidFill>
                 <a:latin typeface="Helvetica Neue"/>
                 <a:ea typeface="Helvetica Neue"/>
@@ -7983,7 +8015,7 @@
           <p:cNvPr id="21" name="">
             <a:extLst xmlns:a="http://schemas.openxmlformats.org/drawingml/2006/main">
               <a:ext uri="{FF2B5EF4-FFF2-40B4-BE49-F238E27FC236}">
-                <a16:creationId xmlns:a16="http://schemas.microsoft.com/office/drawing/2014/main" id="{B9F7A838-A011-40CA-B9C7-F050A407D213}"/>
+                <a16:creationId xmlns:a16="http://schemas.microsoft.com/office/drawing/2014/main" id="{8FE81A10-3C7D-47BF-8330-CA0C62BD5A4D}"/>
               </a:ext>
             </a:extLst>
           </p:cNvPr>
@@ -8001,7 +8033,7 @@
             <a:avLst/>
           </a:prstGeom>
           <a:solidFill xmlns:a="http://schemas.openxmlformats.org/drawingml/2006/main">
-            <a:srgbClr val="D8E5F2"/>
+            <a:srgbClr val="BDC4D4"/>
           </a:solidFill>
           <a:ln xmlns:a="http://schemas.openxmlformats.org/drawingml/2006/main" w="0">
             <a:noFill/>
@@ -8013,7 +8045,7 @@
           <p:cNvPr id="22" name="">
             <a:extLst xmlns:a="http://schemas.openxmlformats.org/drawingml/2006/main">
               <a:ext uri="{FF2B5EF4-FFF2-40B4-BE49-F238E27FC236}">
-                <a16:creationId xmlns:a16="http://schemas.microsoft.com/office/drawing/2014/main" id="{1BFFA4DA-F2A8-4E4C-ACE1-83503E53ADD2}"/>
+                <a16:creationId xmlns:a16="http://schemas.microsoft.com/office/drawing/2014/main" id="{8A778186-8202-4346-9D16-C29A3F80C48C}"/>
               </a:ext>
             </a:extLst>
           </p:cNvPr>
@@ -8044,7 +8076,7 @@
             <a:pPr algn="l">
               <a:defRPr sz="750" b="0">
                 <a:solidFill>
-                  <a:srgbClr val="61718A"/>
+                  <a:srgbClr val="52677D"/>
                 </a:solidFill>
                 <a:latin typeface="Helvetica Neue"/>
                 <a:ea typeface="Helvetica Neue"/>
@@ -8054,7 +8086,7 @@
             <a:r>
               <a:rPr sz="750" b="0">
                 <a:solidFill>
-                  <a:srgbClr val="61718A"/>
+                  <a:srgbClr val="52677D"/>
                 </a:solidFill>
                 <a:latin typeface="Helvetica Neue"/>
                 <a:ea typeface="Helvetica Neue"/>
@@ -8070,7 +8102,7 @@
           <p:cNvPr id="23" name="">
             <a:extLst xmlns:a="http://schemas.openxmlformats.org/drawingml/2006/main">
               <a:ext uri="{FF2B5EF4-FFF2-40B4-BE49-F238E27FC236}">
-                <a16:creationId xmlns:a16="http://schemas.microsoft.com/office/drawing/2014/main" id="{95F6D544-CED7-4D41-86B2-43709B9FEC42}"/>
+                <a16:creationId xmlns:a16="http://schemas.microsoft.com/office/drawing/2014/main" id="{B6948011-421B-4573-9492-759AE5D022FB}"/>
               </a:ext>
             </a:extLst>
           </p:cNvPr>
@@ -8101,7 +8133,7 @@
             <a:pPr algn="r">
               <a:defRPr sz="825" b="1">
                 <a:solidFill>
-                  <a:srgbClr val="2563EB"/>
+                  <a:srgbClr val="52677D"/>
                 </a:solidFill>
                 <a:latin typeface="Helvetica Neue"/>
                 <a:ea typeface="Helvetica Neue"/>
@@ -8111,7 +8143,7 @@
             <a:r>
               <a:rPr sz="825" b="1">
                 <a:solidFill>
-                  <a:srgbClr val="2563EB"/>
+                  <a:srgbClr val="52677D"/>
                 </a:solidFill>
                 <a:latin typeface="Helvetica Neue"/>
                 <a:ea typeface="Helvetica Neue"/>
@@ -8125,7 +8157,7 @@
     </p:spTree>
     <p:extLst>
       <p:ext uri="{BB962C8B-B14F-4D97-AF65-F5344CB8AC3E}">
-        <p14:creationId xmlns:p14="http://schemas.microsoft.com/office/powerpoint/2010/main" val="2111814788"/>
+        <p14:creationId xmlns:p14="http://schemas.microsoft.com/office/powerpoint/2010/main" val="712065430"/>
       </p:ext>
     </p:extLst>
   </p:cSld>
@@ -8156,7 +8188,7 @@
           <p:cNvPr id="29" name="">
             <a:extLst xmlns:a="http://schemas.openxmlformats.org/drawingml/2006/main">
               <a:ext uri="{FF2B5EF4-FFF2-40B4-BE49-F238E27FC236}">
-                <a16:creationId xmlns:a16="http://schemas.microsoft.com/office/drawing/2014/main" id="{F164BDC2-65C1-4422-AB01-C922BEEAA07F}"/>
+                <a16:creationId xmlns:a16="http://schemas.microsoft.com/office/drawing/2014/main" id="{98201B40-C59E-404F-8B1E-DC2725D4C3B9}"/>
               </a:ext>
             </a:extLst>
           </p:cNvPr>
@@ -8187,7 +8219,7 @@
             <a:pPr algn="l">
               <a:defRPr sz="1125" b="1">
                 <a:solidFill>
-                  <a:srgbClr val="2563EB"/>
+                  <a:srgbClr val="52677D"/>
                 </a:solidFill>
                 <a:latin typeface="Helvetica Neue"/>
                 <a:ea typeface="Helvetica Neue"/>
@@ -8197,7 +8229,7 @@
             <a:r>
               <a:rPr sz="1125" b="1">
                 <a:solidFill>
-                  <a:srgbClr val="2563EB"/>
+                  <a:srgbClr val="52677D"/>
                 </a:solidFill>
                 <a:latin typeface="Helvetica Neue"/>
                 <a:ea typeface="Helvetica Neue"/>
@@ -8213,7 +8245,7 @@
           <p:cNvPr id="2" name="">
             <a:extLst xmlns:a="http://schemas.openxmlformats.org/drawingml/2006/main">
               <a:ext uri="{FF2B5EF4-FFF2-40B4-BE49-F238E27FC236}">
-                <a16:creationId xmlns:a16="http://schemas.microsoft.com/office/drawing/2014/main" id="{C79F9B9E-BB8B-4497-91C4-41BF66A16577}"/>
+                <a16:creationId xmlns:a16="http://schemas.microsoft.com/office/drawing/2014/main" id="{83A7C12B-E821-4DB8-8C29-10E676A689DF}"/>
               </a:ext>
             </a:extLst>
           </p:cNvPr>
@@ -8244,7 +8276,7 @@
             <a:pPr algn="l">
               <a:defRPr sz="2850" b="1">
                 <a:solidFill>
-                  <a:srgbClr val="092454"/>
+                  <a:srgbClr val="1C2E4A"/>
                 </a:solidFill>
                 <a:latin typeface="Helvetica Neue"/>
                 <a:ea typeface="Helvetica Neue"/>
@@ -8254,7 +8286,7 @@
             <a:r>
               <a:rPr sz="2850" b="1">
                 <a:solidFill>
-                  <a:srgbClr val="092454"/>
+                  <a:srgbClr val="1C2E4A"/>
                 </a:solidFill>
                 <a:latin typeface="Helvetica Neue"/>
                 <a:ea typeface="Helvetica Neue"/>
@@ -8270,7 +8302,7 @@
           <p:cNvPr id="3" name="">
             <a:extLst xmlns:a="http://schemas.openxmlformats.org/drawingml/2006/main">
               <a:ext uri="{FF2B5EF4-FFF2-40B4-BE49-F238E27FC236}">
-                <a16:creationId xmlns:a16="http://schemas.microsoft.com/office/drawing/2014/main" id="{932BA4C4-C01B-4A5A-B44A-835D35B47FD0}"/>
+                <a16:creationId xmlns:a16="http://schemas.microsoft.com/office/drawing/2014/main" id="{C16405FF-D91E-4DE2-B59F-F7559733E6B9}"/>
               </a:ext>
             </a:extLst>
           </p:cNvPr>
@@ -8301,7 +8333,7 @@
             <a:pPr algn="l">
               <a:defRPr sz="1425" b="0">
                 <a:solidFill>
-                  <a:srgbClr val="61718A"/>
+                  <a:srgbClr val="52677D"/>
                 </a:solidFill>
                 <a:latin typeface="Helvetica Neue"/>
                 <a:ea typeface="Helvetica Neue"/>
@@ -8311,7 +8343,7 @@
             <a:r>
               <a:rPr sz="1425" b="0">
                 <a:solidFill>
-                  <a:srgbClr val="61718A"/>
+                  <a:srgbClr val="52677D"/>
                 </a:solidFill>
                 <a:latin typeface="Helvetica Neue"/>
                 <a:ea typeface="Helvetica Neue"/>
@@ -8327,7 +8359,7 @@
           <p:cNvPr id="4" name="">
             <a:extLst xmlns:a="http://schemas.openxmlformats.org/drawingml/2006/main">
               <a:ext uri="{FF2B5EF4-FFF2-40B4-BE49-F238E27FC236}">
-                <a16:creationId xmlns:a16="http://schemas.microsoft.com/office/drawing/2014/main" id="{9ADBFC27-2FE7-4D6A-9423-75FA7143850E}"/>
+                <a16:creationId xmlns:a16="http://schemas.microsoft.com/office/drawing/2014/main" id="{08194CB6-66C0-4285-8200-E230CBADE25D}"/>
               </a:ext>
             </a:extLst>
           </p:cNvPr>
@@ -8351,7 +8383,7 @@
           </a:solidFill>
           <a:ln xmlns:a="http://schemas.openxmlformats.org/drawingml/2006/main" w="28575">
             <a:solidFill>
-              <a:srgbClr val="2563EB"/>
+              <a:srgbClr val="52677D"/>
             </a:solidFill>
           </a:ln>
         </p:spPr>
@@ -8361,7 +8393,7 @@
           <p:cNvPr id="5" name="">
             <a:extLst xmlns:a="http://schemas.openxmlformats.org/drawingml/2006/main">
               <a:ext uri="{FF2B5EF4-FFF2-40B4-BE49-F238E27FC236}">
-                <a16:creationId xmlns:a16="http://schemas.microsoft.com/office/drawing/2014/main" id="{F41B9A32-1F2D-412C-999C-F71FA67AF7D4}"/>
+                <a16:creationId xmlns:a16="http://schemas.microsoft.com/office/drawing/2014/main" id="{ECBB899D-D677-4637-9003-E4BEDCF578CB}"/>
               </a:ext>
             </a:extLst>
           </p:cNvPr>
@@ -8381,7 +8413,7 @@
             </a:avLst>
           </a:prstGeom>
           <a:solidFill xmlns:a="http://schemas.openxmlformats.org/drawingml/2006/main">
-            <a:srgbClr val="2563EB"/>
+            <a:srgbClr val="52677D"/>
           </a:solidFill>
           <a:ln xmlns:a="http://schemas.openxmlformats.org/drawingml/2006/main" w="0">
             <a:noFill/>
@@ -8393,7 +8425,7 @@
           <p:cNvPr id="6" name="">
             <a:extLst xmlns:a="http://schemas.openxmlformats.org/drawingml/2006/main">
               <a:ext uri="{FF2B5EF4-FFF2-40B4-BE49-F238E27FC236}">
-                <a16:creationId xmlns:a16="http://schemas.microsoft.com/office/drawing/2014/main" id="{1CE2809F-81AD-4D24-A92A-2BD4FE802415}"/>
+                <a16:creationId xmlns:a16="http://schemas.microsoft.com/office/drawing/2014/main" id="{37814413-4AC6-49E1-859A-A064F09DF25D}"/>
               </a:ext>
             </a:extLst>
           </p:cNvPr>
@@ -8450,7 +8482,7 @@
           <p:cNvPr id="7" name="">
             <a:extLst xmlns:a="http://schemas.openxmlformats.org/drawingml/2006/main">
               <a:ext uri="{FF2B5EF4-FFF2-40B4-BE49-F238E27FC236}">
-                <a16:creationId xmlns:a16="http://schemas.microsoft.com/office/drawing/2014/main" id="{75C991AB-0C7D-41C3-9E92-B2683F880898}"/>
+                <a16:creationId xmlns:a16="http://schemas.microsoft.com/office/drawing/2014/main" id="{ECD718EA-7A6D-424C-860A-B4F2660AC867}"/>
               </a:ext>
             </a:extLst>
           </p:cNvPr>
@@ -8468,7 +8500,7 @@
             <a:avLst/>
           </a:prstGeom>
           <a:solidFill xmlns:a="http://schemas.openxmlformats.org/drawingml/2006/main">
-            <a:srgbClr val="2563EB"/>
+            <a:srgbClr val="52677D"/>
           </a:solidFill>
           <a:ln xmlns:a="http://schemas.openxmlformats.org/drawingml/2006/main" w="0">
             <a:noFill/>
@@ -8480,7 +8512,7 @@
           <p:cNvPr id="8" name="">
             <a:extLst xmlns:a="http://schemas.openxmlformats.org/drawingml/2006/main">
               <a:ext uri="{FF2B5EF4-FFF2-40B4-BE49-F238E27FC236}">
-                <a16:creationId xmlns:a16="http://schemas.microsoft.com/office/drawing/2014/main" id="{7C3AFB69-6E06-4FF9-9BCC-95F6A223C841}"/>
+                <a16:creationId xmlns:a16="http://schemas.microsoft.com/office/drawing/2014/main" id="{194FF927-1B45-4FAE-B7CA-8991B66A23C3}"/>
               </a:ext>
             </a:extLst>
           </p:cNvPr>
@@ -8511,7 +8543,7 @@
             <a:pPr algn="l">
               <a:defRPr sz="1425" b="0">
                 <a:solidFill>
-                  <a:srgbClr val="10213D"/>
+                  <a:srgbClr val="0F1A2B"/>
                 </a:solidFill>
                 <a:latin typeface="Helvetica Neue"/>
                 <a:ea typeface="Helvetica Neue"/>
@@ -8521,7 +8553,7 @@
             <a:r>
               <a:rPr sz="1425" b="0">
                 <a:solidFill>
-                  <a:srgbClr val="10213D"/>
+                  <a:srgbClr val="0F1A2B"/>
                 </a:solidFill>
                 <a:latin typeface="Helvetica Neue"/>
                 <a:ea typeface="Helvetica Neue"/>
@@ -8537,7 +8569,7 @@
           <p:cNvPr id="9" name="">
             <a:extLst xmlns:a="http://schemas.openxmlformats.org/drawingml/2006/main">
               <a:ext uri="{FF2B5EF4-FFF2-40B4-BE49-F238E27FC236}">
-                <a16:creationId xmlns:a16="http://schemas.microsoft.com/office/drawing/2014/main" id="{66717141-EC56-4AA8-8A84-192A7897B23E}"/>
+                <a16:creationId xmlns:a16="http://schemas.microsoft.com/office/drawing/2014/main" id="{4DBB13C1-635D-4212-94E7-F44328604D56}"/>
               </a:ext>
             </a:extLst>
           </p:cNvPr>
@@ -8555,7 +8587,7 @@
             <a:avLst/>
           </a:prstGeom>
           <a:solidFill xmlns:a="http://schemas.openxmlformats.org/drawingml/2006/main">
-            <a:srgbClr val="2563EB"/>
+            <a:srgbClr val="52677D"/>
           </a:solidFill>
           <a:ln xmlns:a="http://schemas.openxmlformats.org/drawingml/2006/main" w="0">
             <a:noFill/>
@@ -8567,7 +8599,7 @@
           <p:cNvPr id="10" name="">
             <a:extLst xmlns:a="http://schemas.openxmlformats.org/drawingml/2006/main">
               <a:ext uri="{FF2B5EF4-FFF2-40B4-BE49-F238E27FC236}">
-                <a16:creationId xmlns:a16="http://schemas.microsoft.com/office/drawing/2014/main" id="{BB8D1EF1-D4B0-4997-BB23-18E1D5586546}"/>
+                <a16:creationId xmlns:a16="http://schemas.microsoft.com/office/drawing/2014/main" id="{67CFF6D7-88FA-4BA4-A156-018A2F70EF4F}"/>
               </a:ext>
             </a:extLst>
           </p:cNvPr>
@@ -8598,7 +8630,7 @@
             <a:pPr algn="l">
               <a:defRPr sz="1425" b="0">
                 <a:solidFill>
-                  <a:srgbClr val="10213D"/>
+                  <a:srgbClr val="0F1A2B"/>
                 </a:solidFill>
                 <a:latin typeface="Helvetica Neue"/>
                 <a:ea typeface="Helvetica Neue"/>
@@ -8608,7 +8640,7 @@
             <a:r>
               <a:rPr sz="1425" b="0">
                 <a:solidFill>
-                  <a:srgbClr val="10213D"/>
+                  <a:srgbClr val="0F1A2B"/>
                 </a:solidFill>
                 <a:latin typeface="Helvetica Neue"/>
                 <a:ea typeface="Helvetica Neue"/>
@@ -8624,7 +8656,7 @@
           <p:cNvPr id="11" name="">
             <a:extLst xmlns:a="http://schemas.openxmlformats.org/drawingml/2006/main">
               <a:ext uri="{FF2B5EF4-FFF2-40B4-BE49-F238E27FC236}">
-                <a16:creationId xmlns:a16="http://schemas.microsoft.com/office/drawing/2014/main" id="{AC717E83-1E5C-4504-BBA5-AAC7B55B1CF0}"/>
+                <a16:creationId xmlns:a16="http://schemas.microsoft.com/office/drawing/2014/main" id="{3C09A079-2F78-49B8-8DF0-6CCA566988BF}"/>
               </a:ext>
             </a:extLst>
           </p:cNvPr>
@@ -8642,7 +8674,7 @@
             <a:avLst/>
           </a:prstGeom>
           <a:solidFill xmlns:a="http://schemas.openxmlformats.org/drawingml/2006/main">
-            <a:srgbClr val="2563EB"/>
+            <a:srgbClr val="52677D"/>
           </a:solidFill>
           <a:ln xmlns:a="http://schemas.openxmlformats.org/drawingml/2006/main" w="0">
             <a:noFill/>
@@ -8654,7 +8686,7 @@
           <p:cNvPr id="12" name="">
             <a:extLst xmlns:a="http://schemas.openxmlformats.org/drawingml/2006/main">
               <a:ext uri="{FF2B5EF4-FFF2-40B4-BE49-F238E27FC236}">
-                <a16:creationId xmlns:a16="http://schemas.microsoft.com/office/drawing/2014/main" id="{7B0148F7-B60A-4F2D-B99D-74853F9502EB}"/>
+                <a16:creationId xmlns:a16="http://schemas.microsoft.com/office/drawing/2014/main" id="{A58FD900-84AA-4B80-AF79-2C3AB1C43803}"/>
               </a:ext>
             </a:extLst>
           </p:cNvPr>
@@ -8685,7 +8717,7 @@
             <a:pPr algn="l">
               <a:defRPr sz="1425" b="0">
                 <a:solidFill>
-                  <a:srgbClr val="10213D"/>
+                  <a:srgbClr val="0F1A2B"/>
                 </a:solidFill>
                 <a:latin typeface="Helvetica Neue"/>
                 <a:ea typeface="Helvetica Neue"/>
@@ -8695,7 +8727,7 @@
             <a:r>
               <a:rPr sz="1425" b="0">
                 <a:solidFill>
-                  <a:srgbClr val="10213D"/>
+                  <a:srgbClr val="0F1A2B"/>
                 </a:solidFill>
                 <a:latin typeface="Helvetica Neue"/>
                 <a:ea typeface="Helvetica Neue"/>
@@ -8711,7 +8743,7 @@
           <p:cNvPr id="13" name="">
             <a:extLst xmlns:a="http://schemas.openxmlformats.org/drawingml/2006/main">
               <a:ext uri="{FF2B5EF4-FFF2-40B4-BE49-F238E27FC236}">
-                <a16:creationId xmlns:a16="http://schemas.microsoft.com/office/drawing/2014/main" id="{697A3479-E907-472A-A95D-B82B0970F930}"/>
+                <a16:creationId xmlns:a16="http://schemas.microsoft.com/office/drawing/2014/main" id="{03007B38-ED38-4618-AB0D-ED9244BA8627}"/>
               </a:ext>
             </a:extLst>
           </p:cNvPr>
@@ -8729,7 +8761,7 @@
             <a:avLst/>
           </a:prstGeom>
           <a:solidFill xmlns:a="http://schemas.openxmlformats.org/drawingml/2006/main">
-            <a:srgbClr val="2563EB"/>
+            <a:srgbClr val="52677D"/>
           </a:solidFill>
           <a:ln xmlns:a="http://schemas.openxmlformats.org/drawingml/2006/main" w="0">
             <a:noFill/>
@@ -8741,7 +8773,7 @@
           <p:cNvPr id="14" name="">
             <a:extLst xmlns:a="http://schemas.openxmlformats.org/drawingml/2006/main">
               <a:ext uri="{FF2B5EF4-FFF2-40B4-BE49-F238E27FC236}">
-                <a16:creationId xmlns:a16="http://schemas.microsoft.com/office/drawing/2014/main" id="{2C00C122-399E-469A-ACAA-FA4C79C2BB2F}"/>
+                <a16:creationId xmlns:a16="http://schemas.microsoft.com/office/drawing/2014/main" id="{F43B2187-8365-4ACE-B340-D705CFE4E9D5}"/>
               </a:ext>
             </a:extLst>
           </p:cNvPr>
@@ -8772,7 +8804,7 @@
             <a:pPr algn="l">
               <a:defRPr sz="1425" b="0">
                 <a:solidFill>
-                  <a:srgbClr val="10213D"/>
+                  <a:srgbClr val="0F1A2B"/>
                 </a:solidFill>
                 <a:latin typeface="Helvetica Neue"/>
                 <a:ea typeface="Helvetica Neue"/>
@@ -8782,7 +8814,7 @@
             <a:r>
               <a:rPr sz="1425" b="0">
                 <a:solidFill>
-                  <a:srgbClr val="10213D"/>
+                  <a:srgbClr val="0F1A2B"/>
                 </a:solidFill>
                 <a:latin typeface="Helvetica Neue"/>
                 <a:ea typeface="Helvetica Neue"/>
@@ -8798,7 +8830,7 @@
           <p:cNvPr id="15" name="">
             <a:extLst xmlns:a="http://schemas.openxmlformats.org/drawingml/2006/main">
               <a:ext uri="{FF2B5EF4-FFF2-40B4-BE49-F238E27FC236}">
-                <a16:creationId xmlns:a16="http://schemas.microsoft.com/office/drawing/2014/main" id="{EBC11C9D-9139-4BA0-9B4F-10C61A97A27C}"/>
+                <a16:creationId xmlns:a16="http://schemas.microsoft.com/office/drawing/2014/main" id="{D9614BF1-9A87-4627-848E-292EC92237B8}"/>
               </a:ext>
             </a:extLst>
           </p:cNvPr>
@@ -8822,7 +8854,7 @@
           </a:solidFill>
           <a:ln xmlns:a="http://schemas.openxmlformats.org/drawingml/2006/main" w="28575">
             <a:solidFill>
-              <a:srgbClr val="FF7C70"/>
+              <a:srgbClr val="52677D"/>
             </a:solidFill>
           </a:ln>
         </p:spPr>
@@ -8832,7 +8864,7 @@
           <p:cNvPr id="16" name="">
             <a:extLst xmlns:a="http://schemas.openxmlformats.org/drawingml/2006/main">
               <a:ext uri="{FF2B5EF4-FFF2-40B4-BE49-F238E27FC236}">
-                <a16:creationId xmlns:a16="http://schemas.microsoft.com/office/drawing/2014/main" id="{663382F0-3F83-4801-A2DA-3EF4852FA111}"/>
+                <a16:creationId xmlns:a16="http://schemas.microsoft.com/office/drawing/2014/main" id="{5D5A4E86-93CD-4998-8735-CC3E681F9765}"/>
               </a:ext>
             </a:extLst>
           </p:cNvPr>
@@ -8852,7 +8884,7 @@
             </a:avLst>
           </a:prstGeom>
           <a:solidFill xmlns:a="http://schemas.openxmlformats.org/drawingml/2006/main">
-            <a:srgbClr val="FF7C70"/>
+            <a:srgbClr val="52677D"/>
           </a:solidFill>
           <a:ln xmlns:a="http://schemas.openxmlformats.org/drawingml/2006/main" w="0">
             <a:noFill/>
@@ -8864,7 +8896,7 @@
           <p:cNvPr id="17" name="">
             <a:extLst xmlns:a="http://schemas.openxmlformats.org/drawingml/2006/main">
               <a:ext uri="{FF2B5EF4-FFF2-40B4-BE49-F238E27FC236}">
-                <a16:creationId xmlns:a16="http://schemas.microsoft.com/office/drawing/2014/main" id="{08106826-E822-45B1-B254-1932F620BC0C}"/>
+                <a16:creationId xmlns:a16="http://schemas.microsoft.com/office/drawing/2014/main" id="{60B3FD8B-D29E-471C-A19E-304C3A870D5F}"/>
               </a:ext>
             </a:extLst>
           </p:cNvPr>
@@ -8921,7 +8953,7 @@
           <p:cNvPr id="18" name="">
             <a:extLst xmlns:a="http://schemas.openxmlformats.org/drawingml/2006/main">
               <a:ext uri="{FF2B5EF4-FFF2-40B4-BE49-F238E27FC236}">
-                <a16:creationId xmlns:a16="http://schemas.microsoft.com/office/drawing/2014/main" id="{4B119460-DEA4-434E-84B9-20A0B2205145}"/>
+                <a16:creationId xmlns:a16="http://schemas.microsoft.com/office/drawing/2014/main" id="{432997A0-E280-4E70-B4A8-C34F600B812B}"/>
               </a:ext>
             </a:extLst>
           </p:cNvPr>
@@ -8939,7 +8971,7 @@
             <a:avLst/>
           </a:prstGeom>
           <a:solidFill xmlns:a="http://schemas.openxmlformats.org/drawingml/2006/main">
-            <a:srgbClr val="FF7C70"/>
+            <a:srgbClr val="52677D"/>
           </a:solidFill>
           <a:ln xmlns:a="http://schemas.openxmlformats.org/drawingml/2006/main" w="0">
             <a:noFill/>
@@ -8951,7 +8983,7 @@
           <p:cNvPr id="19" name="">
             <a:extLst xmlns:a="http://schemas.openxmlformats.org/drawingml/2006/main">
               <a:ext uri="{FF2B5EF4-FFF2-40B4-BE49-F238E27FC236}">
-                <a16:creationId xmlns:a16="http://schemas.microsoft.com/office/drawing/2014/main" id="{301359EC-0F00-4DDC-B4AE-7763CC6373DA}"/>
+                <a16:creationId xmlns:a16="http://schemas.microsoft.com/office/drawing/2014/main" id="{55D5D990-525F-43DD-8C2A-E548CCBDEE90}"/>
               </a:ext>
             </a:extLst>
           </p:cNvPr>
@@ -8982,7 +9014,7 @@
             <a:pPr algn="l">
               <a:defRPr sz="1425" b="0">
                 <a:solidFill>
-                  <a:srgbClr val="10213D"/>
+                  <a:srgbClr val="0F1A2B"/>
                 </a:solidFill>
                 <a:latin typeface="Helvetica Neue"/>
                 <a:ea typeface="Helvetica Neue"/>
@@ -8992,7 +9024,7 @@
             <a:r>
               <a:rPr sz="1425" b="0">
                 <a:solidFill>
-                  <a:srgbClr val="10213D"/>
+                  <a:srgbClr val="0F1A2B"/>
                 </a:solidFill>
                 <a:latin typeface="Helvetica Neue"/>
                 <a:ea typeface="Helvetica Neue"/>
@@ -9008,7 +9040,7 @@
           <p:cNvPr id="20" name="">
             <a:extLst xmlns:a="http://schemas.openxmlformats.org/drawingml/2006/main">
               <a:ext uri="{FF2B5EF4-FFF2-40B4-BE49-F238E27FC236}">
-                <a16:creationId xmlns:a16="http://schemas.microsoft.com/office/drawing/2014/main" id="{7887B533-C25D-4302-9C81-B9B10F5D4E17}"/>
+                <a16:creationId xmlns:a16="http://schemas.microsoft.com/office/drawing/2014/main" id="{CAE8C5A1-45A2-458B-A61C-84F5DBC1A8CB}"/>
               </a:ext>
             </a:extLst>
           </p:cNvPr>
@@ -9026,7 +9058,7 @@
             <a:avLst/>
           </a:prstGeom>
           <a:solidFill xmlns:a="http://schemas.openxmlformats.org/drawingml/2006/main">
-            <a:srgbClr val="FF7C70"/>
+            <a:srgbClr val="52677D"/>
           </a:solidFill>
           <a:ln xmlns:a="http://schemas.openxmlformats.org/drawingml/2006/main" w="0">
             <a:noFill/>
@@ -9038,7 +9070,7 @@
           <p:cNvPr id="21" name="">
             <a:extLst xmlns:a="http://schemas.openxmlformats.org/drawingml/2006/main">
               <a:ext uri="{FF2B5EF4-FFF2-40B4-BE49-F238E27FC236}">
-                <a16:creationId xmlns:a16="http://schemas.microsoft.com/office/drawing/2014/main" id="{3E16EF21-A386-49FB-8E38-99DB18FB0EA1}"/>
+                <a16:creationId xmlns:a16="http://schemas.microsoft.com/office/drawing/2014/main" id="{D4C96769-AE1E-403F-9DD2-AFF3B1EDE21F}"/>
               </a:ext>
             </a:extLst>
           </p:cNvPr>
@@ -9069,7 +9101,7 @@
             <a:pPr algn="l">
               <a:defRPr sz="1425" b="0">
                 <a:solidFill>
-                  <a:srgbClr val="10213D"/>
+                  <a:srgbClr val="0F1A2B"/>
                 </a:solidFill>
                 <a:latin typeface="Helvetica Neue"/>
                 <a:ea typeface="Helvetica Neue"/>
@@ -9079,7 +9111,7 @@
             <a:r>
               <a:rPr sz="1425" b="0">
                 <a:solidFill>
-                  <a:srgbClr val="10213D"/>
+                  <a:srgbClr val="0F1A2B"/>
                 </a:solidFill>
                 <a:latin typeface="Helvetica Neue"/>
                 <a:ea typeface="Helvetica Neue"/>
@@ -9095,7 +9127,7 @@
           <p:cNvPr id="22" name="">
             <a:extLst xmlns:a="http://schemas.openxmlformats.org/drawingml/2006/main">
               <a:ext uri="{FF2B5EF4-FFF2-40B4-BE49-F238E27FC236}">
-                <a16:creationId xmlns:a16="http://schemas.microsoft.com/office/drawing/2014/main" id="{B0FE3B44-5A16-417A-BA7D-179055771ACB}"/>
+                <a16:creationId xmlns:a16="http://schemas.microsoft.com/office/drawing/2014/main" id="{1B629885-DE1E-4676-A4A4-C5E59E7AB6C6}"/>
               </a:ext>
             </a:extLst>
           </p:cNvPr>
@@ -9113,7 +9145,7 @@
             <a:avLst/>
           </a:prstGeom>
           <a:solidFill xmlns:a="http://schemas.openxmlformats.org/drawingml/2006/main">
-            <a:srgbClr val="FF7C70"/>
+            <a:srgbClr val="52677D"/>
           </a:solidFill>
           <a:ln xmlns:a="http://schemas.openxmlformats.org/drawingml/2006/main" w="0">
             <a:noFill/>
@@ -9125,7 +9157,7 @@
           <p:cNvPr id="23" name="">
             <a:extLst xmlns:a="http://schemas.openxmlformats.org/drawingml/2006/main">
               <a:ext uri="{FF2B5EF4-FFF2-40B4-BE49-F238E27FC236}">
-                <a16:creationId xmlns:a16="http://schemas.microsoft.com/office/drawing/2014/main" id="{935FF9E9-43A7-4D31-8472-6CE0CE62D4F7}"/>
+                <a16:creationId xmlns:a16="http://schemas.microsoft.com/office/drawing/2014/main" id="{1BF6EB91-B9AE-4928-B441-394FA6B818EF}"/>
               </a:ext>
             </a:extLst>
           </p:cNvPr>
@@ -9156,7 +9188,7 @@
             <a:pPr algn="l">
               <a:defRPr sz="1425" b="0">
                 <a:solidFill>
-                  <a:srgbClr val="10213D"/>
+                  <a:srgbClr val="0F1A2B"/>
                 </a:solidFill>
                 <a:latin typeface="Helvetica Neue"/>
                 <a:ea typeface="Helvetica Neue"/>
@@ -9166,7 +9198,7 @@
             <a:r>
               <a:rPr sz="1425" b="0">
                 <a:solidFill>
-                  <a:srgbClr val="10213D"/>
+                  <a:srgbClr val="0F1A2B"/>
                 </a:solidFill>
                 <a:latin typeface="Helvetica Neue"/>
                 <a:ea typeface="Helvetica Neue"/>
@@ -9182,7 +9214,7 @@
           <p:cNvPr id="24" name="">
             <a:extLst xmlns:a="http://schemas.openxmlformats.org/drawingml/2006/main">
               <a:ext uri="{FF2B5EF4-FFF2-40B4-BE49-F238E27FC236}">
-                <a16:creationId xmlns:a16="http://schemas.microsoft.com/office/drawing/2014/main" id="{95798B8E-AC06-4BCB-AB9A-BCB6854EC04D}"/>
+                <a16:creationId xmlns:a16="http://schemas.microsoft.com/office/drawing/2014/main" id="{6F31A8E2-FBDB-42A0-B32B-4D1C6E665FDB}"/>
               </a:ext>
             </a:extLst>
           </p:cNvPr>
@@ -9200,7 +9232,7 @@
             <a:avLst/>
           </a:prstGeom>
           <a:solidFill xmlns:a="http://schemas.openxmlformats.org/drawingml/2006/main">
-            <a:srgbClr val="FF7C70"/>
+            <a:srgbClr val="52677D"/>
           </a:solidFill>
           <a:ln xmlns:a="http://schemas.openxmlformats.org/drawingml/2006/main" w="0">
             <a:noFill/>
@@ -9212,7 +9244,7 @@
           <p:cNvPr id="25" name="">
             <a:extLst xmlns:a="http://schemas.openxmlformats.org/drawingml/2006/main">
               <a:ext uri="{FF2B5EF4-FFF2-40B4-BE49-F238E27FC236}">
-                <a16:creationId xmlns:a16="http://schemas.microsoft.com/office/drawing/2014/main" id="{96DC4D3C-A61D-47A1-8CC0-C95D87B91E47}"/>
+                <a16:creationId xmlns:a16="http://schemas.microsoft.com/office/drawing/2014/main" id="{19B52DEF-CC02-4368-B79C-63C1023AB774}"/>
               </a:ext>
             </a:extLst>
           </p:cNvPr>
@@ -9243,7 +9275,7 @@
             <a:pPr algn="l">
               <a:defRPr sz="1425" b="0">
                 <a:solidFill>
-                  <a:srgbClr val="10213D"/>
+                  <a:srgbClr val="0F1A2B"/>
                 </a:solidFill>
                 <a:latin typeface="Helvetica Neue"/>
                 <a:ea typeface="Helvetica Neue"/>
@@ -9253,7 +9285,7 @@
             <a:r>
               <a:rPr sz="1425" b="0">
                 <a:solidFill>
-                  <a:srgbClr val="10213D"/>
+                  <a:srgbClr val="0F1A2B"/>
                 </a:solidFill>
                 <a:latin typeface="Helvetica Neue"/>
                 <a:ea typeface="Helvetica Neue"/>
@@ -9269,7 +9301,7 @@
           <p:cNvPr id="26" name="">
             <a:extLst xmlns:a="http://schemas.openxmlformats.org/drawingml/2006/main">
               <a:ext uri="{FF2B5EF4-FFF2-40B4-BE49-F238E27FC236}">
-                <a16:creationId xmlns:a16="http://schemas.microsoft.com/office/drawing/2014/main" id="{81E445F2-CA82-4146-B266-9A928F2242AB}"/>
+                <a16:creationId xmlns:a16="http://schemas.microsoft.com/office/drawing/2014/main" id="{D7F60B71-FCAF-4F9D-B76C-2DBF8156969B}"/>
               </a:ext>
             </a:extLst>
           </p:cNvPr>
@@ -9287,7 +9319,7 @@
             <a:avLst/>
           </a:prstGeom>
           <a:solidFill xmlns:a="http://schemas.openxmlformats.org/drawingml/2006/main">
-            <a:srgbClr val="D8E5F2"/>
+            <a:srgbClr val="BDC4D4"/>
           </a:solidFill>
           <a:ln xmlns:a="http://schemas.openxmlformats.org/drawingml/2006/main" w="0">
             <a:noFill/>
@@ -9299,7 +9331,7 @@
           <p:cNvPr id="27" name="">
             <a:extLst xmlns:a="http://schemas.openxmlformats.org/drawingml/2006/main">
               <a:ext uri="{FF2B5EF4-FFF2-40B4-BE49-F238E27FC236}">
-                <a16:creationId xmlns:a16="http://schemas.microsoft.com/office/drawing/2014/main" id="{B0475154-9DF7-408E-AFE2-C65B7D237D6C}"/>
+                <a16:creationId xmlns:a16="http://schemas.microsoft.com/office/drawing/2014/main" id="{3CE0B119-72A3-4B2B-A084-52DB85CAFB75}"/>
               </a:ext>
             </a:extLst>
           </p:cNvPr>
@@ -9330,7 +9362,7 @@
             <a:pPr algn="l">
               <a:defRPr sz="750" b="0">
                 <a:solidFill>
-                  <a:srgbClr val="61718A"/>
+                  <a:srgbClr val="52677D"/>
                 </a:solidFill>
                 <a:latin typeface="Helvetica Neue"/>
                 <a:ea typeface="Helvetica Neue"/>
@@ -9340,7 +9372,7 @@
             <a:r>
               <a:rPr sz="750" b="0">
                 <a:solidFill>
-                  <a:srgbClr val="61718A"/>
+                  <a:srgbClr val="52677D"/>
                 </a:solidFill>
                 <a:latin typeface="Helvetica Neue"/>
                 <a:ea typeface="Helvetica Neue"/>
@@ -9356,7 +9388,7 @@
           <p:cNvPr id="28" name="">
             <a:extLst xmlns:a="http://schemas.openxmlformats.org/drawingml/2006/main">
               <a:ext uri="{FF2B5EF4-FFF2-40B4-BE49-F238E27FC236}">
-                <a16:creationId xmlns:a16="http://schemas.microsoft.com/office/drawing/2014/main" id="{D9323322-B5B6-4964-8D3B-EAE4EC983093}"/>
+                <a16:creationId xmlns:a16="http://schemas.microsoft.com/office/drawing/2014/main" id="{3D5B8F49-828B-4DF4-BD84-77C8BD9B25B2}"/>
               </a:ext>
             </a:extLst>
           </p:cNvPr>
@@ -9387,7 +9419,7 @@
             <a:pPr algn="r">
               <a:defRPr sz="825" b="1">
                 <a:solidFill>
-                  <a:srgbClr val="2563EB"/>
+                  <a:srgbClr val="52677D"/>
                 </a:solidFill>
                 <a:latin typeface="Helvetica Neue"/>
                 <a:ea typeface="Helvetica Neue"/>
@@ -9397,7 +9429,7 @@
             <a:r>
               <a:rPr sz="825" b="1">
                 <a:solidFill>
-                  <a:srgbClr val="2563EB"/>
+                  <a:srgbClr val="52677D"/>
                 </a:solidFill>
                 <a:latin typeface="Helvetica Neue"/>
                 <a:ea typeface="Helvetica Neue"/>
@@ -9411,7 +9443,7 @@
     </p:spTree>
     <p:extLst>
       <p:ext uri="{BB962C8B-B14F-4D97-AF65-F5344CB8AC3E}">
-        <p14:creationId xmlns:p14="http://schemas.microsoft.com/office/powerpoint/2010/main" val="1033218002"/>
+        <p14:creationId xmlns:p14="http://schemas.microsoft.com/office/powerpoint/2010/main" val="1283053780"/>
       </p:ext>
     </p:extLst>
   </p:cSld>
@@ -9442,7 +9474,7 @@
           <p:cNvPr id="24" name="">
             <a:extLst xmlns:a="http://schemas.openxmlformats.org/drawingml/2006/main">
               <a:ext uri="{FF2B5EF4-FFF2-40B4-BE49-F238E27FC236}">
-                <a16:creationId xmlns:a16="http://schemas.microsoft.com/office/drawing/2014/main" id="{E6869A85-BDAF-4E28-A63D-BE10E5E7CDBC}"/>
+                <a16:creationId xmlns:a16="http://schemas.microsoft.com/office/drawing/2014/main" id="{2AC83C71-C8E0-43FA-9363-93E730F66E18}"/>
               </a:ext>
             </a:extLst>
           </p:cNvPr>
@@ -9460,7 +9492,7 @@
             <a:avLst/>
           </a:prstGeom>
           <a:solidFill xmlns:a="http://schemas.openxmlformats.org/drawingml/2006/main">
-            <a:srgbClr val="6C5CE7"/>
+            <a:srgbClr val="1C2E4A"/>
           </a:solidFill>
           <a:ln xmlns:a="http://schemas.openxmlformats.org/drawingml/2006/main" w="0">
             <a:noFill/>
@@ -9472,7 +9504,7 @@
           <p:cNvPr id="2" name="">
             <a:extLst xmlns:a="http://schemas.openxmlformats.org/drawingml/2006/main">
               <a:ext uri="{FF2B5EF4-FFF2-40B4-BE49-F238E27FC236}">
-                <a16:creationId xmlns:a16="http://schemas.microsoft.com/office/drawing/2014/main" id="{F48DB737-81BE-4C59-9263-E6D0FDB98F8C}"/>
+                <a16:creationId xmlns:a16="http://schemas.microsoft.com/office/drawing/2014/main" id="{480BC4E8-DDB0-4BA0-AB8B-278BA202C9E4}"/>
               </a:ext>
             </a:extLst>
           </p:cNvPr>
@@ -9503,7 +9535,7 @@
             <a:pPr algn="l">
               <a:defRPr sz="1125" b="1">
                 <a:solidFill>
-                  <a:srgbClr val="2563EB"/>
+                  <a:srgbClr val="52677D"/>
                 </a:solidFill>
                 <a:latin typeface="Helvetica Neue"/>
                 <a:ea typeface="Helvetica Neue"/>
@@ -9513,7 +9545,7 @@
             <a:r>
               <a:rPr sz="1125" b="1">
                 <a:solidFill>
-                  <a:srgbClr val="2563EB"/>
+                  <a:srgbClr val="52677D"/>
                 </a:solidFill>
                 <a:latin typeface="Helvetica Neue"/>
                 <a:ea typeface="Helvetica Neue"/>
@@ -9529,7 +9561,7 @@
           <p:cNvPr id="3" name="">
             <a:extLst xmlns:a="http://schemas.openxmlformats.org/drawingml/2006/main">
               <a:ext uri="{FF2B5EF4-FFF2-40B4-BE49-F238E27FC236}">
-                <a16:creationId xmlns:a16="http://schemas.microsoft.com/office/drawing/2014/main" id="{B2753804-E4AA-48D7-869D-F08462FC3E2E}"/>
+                <a16:creationId xmlns:a16="http://schemas.microsoft.com/office/drawing/2014/main" id="{27279794-0934-4555-B703-948270393D26}"/>
               </a:ext>
             </a:extLst>
           </p:cNvPr>
@@ -9549,7 +9581,7 @@
             </a:avLst>
           </a:prstGeom>
           <a:solidFill xmlns:a="http://schemas.openxmlformats.org/drawingml/2006/main">
-            <a:srgbClr val="FFD43B"/>
+            <a:srgbClr val="D1CFC9"/>
           </a:solidFill>
           <a:ln xmlns:a="http://schemas.openxmlformats.org/drawingml/2006/main" w="0">
             <a:noFill/>
@@ -9561,7 +9593,7 @@
           <p:cNvPr id="4" name="">
             <a:extLst xmlns:a="http://schemas.openxmlformats.org/drawingml/2006/main">
               <a:ext uri="{FF2B5EF4-FFF2-40B4-BE49-F238E27FC236}">
-                <a16:creationId xmlns:a16="http://schemas.microsoft.com/office/drawing/2014/main" id="{D4CD9E3A-714F-4783-9EB4-DD178E06A121}"/>
+                <a16:creationId xmlns:a16="http://schemas.microsoft.com/office/drawing/2014/main" id="{1228E26F-A098-4A20-BDAB-3E6137B3FD8A}"/>
               </a:ext>
             </a:extLst>
           </p:cNvPr>
@@ -9592,7 +9624,7 @@
             <a:pPr algn="ctr">
               <a:defRPr sz="1275" b="1">
                 <a:solidFill>
-                  <a:srgbClr val="092454"/>
+                  <a:srgbClr val="1C2E4A"/>
                 </a:solidFill>
                 <a:latin typeface="Helvetica Neue"/>
                 <a:ea typeface="Helvetica Neue"/>
@@ -9602,7 +9634,7 @@
             <a:r>
               <a:rPr sz="1275" b="1">
                 <a:solidFill>
-                  <a:srgbClr val="092454"/>
+                  <a:srgbClr val="1C2E4A"/>
                 </a:solidFill>
                 <a:latin typeface="Helvetica Neue"/>
                 <a:ea typeface="Helvetica Neue"/>
@@ -9618,7 +9650,7 @@
           <p:cNvPr id="5" name="">
             <a:extLst xmlns:a="http://schemas.openxmlformats.org/drawingml/2006/main">
               <a:ext uri="{FF2B5EF4-FFF2-40B4-BE49-F238E27FC236}">
-                <a16:creationId xmlns:a16="http://schemas.microsoft.com/office/drawing/2014/main" id="{72B67522-F3B0-467A-A66F-9F701DB50444}"/>
+                <a16:creationId xmlns:a16="http://schemas.microsoft.com/office/drawing/2014/main" id="{F7D0D41C-92AA-49E3-9AE0-BDA0455394FD}"/>
               </a:ext>
             </a:extLst>
           </p:cNvPr>
@@ -9649,7 +9681,7 @@
             <a:pPr algn="l">
               <a:defRPr sz="2850" b="1">
                 <a:solidFill>
-                  <a:srgbClr val="092454"/>
+                  <a:srgbClr val="1C2E4A"/>
                 </a:solidFill>
                 <a:latin typeface="Helvetica Neue"/>
                 <a:ea typeface="Helvetica Neue"/>
@@ -9659,7 +9691,7 @@
             <a:r>
               <a:rPr sz="2850" b="1">
                 <a:solidFill>
-                  <a:srgbClr val="092454"/>
+                  <a:srgbClr val="1C2E4A"/>
                 </a:solidFill>
                 <a:latin typeface="Helvetica Neue"/>
                 <a:ea typeface="Helvetica Neue"/>
@@ -9675,7 +9707,7 @@
           <p:cNvPr id="6" name="">
             <a:extLst xmlns:a="http://schemas.openxmlformats.org/drawingml/2006/main">
               <a:ext uri="{FF2B5EF4-FFF2-40B4-BE49-F238E27FC236}">
-                <a16:creationId xmlns:a16="http://schemas.microsoft.com/office/drawing/2014/main" id="{DEA84118-4974-4CC7-A147-320B7148C187}"/>
+                <a16:creationId xmlns:a16="http://schemas.microsoft.com/office/drawing/2014/main" id="{1BC28620-9B4D-49B0-A1F3-BE4A03A156EC}"/>
               </a:ext>
             </a:extLst>
           </p:cNvPr>
@@ -9695,7 +9727,7 @@
             </a:avLst>
           </a:prstGeom>
           <a:solidFill xmlns:a="http://schemas.openxmlformats.org/drawingml/2006/main">
-            <a:srgbClr val="EEF7FF"/>
+            <a:srgbClr val="D1CFC9"/>
           </a:solidFill>
           <a:ln xmlns:a="http://schemas.openxmlformats.org/drawingml/2006/main" w="0">
             <a:noFill/>
@@ -9707,7 +9739,7 @@
           <p:cNvPr id="7" name="">
             <a:extLst xmlns:a="http://schemas.openxmlformats.org/drawingml/2006/main">
               <a:ext uri="{FF2B5EF4-FFF2-40B4-BE49-F238E27FC236}">
-                <a16:creationId xmlns:a16="http://schemas.microsoft.com/office/drawing/2014/main" id="{0A4315AC-7AF4-42E4-98B6-1F7FDF31CA14}"/>
+                <a16:creationId xmlns:a16="http://schemas.microsoft.com/office/drawing/2014/main" id="{4B8D5FC4-45F9-4A1E-92CD-C93159A45509}"/>
               </a:ext>
             </a:extLst>
           </p:cNvPr>
@@ -9738,7 +9770,7 @@
             <a:pPr algn="ctr">
               <a:defRPr sz="1350" b="1">
                 <a:solidFill>
-                  <a:srgbClr val="2563EB"/>
+                  <a:srgbClr val="52677D"/>
                 </a:solidFill>
                 <a:latin typeface="Helvetica Neue"/>
                 <a:ea typeface="Helvetica Neue"/>
@@ -9748,7 +9780,7 @@
             <a:r>
               <a:rPr sz="1350" b="1">
                 <a:solidFill>
-                  <a:srgbClr val="2563EB"/>
+                  <a:srgbClr val="52677D"/>
                 </a:solidFill>
                 <a:latin typeface="Helvetica Neue"/>
                 <a:ea typeface="Helvetica Neue"/>
@@ -9764,7 +9796,7 @@
           <p:cNvPr id="8" name="">
             <a:extLst xmlns:a="http://schemas.openxmlformats.org/drawingml/2006/main">
               <a:ext uri="{FF2B5EF4-FFF2-40B4-BE49-F238E27FC236}">
-                <a16:creationId xmlns:a16="http://schemas.microsoft.com/office/drawing/2014/main" id="{AE5D8E32-9E36-47E6-AFC4-1C6989CC9A7C}"/>
+                <a16:creationId xmlns:a16="http://schemas.microsoft.com/office/drawing/2014/main" id="{D4E6850F-5CA4-4836-8F0F-B36CE5600298}"/>
               </a:ext>
             </a:extLst>
           </p:cNvPr>
@@ -9795,7 +9827,7 @@
             <a:pPr algn="l">
               <a:defRPr sz="1575" b="0">
                 <a:solidFill>
-                  <a:srgbClr val="10213D"/>
+                  <a:srgbClr val="0F1A2B"/>
                 </a:solidFill>
                 <a:latin typeface="Helvetica Neue"/>
                 <a:ea typeface="Helvetica Neue"/>
@@ -9805,7 +9837,7 @@
             <a:r>
               <a:rPr sz="1575" b="0">
                 <a:solidFill>
-                  <a:srgbClr val="10213D"/>
+                  <a:srgbClr val="0F1A2B"/>
                 </a:solidFill>
                 <a:latin typeface="Helvetica Neue"/>
                 <a:ea typeface="Helvetica Neue"/>
@@ -9821,7 +9853,7 @@
           <p:cNvPr id="9" name="">
             <a:extLst xmlns:a="http://schemas.openxmlformats.org/drawingml/2006/main">
               <a:ext uri="{FF2B5EF4-FFF2-40B4-BE49-F238E27FC236}">
-                <a16:creationId xmlns:a16="http://schemas.microsoft.com/office/drawing/2014/main" id="{B7ED896D-D27B-47DC-B90C-E06FD65E5B2F}"/>
+                <a16:creationId xmlns:a16="http://schemas.microsoft.com/office/drawing/2014/main" id="{061CF5F6-C85F-40C4-9AE2-78546E5ABA5A}"/>
               </a:ext>
             </a:extLst>
           </p:cNvPr>
@@ -9841,7 +9873,7 @@
             </a:avLst>
           </a:prstGeom>
           <a:solidFill xmlns:a="http://schemas.openxmlformats.org/drawingml/2006/main">
-            <a:srgbClr val="EEF7FF"/>
+            <a:srgbClr val="D1CFC9"/>
           </a:solidFill>
           <a:ln xmlns:a="http://schemas.openxmlformats.org/drawingml/2006/main" w="0">
             <a:noFill/>
@@ -9853,7 +9885,7 @@
           <p:cNvPr id="10" name="">
             <a:extLst xmlns:a="http://schemas.openxmlformats.org/drawingml/2006/main">
               <a:ext uri="{FF2B5EF4-FFF2-40B4-BE49-F238E27FC236}">
-                <a16:creationId xmlns:a16="http://schemas.microsoft.com/office/drawing/2014/main" id="{21BE48D1-2003-447B-83A8-E8D6EC254F98}"/>
+                <a16:creationId xmlns:a16="http://schemas.microsoft.com/office/drawing/2014/main" id="{47D5FFE3-4284-4E24-86F7-7FC69A613D78}"/>
               </a:ext>
             </a:extLst>
           </p:cNvPr>
@@ -9884,7 +9916,7 @@
             <a:pPr algn="ctr">
               <a:defRPr sz="1350" b="1">
                 <a:solidFill>
-                  <a:srgbClr val="2563EB"/>
+                  <a:srgbClr val="52677D"/>
                 </a:solidFill>
                 <a:latin typeface="Helvetica Neue"/>
                 <a:ea typeface="Helvetica Neue"/>
@@ -9894,7 +9926,7 @@
             <a:r>
               <a:rPr sz="1350" b="1">
                 <a:solidFill>
-                  <a:srgbClr val="2563EB"/>
+                  <a:srgbClr val="52677D"/>
                 </a:solidFill>
                 <a:latin typeface="Helvetica Neue"/>
                 <a:ea typeface="Helvetica Neue"/>
@@ -9910,7 +9942,7 @@
           <p:cNvPr id="11" name="">
             <a:extLst xmlns:a="http://schemas.openxmlformats.org/drawingml/2006/main">
               <a:ext uri="{FF2B5EF4-FFF2-40B4-BE49-F238E27FC236}">
-                <a16:creationId xmlns:a16="http://schemas.microsoft.com/office/drawing/2014/main" id="{9C00D658-192D-4003-A58B-EC5C8DB856D7}"/>
+                <a16:creationId xmlns:a16="http://schemas.microsoft.com/office/drawing/2014/main" id="{A7A1E95C-0C99-4E82-ABB5-22F9B5ADE8A3}"/>
               </a:ext>
             </a:extLst>
           </p:cNvPr>
@@ -9941,7 +9973,7 @@
             <a:pPr algn="l">
               <a:defRPr sz="1575" b="0">
                 <a:solidFill>
-                  <a:srgbClr val="10213D"/>
+                  <a:srgbClr val="0F1A2B"/>
                 </a:solidFill>
                 <a:latin typeface="Helvetica Neue"/>
                 <a:ea typeface="Helvetica Neue"/>
@@ -9951,7 +9983,7 @@
             <a:r>
               <a:rPr sz="1575" b="0">
                 <a:solidFill>
-                  <a:srgbClr val="10213D"/>
+                  <a:srgbClr val="0F1A2B"/>
                 </a:solidFill>
                 <a:latin typeface="Helvetica Neue"/>
                 <a:ea typeface="Helvetica Neue"/>
@@ -9967,7 +9999,7 @@
           <p:cNvPr id="12" name="">
             <a:extLst xmlns:a="http://schemas.openxmlformats.org/drawingml/2006/main">
               <a:ext uri="{FF2B5EF4-FFF2-40B4-BE49-F238E27FC236}">
-                <a16:creationId xmlns:a16="http://schemas.microsoft.com/office/drawing/2014/main" id="{5DF545ED-C49F-4A93-A7E4-DE915DC39F6C}"/>
+                <a16:creationId xmlns:a16="http://schemas.microsoft.com/office/drawing/2014/main" id="{E823AC24-DB28-4A6C-9EF1-D4D37A83F38B}"/>
               </a:ext>
             </a:extLst>
           </p:cNvPr>
@@ -9987,7 +10019,7 @@
             </a:avLst>
           </a:prstGeom>
           <a:solidFill xmlns:a="http://schemas.openxmlformats.org/drawingml/2006/main">
-            <a:srgbClr val="EEF7FF"/>
+            <a:srgbClr val="D1CFC9"/>
           </a:solidFill>
           <a:ln xmlns:a="http://schemas.openxmlformats.org/drawingml/2006/main" w="0">
             <a:noFill/>
@@ -9999,7 +10031,7 @@
           <p:cNvPr id="13" name="">
             <a:extLst xmlns:a="http://schemas.openxmlformats.org/drawingml/2006/main">
               <a:ext uri="{FF2B5EF4-FFF2-40B4-BE49-F238E27FC236}">
-                <a16:creationId xmlns:a16="http://schemas.microsoft.com/office/drawing/2014/main" id="{25861739-2D0B-47D8-A6DA-2944ED66FA56}"/>
+                <a16:creationId xmlns:a16="http://schemas.microsoft.com/office/drawing/2014/main" id="{93783C0F-0E9C-425D-8C6E-B7B527A9361B}"/>
               </a:ext>
             </a:extLst>
           </p:cNvPr>
@@ -10030,7 +10062,7 @@
             <a:pPr algn="ctr">
               <a:defRPr sz="1350" b="1">
                 <a:solidFill>
-                  <a:srgbClr val="2563EB"/>
+                  <a:srgbClr val="52677D"/>
                 </a:solidFill>
                 <a:latin typeface="Helvetica Neue"/>
                 <a:ea typeface="Helvetica Neue"/>
@@ -10040,7 +10072,7 @@
             <a:r>
               <a:rPr sz="1350" b="1">
                 <a:solidFill>
-                  <a:srgbClr val="2563EB"/>
+                  <a:srgbClr val="52677D"/>
                 </a:solidFill>
                 <a:latin typeface="Helvetica Neue"/>
                 <a:ea typeface="Helvetica Neue"/>
@@ -10056,7 +10088,7 @@
           <p:cNvPr id="14" name="">
             <a:extLst xmlns:a="http://schemas.openxmlformats.org/drawingml/2006/main">
               <a:ext uri="{FF2B5EF4-FFF2-40B4-BE49-F238E27FC236}">
-                <a16:creationId xmlns:a16="http://schemas.microsoft.com/office/drawing/2014/main" id="{FA17E08A-47E2-49E2-8885-90C2201A5A7A}"/>
+                <a16:creationId xmlns:a16="http://schemas.microsoft.com/office/drawing/2014/main" id="{C4E7D6C8-751D-4CF4-9086-F7A914CDA721}"/>
               </a:ext>
             </a:extLst>
           </p:cNvPr>
@@ -10087,7 +10119,7 @@
             <a:pPr algn="l">
               <a:defRPr sz="1575" b="0">
                 <a:solidFill>
-                  <a:srgbClr val="10213D"/>
+                  <a:srgbClr val="0F1A2B"/>
                 </a:solidFill>
                 <a:latin typeface="Helvetica Neue"/>
                 <a:ea typeface="Helvetica Neue"/>
@@ -10097,7 +10129,7 @@
             <a:r>
               <a:rPr sz="1575" b="0">
                 <a:solidFill>
-                  <a:srgbClr val="10213D"/>
+                  <a:srgbClr val="0F1A2B"/>
                 </a:solidFill>
                 <a:latin typeface="Helvetica Neue"/>
                 <a:ea typeface="Helvetica Neue"/>
@@ -10113,7 +10145,7 @@
           <p:cNvPr id="15" name="">
             <a:extLst xmlns:a="http://schemas.openxmlformats.org/drawingml/2006/main">
               <a:ext uri="{FF2B5EF4-FFF2-40B4-BE49-F238E27FC236}">
-                <a16:creationId xmlns:a16="http://schemas.microsoft.com/office/drawing/2014/main" id="{0B182FA4-62D5-46A3-B814-022CE5EDCEC2}"/>
+                <a16:creationId xmlns:a16="http://schemas.microsoft.com/office/drawing/2014/main" id="{7A00A5B2-024E-4D24-B996-8E2FDCDD2E7B}"/>
               </a:ext>
             </a:extLst>
           </p:cNvPr>
@@ -10133,7 +10165,7 @@
             </a:avLst>
           </a:prstGeom>
           <a:solidFill xmlns:a="http://schemas.openxmlformats.org/drawingml/2006/main">
-            <a:srgbClr val="EEF7FF"/>
+            <a:srgbClr val="D1CFC9"/>
           </a:solidFill>
           <a:ln xmlns:a="http://schemas.openxmlformats.org/drawingml/2006/main" w="0">
             <a:noFill/>
@@ -10145,7 +10177,7 @@
           <p:cNvPr id="16" name="">
             <a:extLst xmlns:a="http://schemas.openxmlformats.org/drawingml/2006/main">
               <a:ext uri="{FF2B5EF4-FFF2-40B4-BE49-F238E27FC236}">
-                <a16:creationId xmlns:a16="http://schemas.microsoft.com/office/drawing/2014/main" id="{D2DD299C-C572-4FE3-A662-C8954D788319}"/>
+                <a16:creationId xmlns:a16="http://schemas.microsoft.com/office/drawing/2014/main" id="{996B6DB3-EA40-405B-8EC0-5AD7591D135D}"/>
               </a:ext>
             </a:extLst>
           </p:cNvPr>
@@ -10176,7 +10208,7 @@
             <a:pPr algn="l">
               <a:defRPr sz="1125" b="0">
                 <a:solidFill>
-                  <a:srgbClr val="092454"/>
+                  <a:srgbClr val="1C2E4A"/>
                 </a:solidFill>
                 <a:latin typeface="Helvetica Neue"/>
                 <a:ea typeface="Helvetica Neue"/>
@@ -10186,7 +10218,7 @@
             <a:r>
               <a:rPr sz="1125" b="0">
                 <a:solidFill>
-                  <a:srgbClr val="092454"/>
+                  <a:srgbClr val="1C2E4A"/>
                 </a:solidFill>
                 <a:latin typeface="Helvetica Neue"/>
                 <a:ea typeface="Helvetica Neue"/>
@@ -10202,7 +10234,7 @@
           <p:cNvPr id="17" name="">
             <a:extLst xmlns:a="http://schemas.openxmlformats.org/drawingml/2006/main">
               <a:ext uri="{FF2B5EF4-FFF2-40B4-BE49-F238E27FC236}">
-                <a16:creationId xmlns:a16="http://schemas.microsoft.com/office/drawing/2014/main" id="{CB2B9F86-8C1E-4B88-826D-935CF1A9D7AA}"/>
+                <a16:creationId xmlns:a16="http://schemas.microsoft.com/office/drawing/2014/main" id="{7356519A-D64B-43C6-8893-D163096A3ACF}"/>
               </a:ext>
             </a:extLst>
           </p:cNvPr>
@@ -10222,7 +10254,7 @@
             </a:avLst>
           </a:prstGeom>
           <a:solidFill xmlns:a="http://schemas.openxmlformats.org/drawingml/2006/main">
-            <a:srgbClr val="092454"/>
+            <a:srgbClr val="1C2E4A"/>
           </a:solidFill>
           <a:ln xmlns:a="http://schemas.openxmlformats.org/drawingml/2006/main" w="0">
             <a:noFill/>
@@ -10234,7 +10266,7 @@
           <p:cNvPr id="18" name="">
             <a:extLst xmlns:a="http://schemas.openxmlformats.org/drawingml/2006/main">
               <a:ext uri="{FF2B5EF4-FFF2-40B4-BE49-F238E27FC236}">
-                <a16:creationId xmlns:a16="http://schemas.microsoft.com/office/drawing/2014/main" id="{66151ACF-3A47-4226-B1DD-1EFAF864DF82}"/>
+                <a16:creationId xmlns:a16="http://schemas.microsoft.com/office/drawing/2014/main" id="{3E7AF67E-5D71-4584-8BA5-266763FD82CA}"/>
               </a:ext>
             </a:extLst>
           </p:cNvPr>
@@ -10265,7 +10297,7 @@
             <a:pPr algn="l">
               <a:defRPr sz="1050" b="1">
                 <a:solidFill>
-                  <a:srgbClr val="FFD43B"/>
+                  <a:srgbClr val="D1CFC9"/>
                 </a:solidFill>
                 <a:latin typeface="Helvetica Neue"/>
                 <a:ea typeface="Helvetica Neue"/>
@@ -10275,7 +10307,7 @@
             <a:r>
               <a:rPr sz="1050" b="1">
                 <a:solidFill>
-                  <a:srgbClr val="FFD43B"/>
+                  <a:srgbClr val="D1CFC9"/>
                 </a:solidFill>
                 <a:latin typeface="Helvetica Neue"/>
                 <a:ea typeface="Helvetica Neue"/>
@@ -10291,7 +10323,7 @@
           <p:cNvPr id="19" name="">
             <a:extLst xmlns:a="http://schemas.openxmlformats.org/drawingml/2006/main">
               <a:ext uri="{FF2B5EF4-FFF2-40B4-BE49-F238E27FC236}">
-                <a16:creationId xmlns:a16="http://schemas.microsoft.com/office/drawing/2014/main" id="{227AAAB1-EEBE-4091-9114-A21FEFA660D4}"/>
+                <a16:creationId xmlns:a16="http://schemas.microsoft.com/office/drawing/2014/main" id="{D54765DF-CB5B-43CE-BC97-78890464F50B}"/>
               </a:ext>
             </a:extLst>
           </p:cNvPr>
@@ -10348,7 +10380,7 @@
           <p:cNvPr id="20" name="">
             <a:extLst xmlns:a="http://schemas.openxmlformats.org/drawingml/2006/main">
               <a:ext uri="{FF2B5EF4-FFF2-40B4-BE49-F238E27FC236}">
-                <a16:creationId xmlns:a16="http://schemas.microsoft.com/office/drawing/2014/main" id="{22D6DBD0-E2F0-4816-920B-E38D1D9DC27A}"/>
+                <a16:creationId xmlns:a16="http://schemas.microsoft.com/office/drawing/2014/main" id="{D8C2D579-FAB7-4258-8EF0-74E788BDEC49}"/>
               </a:ext>
             </a:extLst>
           </p:cNvPr>
@@ -10379,7 +10411,7 @@
             <a:pPr algn="l">
               <a:defRPr sz="1125" b="0">
                 <a:solidFill>
-                  <a:srgbClr val="BFE6FF"/>
+                  <a:srgbClr val="BDC4D4"/>
                 </a:solidFill>
                 <a:latin typeface="Helvetica Neue"/>
                 <a:ea typeface="Helvetica Neue"/>
@@ -10389,7 +10421,7 @@
             <a:r>
               <a:rPr sz="1125" b="0">
                 <a:solidFill>
-                  <a:srgbClr val="BFE6FF"/>
+                  <a:srgbClr val="BDC4D4"/>
                 </a:solidFill>
                 <a:latin typeface="Helvetica Neue"/>
                 <a:ea typeface="Helvetica Neue"/>
@@ -10405,7 +10437,7 @@
           <p:cNvPr id="21" name="">
             <a:extLst xmlns:a="http://schemas.openxmlformats.org/drawingml/2006/main">
               <a:ext uri="{FF2B5EF4-FFF2-40B4-BE49-F238E27FC236}">
-                <a16:creationId xmlns:a16="http://schemas.microsoft.com/office/drawing/2014/main" id="{C0DF3351-017E-4F0F-B244-DE9AAF94FDD5}"/>
+                <a16:creationId xmlns:a16="http://schemas.microsoft.com/office/drawing/2014/main" id="{2B17B837-954F-4AB1-BC23-DC2DACD97044}"/>
               </a:ext>
             </a:extLst>
           </p:cNvPr>
@@ -10423,7 +10455,7 @@
             <a:avLst/>
           </a:prstGeom>
           <a:solidFill xmlns:a="http://schemas.openxmlformats.org/drawingml/2006/main">
-            <a:srgbClr val="D8E5F2"/>
+            <a:srgbClr val="BDC4D4"/>
           </a:solidFill>
           <a:ln xmlns:a="http://schemas.openxmlformats.org/drawingml/2006/main" w="0">
             <a:noFill/>
@@ -10435,7 +10467,7 @@
           <p:cNvPr id="22" name="">
             <a:extLst xmlns:a="http://schemas.openxmlformats.org/drawingml/2006/main">
               <a:ext uri="{FF2B5EF4-FFF2-40B4-BE49-F238E27FC236}">
-                <a16:creationId xmlns:a16="http://schemas.microsoft.com/office/drawing/2014/main" id="{8A35E15A-30C1-4CBA-9DB9-B863FEE4EE6B}"/>
+                <a16:creationId xmlns:a16="http://schemas.microsoft.com/office/drawing/2014/main" id="{E29DD822-99D3-4A7F-861E-2B3397D73372}"/>
               </a:ext>
             </a:extLst>
           </p:cNvPr>
@@ -10466,7 +10498,7 @@
             <a:pPr algn="l">
               <a:defRPr sz="750" b="0">
                 <a:solidFill>
-                  <a:srgbClr val="61718A"/>
+                  <a:srgbClr val="52677D"/>
                 </a:solidFill>
                 <a:latin typeface="Helvetica Neue"/>
                 <a:ea typeface="Helvetica Neue"/>
@@ -10476,7 +10508,7 @@
             <a:r>
               <a:rPr sz="750" b="0">
                 <a:solidFill>
-                  <a:srgbClr val="61718A"/>
+                  <a:srgbClr val="52677D"/>
                 </a:solidFill>
                 <a:latin typeface="Helvetica Neue"/>
                 <a:ea typeface="Helvetica Neue"/>
@@ -10492,7 +10524,7 @@
           <p:cNvPr id="23" name="">
             <a:extLst xmlns:a="http://schemas.openxmlformats.org/drawingml/2006/main">
               <a:ext uri="{FF2B5EF4-FFF2-40B4-BE49-F238E27FC236}">
-                <a16:creationId xmlns:a16="http://schemas.microsoft.com/office/drawing/2014/main" id="{9E7621F2-1FA5-41D0-A204-7A76D563E4A1}"/>
+                <a16:creationId xmlns:a16="http://schemas.microsoft.com/office/drawing/2014/main" id="{933B95E1-7B4F-4AC0-B7FB-BAA0FA6637AA}"/>
               </a:ext>
             </a:extLst>
           </p:cNvPr>
@@ -10523,7 +10555,7 @@
             <a:pPr algn="r">
               <a:defRPr sz="825" b="1">
                 <a:solidFill>
-                  <a:srgbClr val="2563EB"/>
+                  <a:srgbClr val="52677D"/>
                 </a:solidFill>
                 <a:latin typeface="Helvetica Neue"/>
                 <a:ea typeface="Helvetica Neue"/>
@@ -10533,7 +10565,7 @@
             <a:r>
               <a:rPr sz="825" b="1">
                 <a:solidFill>
-                  <a:srgbClr val="2563EB"/>
+                  <a:srgbClr val="52677D"/>
                 </a:solidFill>
                 <a:latin typeface="Helvetica Neue"/>
                 <a:ea typeface="Helvetica Neue"/>
@@ -10547,7 +10579,7 @@
     </p:spTree>
     <p:extLst>
       <p:ext uri="{BB962C8B-B14F-4D97-AF65-F5344CB8AC3E}">
-        <p14:creationId xmlns:p14="http://schemas.microsoft.com/office/powerpoint/2010/main" val="1646117298"/>
+        <p14:creationId xmlns:p14="http://schemas.microsoft.com/office/powerpoint/2010/main" val="360927818"/>
       </p:ext>
     </p:extLst>
   </p:cSld>
@@ -10578,7 +10610,7 @@
           <p:cNvPr id="24" name="">
             <a:extLst xmlns:a="http://schemas.openxmlformats.org/drawingml/2006/main">
               <a:ext uri="{FF2B5EF4-FFF2-40B4-BE49-F238E27FC236}">
-                <a16:creationId xmlns:a16="http://schemas.microsoft.com/office/drawing/2014/main" id="{73911167-F065-4F2A-BA6B-EEBD685278FF}"/>
+                <a16:creationId xmlns:a16="http://schemas.microsoft.com/office/drawing/2014/main" id="{198C25C9-B1E7-433B-B4BD-016B1B322E49}"/>
               </a:ext>
             </a:extLst>
           </p:cNvPr>
@@ -10596,7 +10628,7 @@
             <a:avLst/>
           </a:prstGeom>
           <a:solidFill xmlns:a="http://schemas.openxmlformats.org/drawingml/2006/main">
-            <a:srgbClr val="092454"/>
+            <a:srgbClr val="1C2E4A"/>
           </a:solidFill>
           <a:ln xmlns:a="http://schemas.openxmlformats.org/drawingml/2006/main" w="0">
             <a:noFill/>
@@ -10608,7 +10640,7 @@
           <p:cNvPr id="2" name="">
             <a:extLst xmlns:a="http://schemas.openxmlformats.org/drawingml/2006/main">
               <a:ext uri="{FF2B5EF4-FFF2-40B4-BE49-F238E27FC236}">
-                <a16:creationId xmlns:a16="http://schemas.microsoft.com/office/drawing/2014/main" id="{BC8607E9-7127-4B1D-80FC-A996DF43DD68}"/>
+                <a16:creationId xmlns:a16="http://schemas.microsoft.com/office/drawing/2014/main" id="{E76CF2EF-30C6-475C-B64E-CAAE4129814F}"/>
               </a:ext>
             </a:extLst>
           </p:cNvPr>
@@ -10639,7 +10671,7 @@
             <a:pPr algn="l">
               <a:defRPr sz="1125" b="1">
                 <a:solidFill>
-                  <a:srgbClr val="2563EB"/>
+                  <a:srgbClr val="52677D"/>
                 </a:solidFill>
                 <a:latin typeface="Helvetica Neue"/>
                 <a:ea typeface="Helvetica Neue"/>
@@ -10649,7 +10681,7 @@
             <a:r>
               <a:rPr sz="1125" b="1">
                 <a:solidFill>
-                  <a:srgbClr val="2563EB"/>
+                  <a:srgbClr val="52677D"/>
                 </a:solidFill>
                 <a:latin typeface="Helvetica Neue"/>
                 <a:ea typeface="Helvetica Neue"/>
@@ -10665,7 +10697,7 @@
           <p:cNvPr id="3" name="">
             <a:extLst xmlns:a="http://schemas.openxmlformats.org/drawingml/2006/main">
               <a:ext uri="{FF2B5EF4-FFF2-40B4-BE49-F238E27FC236}">
-                <a16:creationId xmlns:a16="http://schemas.microsoft.com/office/drawing/2014/main" id="{2CDEC887-1225-4F85-919F-4DAF4B98735D}"/>
+                <a16:creationId xmlns:a16="http://schemas.microsoft.com/office/drawing/2014/main" id="{F48F3F0B-DEDE-4679-ABF9-FA85352BD354}"/>
               </a:ext>
             </a:extLst>
           </p:cNvPr>
@@ -10685,7 +10717,7 @@
             </a:avLst>
           </a:prstGeom>
           <a:solidFill xmlns:a="http://schemas.openxmlformats.org/drawingml/2006/main">
-            <a:srgbClr val="FFD43B"/>
+            <a:srgbClr val="D1CFC9"/>
           </a:solidFill>
           <a:ln xmlns:a="http://schemas.openxmlformats.org/drawingml/2006/main" w="0">
             <a:noFill/>
@@ -10697,7 +10729,7 @@
           <p:cNvPr id="4" name="">
             <a:extLst xmlns:a="http://schemas.openxmlformats.org/drawingml/2006/main">
               <a:ext uri="{FF2B5EF4-FFF2-40B4-BE49-F238E27FC236}">
-                <a16:creationId xmlns:a16="http://schemas.microsoft.com/office/drawing/2014/main" id="{D83189F8-63A3-4631-855D-22E89ECD873E}"/>
+                <a16:creationId xmlns:a16="http://schemas.microsoft.com/office/drawing/2014/main" id="{5D80194A-E07D-452C-B1A2-88D6C45C57C0}"/>
               </a:ext>
             </a:extLst>
           </p:cNvPr>
@@ -10728,7 +10760,7 @@
             <a:pPr algn="ctr">
               <a:defRPr sz="1275" b="1">
                 <a:solidFill>
-                  <a:srgbClr val="092454"/>
+                  <a:srgbClr val="1C2E4A"/>
                 </a:solidFill>
                 <a:latin typeface="Helvetica Neue"/>
                 <a:ea typeface="Helvetica Neue"/>
@@ -10738,7 +10770,7 @@
             <a:r>
               <a:rPr sz="1275" b="1">
                 <a:solidFill>
-                  <a:srgbClr val="092454"/>
+                  <a:srgbClr val="1C2E4A"/>
                 </a:solidFill>
                 <a:latin typeface="Helvetica Neue"/>
                 <a:ea typeface="Helvetica Neue"/>
@@ -10754,7 +10786,7 @@
           <p:cNvPr id="5" name="">
             <a:extLst xmlns:a="http://schemas.openxmlformats.org/drawingml/2006/main">
               <a:ext uri="{FF2B5EF4-FFF2-40B4-BE49-F238E27FC236}">
-                <a16:creationId xmlns:a16="http://schemas.microsoft.com/office/drawing/2014/main" id="{D6DA023D-4936-4C8E-A7BD-024F62128C7F}"/>
+                <a16:creationId xmlns:a16="http://schemas.microsoft.com/office/drawing/2014/main" id="{0C8341C1-0F70-4BF0-9C90-6749CBA4EF4A}"/>
               </a:ext>
             </a:extLst>
           </p:cNvPr>
@@ -10785,7 +10817,7 @@
             <a:pPr algn="l">
               <a:defRPr sz="2250" b="1">
                 <a:solidFill>
-                  <a:srgbClr val="092454"/>
+                  <a:srgbClr val="1C2E4A"/>
                 </a:solidFill>
                 <a:latin typeface="Helvetica Neue"/>
                 <a:ea typeface="Helvetica Neue"/>
@@ -10795,7 +10827,7 @@
             <a:r>
               <a:rPr sz="2250" b="1">
                 <a:solidFill>
-                  <a:srgbClr val="092454"/>
+                  <a:srgbClr val="1C2E4A"/>
                 </a:solidFill>
                 <a:latin typeface="Helvetica Neue"/>
                 <a:ea typeface="Helvetica Neue"/>
@@ -10811,7 +10843,7 @@
           <p:cNvPr id="6" name="">
             <a:extLst xmlns:a="http://schemas.openxmlformats.org/drawingml/2006/main">
               <a:ext uri="{FF2B5EF4-FFF2-40B4-BE49-F238E27FC236}">
-                <a16:creationId xmlns:a16="http://schemas.microsoft.com/office/drawing/2014/main" id="{AB0B0934-08E4-4DDC-9BCF-610EC7796112}"/>
+                <a16:creationId xmlns:a16="http://schemas.microsoft.com/office/drawing/2014/main" id="{C1E6FD2A-7FC5-4C0C-B188-94A27E98ED60}"/>
               </a:ext>
             </a:extLst>
           </p:cNvPr>
@@ -10831,7 +10863,7 @@
             </a:avLst>
           </a:prstGeom>
           <a:solidFill xmlns:a="http://schemas.openxmlformats.org/drawingml/2006/main">
-            <a:srgbClr val="EEF7FF"/>
+            <a:srgbClr val="D1CFC9"/>
           </a:solidFill>
           <a:ln xmlns:a="http://schemas.openxmlformats.org/drawingml/2006/main" w="0">
             <a:noFill/>
@@ -10843,7 +10875,7 @@
           <p:cNvPr id="7" name="">
             <a:extLst xmlns:a="http://schemas.openxmlformats.org/drawingml/2006/main">
               <a:ext uri="{FF2B5EF4-FFF2-40B4-BE49-F238E27FC236}">
-                <a16:creationId xmlns:a16="http://schemas.microsoft.com/office/drawing/2014/main" id="{B3D5B842-3176-46E4-ADE5-96CA4F9976B6}"/>
+                <a16:creationId xmlns:a16="http://schemas.microsoft.com/office/drawing/2014/main" id="{ACD1116E-D64D-4145-BBC0-E6FA2F386E13}"/>
               </a:ext>
             </a:extLst>
           </p:cNvPr>
@@ -10874,7 +10906,7 @@
             <a:pPr algn="ctr">
               <a:defRPr sz="1350" b="1">
                 <a:solidFill>
-                  <a:srgbClr val="2563EB"/>
+                  <a:srgbClr val="52677D"/>
                 </a:solidFill>
                 <a:latin typeface="Helvetica Neue"/>
                 <a:ea typeface="Helvetica Neue"/>
@@ -10884,7 +10916,7 @@
             <a:r>
               <a:rPr sz="1350" b="1">
                 <a:solidFill>
-                  <a:srgbClr val="2563EB"/>
+                  <a:srgbClr val="52677D"/>
                 </a:solidFill>
                 <a:latin typeface="Helvetica Neue"/>
                 <a:ea typeface="Helvetica Neue"/>
@@ -10900,7 +10932,7 @@
           <p:cNvPr id="8" name="">
             <a:extLst xmlns:a="http://schemas.openxmlformats.org/drawingml/2006/main">
               <a:ext uri="{FF2B5EF4-FFF2-40B4-BE49-F238E27FC236}">
-                <a16:creationId xmlns:a16="http://schemas.microsoft.com/office/drawing/2014/main" id="{420AF82E-5178-4338-9452-EE337796DAEC}"/>
+                <a16:creationId xmlns:a16="http://schemas.microsoft.com/office/drawing/2014/main" id="{4167CDB7-23F0-4D6F-9170-3CAC403FAEF2}"/>
               </a:ext>
             </a:extLst>
           </p:cNvPr>
@@ -10931,7 +10963,7 @@
             <a:pPr algn="l">
               <a:defRPr sz="1575" b="0">
                 <a:solidFill>
-                  <a:srgbClr val="10213D"/>
+                  <a:srgbClr val="0F1A2B"/>
                 </a:solidFill>
                 <a:latin typeface="Helvetica Neue"/>
                 <a:ea typeface="Helvetica Neue"/>
@@ -10941,7 +10973,7 @@
             <a:r>
               <a:rPr sz="1575" b="0">
                 <a:solidFill>
-                  <a:srgbClr val="10213D"/>
+                  <a:srgbClr val="0F1A2B"/>
                 </a:solidFill>
                 <a:latin typeface="Helvetica Neue"/>
                 <a:ea typeface="Helvetica Neue"/>
@@ -10957,7 +10989,7 @@
           <p:cNvPr id="9" name="">
             <a:extLst xmlns:a="http://schemas.openxmlformats.org/drawingml/2006/main">
               <a:ext uri="{FF2B5EF4-FFF2-40B4-BE49-F238E27FC236}">
-                <a16:creationId xmlns:a16="http://schemas.microsoft.com/office/drawing/2014/main" id="{447C3710-20BD-4C4F-A334-D30FCA34BD83}"/>
+                <a16:creationId xmlns:a16="http://schemas.microsoft.com/office/drawing/2014/main" id="{6DE97640-94D8-4D77-8245-45E7428EA4C9}"/>
               </a:ext>
             </a:extLst>
           </p:cNvPr>
@@ -10977,7 +11009,7 @@
             </a:avLst>
           </a:prstGeom>
           <a:solidFill xmlns:a="http://schemas.openxmlformats.org/drawingml/2006/main">
-            <a:srgbClr val="EEF7FF"/>
+            <a:srgbClr val="D1CFC9"/>
           </a:solidFill>
           <a:ln xmlns:a="http://schemas.openxmlformats.org/drawingml/2006/main" w="0">
             <a:noFill/>
@@ -10989,7 +11021,7 @@
           <p:cNvPr id="10" name="">
             <a:extLst xmlns:a="http://schemas.openxmlformats.org/drawingml/2006/main">
               <a:ext uri="{FF2B5EF4-FFF2-40B4-BE49-F238E27FC236}">
-                <a16:creationId xmlns:a16="http://schemas.microsoft.com/office/drawing/2014/main" id="{A816F329-D20E-4556-AF2D-0C638F764591}"/>
+                <a16:creationId xmlns:a16="http://schemas.microsoft.com/office/drawing/2014/main" id="{669EE973-60B8-447D-8244-CBBCA7475FF6}"/>
               </a:ext>
             </a:extLst>
           </p:cNvPr>
@@ -11020,7 +11052,7 @@
             <a:pPr algn="ctr">
               <a:defRPr sz="1350" b="1">
                 <a:solidFill>
-                  <a:srgbClr val="2563EB"/>
+                  <a:srgbClr val="52677D"/>
                 </a:solidFill>
                 <a:latin typeface="Helvetica Neue"/>
                 <a:ea typeface="Helvetica Neue"/>
@@ -11030,7 +11062,7 @@
             <a:r>
               <a:rPr sz="1350" b="1">
                 <a:solidFill>
-                  <a:srgbClr val="2563EB"/>
+                  <a:srgbClr val="52677D"/>
                 </a:solidFill>
                 <a:latin typeface="Helvetica Neue"/>
                 <a:ea typeface="Helvetica Neue"/>
@@ -11046,7 +11078,7 @@
           <p:cNvPr id="11" name="">
             <a:extLst xmlns:a="http://schemas.openxmlformats.org/drawingml/2006/main">
               <a:ext uri="{FF2B5EF4-FFF2-40B4-BE49-F238E27FC236}">
-                <a16:creationId xmlns:a16="http://schemas.microsoft.com/office/drawing/2014/main" id="{B595B108-4EAB-408E-B44C-25A94CA24E50}"/>
+                <a16:creationId xmlns:a16="http://schemas.microsoft.com/office/drawing/2014/main" id="{8326B240-C0DC-46BA-942E-75F8F8A5D0E7}"/>
               </a:ext>
             </a:extLst>
           </p:cNvPr>
@@ -11077,7 +11109,7 @@
             <a:pPr algn="l">
               <a:defRPr sz="1575" b="0">
                 <a:solidFill>
-                  <a:srgbClr val="10213D"/>
+                  <a:srgbClr val="0F1A2B"/>
                 </a:solidFill>
                 <a:latin typeface="Helvetica Neue"/>
                 <a:ea typeface="Helvetica Neue"/>
@@ -11087,7 +11119,7 @@
             <a:r>
               <a:rPr sz="1575" b="0">
                 <a:solidFill>
-                  <a:srgbClr val="10213D"/>
+                  <a:srgbClr val="0F1A2B"/>
                 </a:solidFill>
                 <a:latin typeface="Helvetica Neue"/>
                 <a:ea typeface="Helvetica Neue"/>
@@ -11103,7 +11135,7 @@
           <p:cNvPr id="12" name="">
             <a:extLst xmlns:a="http://schemas.openxmlformats.org/drawingml/2006/main">
               <a:ext uri="{FF2B5EF4-FFF2-40B4-BE49-F238E27FC236}">
-                <a16:creationId xmlns:a16="http://schemas.microsoft.com/office/drawing/2014/main" id="{2743C020-B3F9-43C6-8D36-ADF8E7A4CFAA}"/>
+                <a16:creationId xmlns:a16="http://schemas.microsoft.com/office/drawing/2014/main" id="{AB55E282-B786-466B-A52D-EDA61A8F1AF6}"/>
               </a:ext>
             </a:extLst>
           </p:cNvPr>
@@ -11123,7 +11155,7 @@
             </a:avLst>
           </a:prstGeom>
           <a:solidFill xmlns:a="http://schemas.openxmlformats.org/drawingml/2006/main">
-            <a:srgbClr val="EEF7FF"/>
+            <a:srgbClr val="D1CFC9"/>
           </a:solidFill>
           <a:ln xmlns:a="http://schemas.openxmlformats.org/drawingml/2006/main" w="0">
             <a:noFill/>
@@ -11135,7 +11167,7 @@
           <p:cNvPr id="13" name="">
             <a:extLst xmlns:a="http://schemas.openxmlformats.org/drawingml/2006/main">
               <a:ext uri="{FF2B5EF4-FFF2-40B4-BE49-F238E27FC236}">
-                <a16:creationId xmlns:a16="http://schemas.microsoft.com/office/drawing/2014/main" id="{5851B4F9-41BB-4FD5-B375-CF3440DA6655}"/>
+                <a16:creationId xmlns:a16="http://schemas.microsoft.com/office/drawing/2014/main" id="{5DEE0631-AFA6-4DF7-895D-EEB7D89D463A}"/>
               </a:ext>
             </a:extLst>
           </p:cNvPr>
@@ -11166,7 +11198,7 @@
             <a:pPr algn="ctr">
               <a:defRPr sz="1350" b="1">
                 <a:solidFill>
-                  <a:srgbClr val="2563EB"/>
+                  <a:srgbClr val="52677D"/>
                 </a:solidFill>
                 <a:latin typeface="Helvetica Neue"/>
                 <a:ea typeface="Helvetica Neue"/>
@@ -11176,7 +11208,7 @@
             <a:r>
               <a:rPr sz="1350" b="1">
                 <a:solidFill>
-                  <a:srgbClr val="2563EB"/>
+                  <a:srgbClr val="52677D"/>
                 </a:solidFill>
                 <a:latin typeface="Helvetica Neue"/>
                 <a:ea typeface="Helvetica Neue"/>
@@ -11192,7 +11224,7 @@
           <p:cNvPr id="14" name="">
             <a:extLst xmlns:a="http://schemas.openxmlformats.org/drawingml/2006/main">
               <a:ext uri="{FF2B5EF4-FFF2-40B4-BE49-F238E27FC236}">
-                <a16:creationId xmlns:a16="http://schemas.microsoft.com/office/drawing/2014/main" id="{57D125B4-220F-4441-9B1C-D3885B2CA97A}"/>
+                <a16:creationId xmlns:a16="http://schemas.microsoft.com/office/drawing/2014/main" id="{770A4340-EB46-4379-8379-42E424A44ECE}"/>
               </a:ext>
             </a:extLst>
           </p:cNvPr>
@@ -11223,7 +11255,7 @@
             <a:pPr algn="l">
               <a:defRPr sz="1575" b="0">
                 <a:solidFill>
-                  <a:srgbClr val="10213D"/>
+                  <a:srgbClr val="0F1A2B"/>
                 </a:solidFill>
                 <a:latin typeface="Helvetica Neue"/>
                 <a:ea typeface="Helvetica Neue"/>
@@ -11233,7 +11265,7 @@
             <a:r>
               <a:rPr sz="1575" b="0">
                 <a:solidFill>
-                  <a:srgbClr val="10213D"/>
+                  <a:srgbClr val="0F1A2B"/>
                 </a:solidFill>
                 <a:latin typeface="Helvetica Neue"/>
                 <a:ea typeface="Helvetica Neue"/>
@@ -11249,7 +11281,7 @@
           <p:cNvPr id="15" name="">
             <a:extLst xmlns:a="http://schemas.openxmlformats.org/drawingml/2006/main">
               <a:ext uri="{FF2B5EF4-FFF2-40B4-BE49-F238E27FC236}">
-                <a16:creationId xmlns:a16="http://schemas.microsoft.com/office/drawing/2014/main" id="{842AE091-6A3C-44D9-B9B5-EA86FF442911}"/>
+                <a16:creationId xmlns:a16="http://schemas.microsoft.com/office/drawing/2014/main" id="{BB88274C-D442-49DE-8474-28E327AA7F3F}"/>
               </a:ext>
             </a:extLst>
           </p:cNvPr>
@@ -11269,7 +11301,7 @@
             </a:avLst>
           </a:prstGeom>
           <a:solidFill xmlns:a="http://schemas.openxmlformats.org/drawingml/2006/main">
-            <a:srgbClr val="EEF7FF"/>
+            <a:srgbClr val="D1CFC9"/>
           </a:solidFill>
           <a:ln xmlns:a="http://schemas.openxmlformats.org/drawingml/2006/main" w="0">
             <a:noFill/>
@@ -11281,7 +11313,7 @@
           <p:cNvPr id="16" name="">
             <a:extLst xmlns:a="http://schemas.openxmlformats.org/drawingml/2006/main">
               <a:ext uri="{FF2B5EF4-FFF2-40B4-BE49-F238E27FC236}">
-                <a16:creationId xmlns:a16="http://schemas.microsoft.com/office/drawing/2014/main" id="{C194646A-B960-4343-AC18-C99289CDA9F6}"/>
+                <a16:creationId xmlns:a16="http://schemas.microsoft.com/office/drawing/2014/main" id="{06B772B8-8B65-42EB-A507-77B9986DC314}"/>
               </a:ext>
             </a:extLst>
           </p:cNvPr>
@@ -11312,7 +11344,7 @@
             <a:pPr algn="l">
               <a:defRPr sz="1125" b="0">
                 <a:solidFill>
-                  <a:srgbClr val="092454"/>
+                  <a:srgbClr val="1C2E4A"/>
                 </a:solidFill>
                 <a:latin typeface="Helvetica Neue"/>
                 <a:ea typeface="Helvetica Neue"/>
@@ -11322,7 +11354,7 @@
             <a:r>
               <a:rPr sz="1125" b="0">
                 <a:solidFill>
-                  <a:srgbClr val="092454"/>
+                  <a:srgbClr val="1C2E4A"/>
                 </a:solidFill>
                 <a:latin typeface="Helvetica Neue"/>
                 <a:ea typeface="Helvetica Neue"/>
@@ -11338,7 +11370,7 @@
           <p:cNvPr id="17" name="">
             <a:extLst xmlns:a="http://schemas.openxmlformats.org/drawingml/2006/main">
               <a:ext uri="{FF2B5EF4-FFF2-40B4-BE49-F238E27FC236}">
-                <a16:creationId xmlns:a16="http://schemas.microsoft.com/office/drawing/2014/main" id="{E81A3818-0073-49EA-BFFA-FEB41D8E307B}"/>
+                <a16:creationId xmlns:a16="http://schemas.microsoft.com/office/drawing/2014/main" id="{0F3B1714-D0FB-4479-82F4-C3439FF73571}"/>
               </a:ext>
             </a:extLst>
           </p:cNvPr>
@@ -11358,7 +11390,7 @@
             </a:avLst>
           </a:prstGeom>
           <a:solidFill xmlns:a="http://schemas.openxmlformats.org/drawingml/2006/main">
-            <a:srgbClr val="092454"/>
+            <a:srgbClr val="1C2E4A"/>
           </a:solidFill>
           <a:ln xmlns:a="http://schemas.openxmlformats.org/drawingml/2006/main" w="0">
             <a:noFill/>
@@ -11370,7 +11402,7 @@
           <p:cNvPr id="18" name="">
             <a:extLst xmlns:a="http://schemas.openxmlformats.org/drawingml/2006/main">
               <a:ext uri="{FF2B5EF4-FFF2-40B4-BE49-F238E27FC236}">
-                <a16:creationId xmlns:a16="http://schemas.microsoft.com/office/drawing/2014/main" id="{47FDD8AB-D8D6-4D4E-B4DE-3ED7B9775482}"/>
+                <a16:creationId xmlns:a16="http://schemas.microsoft.com/office/drawing/2014/main" id="{80CBF779-E882-45A2-89A1-E7C28AE7EE79}"/>
               </a:ext>
             </a:extLst>
           </p:cNvPr>
@@ -11401,7 +11433,7 @@
             <a:pPr algn="l">
               <a:defRPr sz="1050" b="1">
                 <a:solidFill>
-                  <a:srgbClr val="FFD43B"/>
+                  <a:srgbClr val="D1CFC9"/>
                 </a:solidFill>
                 <a:latin typeface="Helvetica Neue"/>
                 <a:ea typeface="Helvetica Neue"/>
@@ -11411,7 +11443,7 @@
             <a:r>
               <a:rPr sz="1050" b="1">
                 <a:solidFill>
-                  <a:srgbClr val="FFD43B"/>
+                  <a:srgbClr val="D1CFC9"/>
                 </a:solidFill>
                 <a:latin typeface="Helvetica Neue"/>
                 <a:ea typeface="Helvetica Neue"/>
@@ -11427,7 +11459,7 @@
           <p:cNvPr id="19" name="">
             <a:extLst xmlns:a="http://schemas.openxmlformats.org/drawingml/2006/main">
               <a:ext uri="{FF2B5EF4-FFF2-40B4-BE49-F238E27FC236}">
-                <a16:creationId xmlns:a16="http://schemas.microsoft.com/office/drawing/2014/main" id="{B3096385-E61D-40C6-8823-F4F60120009F}"/>
+                <a16:creationId xmlns:a16="http://schemas.microsoft.com/office/drawing/2014/main" id="{AAF7EC16-8867-4F93-844C-1EB11872FD12}"/>
               </a:ext>
             </a:extLst>
           </p:cNvPr>
@@ -11484,7 +11516,7 @@
           <p:cNvPr id="20" name="">
             <a:extLst xmlns:a="http://schemas.openxmlformats.org/drawingml/2006/main">
               <a:ext uri="{FF2B5EF4-FFF2-40B4-BE49-F238E27FC236}">
-                <a16:creationId xmlns:a16="http://schemas.microsoft.com/office/drawing/2014/main" id="{B59059FC-1FD4-4B1B-A6F0-66A1698EF2E1}"/>
+                <a16:creationId xmlns:a16="http://schemas.microsoft.com/office/drawing/2014/main" id="{DD4D1E2E-214B-4548-B3DC-BCCF9CDB375F}"/>
               </a:ext>
             </a:extLst>
           </p:cNvPr>
@@ -11515,7 +11547,7 @@
             <a:pPr algn="l">
               <a:defRPr sz="1125" b="0">
                 <a:solidFill>
-                  <a:srgbClr val="BFE6FF"/>
+                  <a:srgbClr val="BDC4D4"/>
                 </a:solidFill>
                 <a:latin typeface="Helvetica Neue"/>
                 <a:ea typeface="Helvetica Neue"/>
@@ -11525,7 +11557,7 @@
             <a:r>
               <a:rPr sz="1125" b="0">
                 <a:solidFill>
-                  <a:srgbClr val="BFE6FF"/>
+                  <a:srgbClr val="BDC4D4"/>
                 </a:solidFill>
                 <a:latin typeface="Helvetica Neue"/>
                 <a:ea typeface="Helvetica Neue"/>
@@ -11541,7 +11573,7 @@
           <p:cNvPr id="21" name="">
             <a:extLst xmlns:a="http://schemas.openxmlformats.org/drawingml/2006/main">
               <a:ext uri="{FF2B5EF4-FFF2-40B4-BE49-F238E27FC236}">
-                <a16:creationId xmlns:a16="http://schemas.microsoft.com/office/drawing/2014/main" id="{B12CD3C2-AD32-45C5-95D3-9A11BC681A56}"/>
+                <a16:creationId xmlns:a16="http://schemas.microsoft.com/office/drawing/2014/main" id="{76445BB2-163A-4838-B6E2-D8D007044ABA}"/>
               </a:ext>
             </a:extLst>
           </p:cNvPr>
@@ -11559,7 +11591,7 @@
             <a:avLst/>
           </a:prstGeom>
           <a:solidFill xmlns:a="http://schemas.openxmlformats.org/drawingml/2006/main">
-            <a:srgbClr val="D8E5F2"/>
+            <a:srgbClr val="BDC4D4"/>
           </a:solidFill>
           <a:ln xmlns:a="http://schemas.openxmlformats.org/drawingml/2006/main" w="0">
             <a:noFill/>
@@ -11571,7 +11603,7 @@
           <p:cNvPr id="22" name="">
             <a:extLst xmlns:a="http://schemas.openxmlformats.org/drawingml/2006/main">
               <a:ext uri="{FF2B5EF4-FFF2-40B4-BE49-F238E27FC236}">
-                <a16:creationId xmlns:a16="http://schemas.microsoft.com/office/drawing/2014/main" id="{554CF869-C681-4FF4-B07C-3826CB0FF737}"/>
+                <a16:creationId xmlns:a16="http://schemas.microsoft.com/office/drawing/2014/main" id="{1C7C442C-18F5-4773-8424-14A1337C6916}"/>
               </a:ext>
             </a:extLst>
           </p:cNvPr>
@@ -11602,7 +11634,7 @@
             <a:pPr algn="l">
               <a:defRPr sz="750" b="0">
                 <a:solidFill>
-                  <a:srgbClr val="61718A"/>
+                  <a:srgbClr val="52677D"/>
                 </a:solidFill>
                 <a:latin typeface="Helvetica Neue"/>
                 <a:ea typeface="Helvetica Neue"/>
@@ -11612,7 +11644,7 @@
             <a:r>
               <a:rPr sz="750" b="0">
                 <a:solidFill>
-                  <a:srgbClr val="61718A"/>
+                  <a:srgbClr val="52677D"/>
                 </a:solidFill>
                 <a:latin typeface="Helvetica Neue"/>
                 <a:ea typeface="Helvetica Neue"/>
@@ -11628,7 +11660,7 @@
           <p:cNvPr id="23" name="">
             <a:extLst xmlns:a="http://schemas.openxmlformats.org/drawingml/2006/main">
               <a:ext uri="{FF2B5EF4-FFF2-40B4-BE49-F238E27FC236}">
-                <a16:creationId xmlns:a16="http://schemas.microsoft.com/office/drawing/2014/main" id="{99BA060C-2FBA-4BD9-9518-47C70055FA99}"/>
+                <a16:creationId xmlns:a16="http://schemas.microsoft.com/office/drawing/2014/main" id="{550951D2-9538-4129-8263-2443CEDC7AF7}"/>
               </a:ext>
             </a:extLst>
           </p:cNvPr>
@@ -11659,7 +11691,7 @@
             <a:pPr algn="r">
               <a:defRPr sz="825" b="1">
                 <a:solidFill>
-                  <a:srgbClr val="2563EB"/>
+                  <a:srgbClr val="52677D"/>
                 </a:solidFill>
                 <a:latin typeface="Helvetica Neue"/>
                 <a:ea typeface="Helvetica Neue"/>
@@ -11669,7 +11701,7 @@
             <a:r>
               <a:rPr sz="825" b="1">
                 <a:solidFill>
-                  <a:srgbClr val="2563EB"/>
+                  <a:srgbClr val="52677D"/>
                 </a:solidFill>
                 <a:latin typeface="Helvetica Neue"/>
                 <a:ea typeface="Helvetica Neue"/>
@@ -11683,7 +11715,7 @@
     </p:spTree>
     <p:extLst>
       <p:ext uri="{BB962C8B-B14F-4D97-AF65-F5344CB8AC3E}">
-        <p14:creationId xmlns:p14="http://schemas.microsoft.com/office/powerpoint/2010/main" val="1035527986"/>
+        <p14:creationId xmlns:p14="http://schemas.microsoft.com/office/powerpoint/2010/main" val="937164381"/>
       </p:ext>
     </p:extLst>
   </p:cSld>
@@ -11696,7 +11728,7 @@
     <p:bg>
       <p:bgPr>
         <a:solidFill xmlns:a="http://schemas.openxmlformats.org/drawingml/2006/main">
-          <a:srgbClr val="092454"/>
+          <a:srgbClr val="1C2E4A"/>
         </a:solidFill>
       </p:bgPr>
     </p:bg>
@@ -11714,7 +11746,7 @@
           <p:cNvPr id="20" name="">
             <a:extLst xmlns:a="http://schemas.openxmlformats.org/drawingml/2006/main">
               <a:ext uri="{FF2B5EF4-FFF2-40B4-BE49-F238E27FC236}">
-                <a16:creationId xmlns:a16="http://schemas.microsoft.com/office/drawing/2014/main" id="{356850C1-DCD5-4AE3-ACB0-B487794D2F81}"/>
+                <a16:creationId xmlns:a16="http://schemas.microsoft.com/office/drawing/2014/main" id="{2A934305-BFCE-4C7E-AD3F-07D09B20D38D}"/>
               </a:ext>
             </a:extLst>
           </p:cNvPr>
@@ -11745,7 +11777,7 @@
             <a:pPr algn="l">
               <a:defRPr sz="1125" b="1">
                 <a:solidFill>
-                  <a:srgbClr val="FFD43B"/>
+                  <a:srgbClr val="D1CFC9"/>
                 </a:solidFill>
                 <a:latin typeface="Helvetica Neue"/>
                 <a:ea typeface="Helvetica Neue"/>
@@ -11755,7 +11787,7 @@
             <a:r>
               <a:rPr sz="1125" b="1">
                 <a:solidFill>
-                  <a:srgbClr val="FFD43B"/>
+                  <a:srgbClr val="D1CFC9"/>
                 </a:solidFill>
                 <a:latin typeface="Helvetica Neue"/>
                 <a:ea typeface="Helvetica Neue"/>
@@ -11771,7 +11803,7 @@
           <p:cNvPr id="2" name="">
             <a:extLst xmlns:a="http://schemas.openxmlformats.org/drawingml/2006/main">
               <a:ext uri="{FF2B5EF4-FFF2-40B4-BE49-F238E27FC236}">
-                <a16:creationId xmlns:a16="http://schemas.microsoft.com/office/drawing/2014/main" id="{EE2D94B1-3736-4D85-8AFD-96FD2DCAC34C}"/>
+                <a16:creationId xmlns:a16="http://schemas.microsoft.com/office/drawing/2014/main" id="{778335CD-070A-4CAC-8E3E-D7F04E19F61D}"/>
               </a:ext>
             </a:extLst>
           </p:cNvPr>
@@ -11828,7 +11860,7 @@
           <p:cNvPr id="3" name="">
             <a:extLst xmlns:a="http://schemas.openxmlformats.org/drawingml/2006/main">
               <a:ext uri="{FF2B5EF4-FFF2-40B4-BE49-F238E27FC236}">
-                <a16:creationId xmlns:a16="http://schemas.microsoft.com/office/drawing/2014/main" id="{63D4E7EB-7487-499B-AE92-76DCABA6EF6D}"/>
+                <a16:creationId xmlns:a16="http://schemas.microsoft.com/office/drawing/2014/main" id="{3903C92F-7B56-478E-A6C1-48CFC34703DD}"/>
               </a:ext>
             </a:extLst>
           </p:cNvPr>
@@ -11848,7 +11880,7 @@
             </a:avLst>
           </a:prstGeom>
           <a:solidFill xmlns:a="http://schemas.openxmlformats.org/drawingml/2006/main">
-            <a:srgbClr val="FFD43B"/>
+            <a:srgbClr val="D1CFC9"/>
           </a:solidFill>
           <a:ln xmlns:a="http://schemas.openxmlformats.org/drawingml/2006/main" w="0">
             <a:noFill/>
@@ -11860,7 +11892,7 @@
           <p:cNvPr id="4" name="">
             <a:extLst xmlns:a="http://schemas.openxmlformats.org/drawingml/2006/main">
               <a:ext uri="{FF2B5EF4-FFF2-40B4-BE49-F238E27FC236}">
-                <a16:creationId xmlns:a16="http://schemas.microsoft.com/office/drawing/2014/main" id="{B038E1F3-3944-41DB-B68E-85558EB084AD}"/>
+                <a16:creationId xmlns:a16="http://schemas.microsoft.com/office/drawing/2014/main" id="{DBCF1A3E-6310-49B4-A2B6-902C43C21257}"/>
               </a:ext>
             </a:extLst>
           </p:cNvPr>
@@ -11891,7 +11923,7 @@
             <a:pPr algn="ctr">
               <a:defRPr sz="1275" b="1">
                 <a:solidFill>
-                  <a:srgbClr val="092454"/>
+                  <a:srgbClr val="1C2E4A"/>
                 </a:solidFill>
                 <a:latin typeface="Helvetica Neue"/>
                 <a:ea typeface="Helvetica Neue"/>
@@ -11901,7 +11933,7 @@
             <a:r>
               <a:rPr sz="1275" b="1">
                 <a:solidFill>
-                  <a:srgbClr val="092454"/>
+                  <a:srgbClr val="1C2E4A"/>
                 </a:solidFill>
                 <a:latin typeface="Helvetica Neue"/>
                 <a:ea typeface="Helvetica Neue"/>
@@ -11917,7 +11949,7 @@
           <p:cNvPr id="5" name="">
             <a:extLst xmlns:a="http://schemas.openxmlformats.org/drawingml/2006/main">
               <a:ext uri="{FF2B5EF4-FFF2-40B4-BE49-F238E27FC236}">
-                <a16:creationId xmlns:a16="http://schemas.microsoft.com/office/drawing/2014/main" id="{50487108-3D5A-4EDF-AE56-0016DD42171E}"/>
+                <a16:creationId xmlns:a16="http://schemas.microsoft.com/office/drawing/2014/main" id="{E824CC2F-A088-43C9-B214-25BA5E0E5163}"/>
               </a:ext>
             </a:extLst>
           </p:cNvPr>
@@ -11948,7 +11980,7 @@
             <a:pPr algn="l">
               <a:defRPr sz="1950" b="1">
                 <a:solidFill>
-                  <a:srgbClr val="FFD43B"/>
+                  <a:srgbClr val="D1CFC9"/>
                 </a:solidFill>
                 <a:latin typeface="Helvetica Neue"/>
                 <a:ea typeface="Helvetica Neue"/>
@@ -11958,7 +11990,7 @@
             <a:r>
               <a:rPr sz="1950" b="1">
                 <a:solidFill>
-                  <a:srgbClr val="FFD43B"/>
+                  <a:srgbClr val="D1CFC9"/>
                 </a:solidFill>
                 <a:latin typeface="Helvetica Neue"/>
                 <a:ea typeface="Helvetica Neue"/>
@@ -11974,7 +12006,7 @@
           <p:cNvPr id="6" name="">
             <a:extLst xmlns:a="http://schemas.openxmlformats.org/drawingml/2006/main">
               <a:ext uri="{FF2B5EF4-FFF2-40B4-BE49-F238E27FC236}">
-                <a16:creationId xmlns:a16="http://schemas.microsoft.com/office/drawing/2014/main" id="{6D6CE560-4687-4C17-A423-3301175C514E}"/>
+                <a16:creationId xmlns:a16="http://schemas.microsoft.com/office/drawing/2014/main" id="{DDFCC71C-1AF2-4DC6-B396-7550CDE48380}"/>
               </a:ext>
             </a:extLst>
           </p:cNvPr>
@@ -12031,7 +12063,7 @@
           <p:cNvPr id="7" name="">
             <a:extLst xmlns:a="http://schemas.openxmlformats.org/drawingml/2006/main">
               <a:ext uri="{FF2B5EF4-FFF2-40B4-BE49-F238E27FC236}">
-                <a16:creationId xmlns:a16="http://schemas.microsoft.com/office/drawing/2014/main" id="{D3EC4796-1661-4A95-83DF-57A9F599BA0B}"/>
+                <a16:creationId xmlns:a16="http://schemas.microsoft.com/office/drawing/2014/main" id="{14F18486-33A2-44FD-B455-2C62F9572CA9}"/>
               </a:ext>
             </a:extLst>
           </p:cNvPr>
@@ -12062,7 +12094,7 @@
             <a:pPr algn="l">
               <a:defRPr sz="1950" b="1">
                 <a:solidFill>
-                  <a:srgbClr val="FFD43B"/>
+                  <a:srgbClr val="D1CFC9"/>
                 </a:solidFill>
                 <a:latin typeface="Helvetica Neue"/>
                 <a:ea typeface="Helvetica Neue"/>
@@ -12072,7 +12104,7 @@
             <a:r>
               <a:rPr sz="1950" b="1">
                 <a:solidFill>
-                  <a:srgbClr val="FFD43B"/>
+                  <a:srgbClr val="D1CFC9"/>
                 </a:solidFill>
                 <a:latin typeface="Helvetica Neue"/>
                 <a:ea typeface="Helvetica Neue"/>
@@ -12088,7 +12120,7 @@
           <p:cNvPr id="8" name="">
             <a:extLst xmlns:a="http://schemas.openxmlformats.org/drawingml/2006/main">
               <a:ext uri="{FF2B5EF4-FFF2-40B4-BE49-F238E27FC236}">
-                <a16:creationId xmlns:a16="http://schemas.microsoft.com/office/drawing/2014/main" id="{78EC8C82-819D-4267-BE75-FB5A529DDD2B}"/>
+                <a16:creationId xmlns:a16="http://schemas.microsoft.com/office/drawing/2014/main" id="{788BCAAA-765F-45CB-BD71-96635A775F99}"/>
               </a:ext>
             </a:extLst>
           </p:cNvPr>
@@ -12145,7 +12177,7 @@
           <p:cNvPr id="9" name="">
             <a:extLst xmlns:a="http://schemas.openxmlformats.org/drawingml/2006/main">
               <a:ext uri="{FF2B5EF4-FFF2-40B4-BE49-F238E27FC236}">
-                <a16:creationId xmlns:a16="http://schemas.microsoft.com/office/drawing/2014/main" id="{7C2B281F-F0B8-4F33-8462-F511B6ED517D}"/>
+                <a16:creationId xmlns:a16="http://schemas.microsoft.com/office/drawing/2014/main" id="{376F4446-FDA7-484E-B81C-9A5527B489E3}"/>
               </a:ext>
             </a:extLst>
           </p:cNvPr>
@@ -12176,7 +12208,7 @@
             <a:pPr algn="l">
               <a:defRPr sz="1950" b="1">
                 <a:solidFill>
-                  <a:srgbClr val="FFD43B"/>
+                  <a:srgbClr val="D1CFC9"/>
                 </a:solidFill>
                 <a:latin typeface="Helvetica Neue"/>
                 <a:ea typeface="Helvetica Neue"/>
@@ -12186,7 +12218,7 @@
             <a:r>
               <a:rPr sz="1950" b="1">
                 <a:solidFill>
-                  <a:srgbClr val="FFD43B"/>
+                  <a:srgbClr val="D1CFC9"/>
                 </a:solidFill>
                 <a:latin typeface="Helvetica Neue"/>
                 <a:ea typeface="Helvetica Neue"/>
@@ -12202,7 +12234,7 @@
           <p:cNvPr id="10" name="">
             <a:extLst xmlns:a="http://schemas.openxmlformats.org/drawingml/2006/main">
               <a:ext uri="{FF2B5EF4-FFF2-40B4-BE49-F238E27FC236}">
-                <a16:creationId xmlns:a16="http://schemas.microsoft.com/office/drawing/2014/main" id="{59C6414C-9408-42EC-B2BC-5F81B9FFEBC7}"/>
+                <a16:creationId xmlns:a16="http://schemas.microsoft.com/office/drawing/2014/main" id="{7AE0AFC7-1B2E-46D0-B1F5-9D3AC944EE29}"/>
               </a:ext>
             </a:extLst>
           </p:cNvPr>
@@ -12259,7 +12291,7 @@
           <p:cNvPr id="11" name="">
             <a:extLst xmlns:a="http://schemas.openxmlformats.org/drawingml/2006/main">
               <a:ext uri="{FF2B5EF4-FFF2-40B4-BE49-F238E27FC236}">
-                <a16:creationId xmlns:a16="http://schemas.microsoft.com/office/drawing/2014/main" id="{C7653B9F-6E0B-4D4E-8FF0-A143437070D4}"/>
+                <a16:creationId xmlns:a16="http://schemas.microsoft.com/office/drawing/2014/main" id="{7A32ED56-543F-4533-8C8A-B187F7B52A48}"/>
               </a:ext>
             </a:extLst>
           </p:cNvPr>
@@ -12290,7 +12322,7 @@
             <a:pPr algn="l">
               <a:defRPr sz="1950" b="1">
                 <a:solidFill>
-                  <a:srgbClr val="FFD43B"/>
+                  <a:srgbClr val="D1CFC9"/>
                 </a:solidFill>
                 <a:latin typeface="Helvetica Neue"/>
                 <a:ea typeface="Helvetica Neue"/>
@@ -12300,7 +12332,7 @@
             <a:r>
               <a:rPr sz="1950" b="1">
                 <a:solidFill>
-                  <a:srgbClr val="FFD43B"/>
+                  <a:srgbClr val="D1CFC9"/>
                 </a:solidFill>
                 <a:latin typeface="Helvetica Neue"/>
                 <a:ea typeface="Helvetica Neue"/>
@@ -12316,7 +12348,7 @@
           <p:cNvPr id="12" name="">
             <a:extLst xmlns:a="http://schemas.openxmlformats.org/drawingml/2006/main">
               <a:ext uri="{FF2B5EF4-FFF2-40B4-BE49-F238E27FC236}">
-                <a16:creationId xmlns:a16="http://schemas.microsoft.com/office/drawing/2014/main" id="{9E6FFCB1-93A8-481B-BE07-6A8996C8F20E}"/>
+                <a16:creationId xmlns:a16="http://schemas.microsoft.com/office/drawing/2014/main" id="{77E0802C-2315-4A5D-8EC7-AF1B8DBF8377}"/>
               </a:ext>
             </a:extLst>
           </p:cNvPr>
@@ -12373,7 +12405,7 @@
           <p:cNvPr id="13" name="">
             <a:extLst xmlns:a="http://schemas.openxmlformats.org/drawingml/2006/main">
               <a:ext uri="{FF2B5EF4-FFF2-40B4-BE49-F238E27FC236}">
-                <a16:creationId xmlns:a16="http://schemas.microsoft.com/office/drawing/2014/main" id="{BA113C7D-7814-451E-942F-9A34FE883438}"/>
+                <a16:creationId xmlns:a16="http://schemas.microsoft.com/office/drawing/2014/main" id="{BC2CE28D-CF1A-4519-8A75-4A37C05E30F3}"/>
               </a:ext>
             </a:extLst>
           </p:cNvPr>
@@ -12393,7 +12425,7 @@
             </a:avLst>
           </a:prstGeom>
           <a:solidFill xmlns:a="http://schemas.openxmlformats.org/drawingml/2006/main">
-            <a:srgbClr val="FFD43B"/>
+            <a:srgbClr val="D1CFC9"/>
           </a:solidFill>
           <a:ln xmlns:a="http://schemas.openxmlformats.org/drawingml/2006/main" w="0">
             <a:noFill/>
@@ -12405,7 +12437,7 @@
           <p:cNvPr id="14" name="">
             <a:extLst xmlns:a="http://schemas.openxmlformats.org/drawingml/2006/main">
               <a:ext uri="{FF2B5EF4-FFF2-40B4-BE49-F238E27FC236}">
-                <a16:creationId xmlns:a16="http://schemas.microsoft.com/office/drawing/2014/main" id="{324B3295-97B8-48C8-A23D-3B97E34C150B}"/>
+                <a16:creationId xmlns:a16="http://schemas.microsoft.com/office/drawing/2014/main" id="{FD7D7F83-2D08-414E-B80D-E76F4CF9C8B6}"/>
               </a:ext>
             </a:extLst>
           </p:cNvPr>
@@ -12436,7 +12468,7 @@
             <a:pPr algn="ctr">
               <a:defRPr sz="1050" b="1">
                 <a:solidFill>
-                  <a:srgbClr val="092454"/>
+                  <a:srgbClr val="1C2E4A"/>
                 </a:solidFill>
                 <a:latin typeface="Helvetica Neue"/>
                 <a:ea typeface="Helvetica Neue"/>
@@ -12446,7 +12478,7 @@
             <a:r>
               <a:rPr sz="1050" b="1">
                 <a:solidFill>
-                  <a:srgbClr val="092454"/>
+                  <a:srgbClr val="1C2E4A"/>
                 </a:solidFill>
                 <a:latin typeface="Helvetica Neue"/>
                 <a:ea typeface="Helvetica Neue"/>
@@ -12462,7 +12494,7 @@
           <p:cNvPr id="15" name="">
             <a:extLst xmlns:a="http://schemas.openxmlformats.org/drawingml/2006/main">
               <a:ext uri="{FF2B5EF4-FFF2-40B4-BE49-F238E27FC236}">
-                <a16:creationId xmlns:a16="http://schemas.microsoft.com/office/drawing/2014/main" id="{2E6CDF89-BDAB-4634-843B-ECF5893828BA}"/>
+                <a16:creationId xmlns:a16="http://schemas.microsoft.com/office/drawing/2014/main" id="{C9B6235C-C8F7-4BEC-80B9-70B86202CEA4}"/>
               </a:ext>
             </a:extLst>
           </p:cNvPr>
@@ -12493,7 +12525,7 @@
             <a:pPr algn="ctr">
               <a:defRPr sz="2250" b="1">
                 <a:solidFill>
-                  <a:srgbClr val="092454"/>
+                  <a:srgbClr val="1C2E4A"/>
                 </a:solidFill>
                 <a:latin typeface="Helvetica Neue"/>
                 <a:ea typeface="Helvetica Neue"/>
@@ -12503,7 +12535,7 @@
             <a:r>
               <a:rPr sz="2250" b="1">
                 <a:solidFill>
-                  <a:srgbClr val="092454"/>
+                  <a:srgbClr val="1C2E4A"/>
                 </a:solidFill>
                 <a:latin typeface="Helvetica Neue"/>
                 <a:ea typeface="Helvetica Neue"/>
@@ -12516,7 +12548,7 @@
             <a:pPr algn="ctr">
               <a:defRPr sz="2250" b="1">
                 <a:solidFill>
-                  <a:srgbClr val="092454"/>
+                  <a:srgbClr val="1C2E4A"/>
                 </a:solidFill>
                 <a:latin typeface="Helvetica Neue"/>
                 <a:ea typeface="Helvetica Neue"/>
@@ -12526,7 +12558,7 @@
             <a:r>
               <a:rPr sz="2250" b="1">
                 <a:solidFill>
-                  <a:srgbClr val="092454"/>
+                  <a:srgbClr val="1C2E4A"/>
                 </a:solidFill>
                 <a:latin typeface="Helvetica Neue"/>
                 <a:ea typeface="Helvetica Neue"/>
@@ -12539,7 +12571,7 @@
             <a:pPr algn="ctr">
               <a:defRPr sz="2250" b="1">
                 <a:solidFill>
-                  <a:srgbClr val="092454"/>
+                  <a:srgbClr val="1C2E4A"/>
                 </a:solidFill>
                 <a:latin typeface="Helvetica Neue"/>
                 <a:ea typeface="Helvetica Neue"/>
@@ -12549,7 +12581,7 @@
             <a:r>
               <a:rPr sz="2250" b="1">
                 <a:solidFill>
-                  <a:srgbClr val="092454"/>
+                  <a:srgbClr val="1C2E4A"/>
                 </a:solidFill>
                 <a:latin typeface="Helvetica Neue"/>
                 <a:ea typeface="Helvetica Neue"/>
@@ -12565,7 +12597,7 @@
           <p:cNvPr id="16" name="">
             <a:extLst xmlns:a="http://schemas.openxmlformats.org/drawingml/2006/main">
               <a:ext uri="{FF2B5EF4-FFF2-40B4-BE49-F238E27FC236}">
-                <a16:creationId xmlns:a16="http://schemas.microsoft.com/office/drawing/2014/main" id="{18FE1D8E-5AA4-4359-9735-261DDC6FB50A}"/>
+                <a16:creationId xmlns:a16="http://schemas.microsoft.com/office/drawing/2014/main" id="{D8D7089C-2AFE-4A44-ACE6-85409221CEC9}"/>
               </a:ext>
             </a:extLst>
           </p:cNvPr>
@@ -12596,7 +12628,7 @@
             <a:pPr algn="ctr">
               <a:defRPr sz="1125" b="0">
                 <a:solidFill>
-                  <a:srgbClr val="092454"/>
+                  <a:srgbClr val="1C2E4A"/>
                 </a:solidFill>
                 <a:latin typeface="Helvetica Neue"/>
                 <a:ea typeface="Helvetica Neue"/>
@@ -12606,7 +12638,7 @@
             <a:r>
               <a:rPr sz="1125" b="0">
                 <a:solidFill>
-                  <a:srgbClr val="092454"/>
+                  <a:srgbClr val="1C2E4A"/>
                 </a:solidFill>
                 <a:latin typeface="Helvetica Neue"/>
                 <a:ea typeface="Helvetica Neue"/>
@@ -12622,7 +12654,7 @@
           <p:cNvPr id="17" name="">
             <a:extLst xmlns:a="http://schemas.openxmlformats.org/drawingml/2006/main">
               <a:ext uri="{FF2B5EF4-FFF2-40B4-BE49-F238E27FC236}">
-                <a16:creationId xmlns:a16="http://schemas.microsoft.com/office/drawing/2014/main" id="{F48A3062-BBDF-4E06-94CC-5C5E2BCAFD7D}"/>
+                <a16:creationId xmlns:a16="http://schemas.microsoft.com/office/drawing/2014/main" id="{4F09E6A1-8CFE-4ED7-BE80-6273ADCE0D4C}"/>
               </a:ext>
             </a:extLst>
           </p:cNvPr>
@@ -12640,7 +12672,7 @@
             <a:avLst/>
           </a:prstGeom>
           <a:solidFill xmlns:a="http://schemas.openxmlformats.org/drawingml/2006/main">
-            <a:srgbClr val="31507E"/>
+            <a:srgbClr val="52677D"/>
           </a:solidFill>
           <a:ln xmlns:a="http://schemas.openxmlformats.org/drawingml/2006/main" w="0">
             <a:noFill/>
@@ -12652,7 +12684,7 @@
           <p:cNvPr id="18" name="">
             <a:extLst xmlns:a="http://schemas.openxmlformats.org/drawingml/2006/main">
               <a:ext uri="{FF2B5EF4-FFF2-40B4-BE49-F238E27FC236}">
-                <a16:creationId xmlns:a16="http://schemas.microsoft.com/office/drawing/2014/main" id="{46FD2CC2-1D5E-4794-930D-0C71C9688ABF}"/>
+                <a16:creationId xmlns:a16="http://schemas.microsoft.com/office/drawing/2014/main" id="{3EB90281-216E-4FDA-91FE-EB55D34C233F}"/>
               </a:ext>
             </a:extLst>
           </p:cNvPr>
@@ -12683,7 +12715,7 @@
             <a:pPr algn="l">
               <a:defRPr sz="750" b="0">
                 <a:solidFill>
-                  <a:srgbClr val="BFE6FF"/>
+                  <a:srgbClr val="BDC4D4"/>
                 </a:solidFill>
                 <a:latin typeface="Helvetica Neue"/>
                 <a:ea typeface="Helvetica Neue"/>
@@ -12693,7 +12725,7 @@
             <a:r>
               <a:rPr sz="750" b="0">
                 <a:solidFill>
-                  <a:srgbClr val="BFE6FF"/>
+                  <a:srgbClr val="BDC4D4"/>
                 </a:solidFill>
                 <a:latin typeface="Helvetica Neue"/>
                 <a:ea typeface="Helvetica Neue"/>
@@ -12709,7 +12741,7 @@
           <p:cNvPr id="19" name="">
             <a:extLst xmlns:a="http://schemas.openxmlformats.org/drawingml/2006/main">
               <a:ext uri="{FF2B5EF4-FFF2-40B4-BE49-F238E27FC236}">
-                <a16:creationId xmlns:a16="http://schemas.microsoft.com/office/drawing/2014/main" id="{DF1202F2-44F8-4BD3-A5F6-5A7AD1656BC6}"/>
+                <a16:creationId xmlns:a16="http://schemas.microsoft.com/office/drawing/2014/main" id="{D61C097A-24BF-436A-9DBA-CB935D5402BF}"/>
               </a:ext>
             </a:extLst>
           </p:cNvPr>
@@ -12740,7 +12772,7 @@
             <a:pPr algn="r">
               <a:defRPr sz="825" b="1">
                 <a:solidFill>
-                  <a:srgbClr val="FFD43B"/>
+                  <a:srgbClr val="D1CFC9"/>
                 </a:solidFill>
                 <a:latin typeface="Helvetica Neue"/>
                 <a:ea typeface="Helvetica Neue"/>
@@ -12750,7 +12782,7 @@
             <a:r>
               <a:rPr sz="825" b="1">
                 <a:solidFill>
-                  <a:srgbClr val="FFD43B"/>
+                  <a:srgbClr val="D1CFC9"/>
                 </a:solidFill>
                 <a:latin typeface="Helvetica Neue"/>
                 <a:ea typeface="Helvetica Neue"/>
@@ -12764,7 +12796,7 @@
     </p:spTree>
     <p:extLst>
       <p:ext uri="{BB962C8B-B14F-4D97-AF65-F5344CB8AC3E}">
-        <p14:creationId xmlns:p14="http://schemas.microsoft.com/office/powerpoint/2010/main" val="1216038437"/>
+        <p14:creationId xmlns:p14="http://schemas.microsoft.com/office/powerpoint/2010/main" val="1264582221"/>
       </p:ext>
     </p:extLst>
   </p:cSld>
